--- a/Beta of AI Tech Stocks.pptx
+++ b/Beta of AI Tech Stocks.pptx
@@ -8,25 +8,26 @@
     <p:sldMasterId id="2147483701" r:id="rId7"/>
   </p:sldMasterIdLst>
   <p:notesMasterIdLst>
-    <p:notesMasterId r:id="rId21"/>
+    <p:notesMasterId r:id="rId22"/>
   </p:notesMasterIdLst>
   <p:handoutMasterIdLst>
-    <p:handoutMasterId r:id="rId22"/>
+    <p:handoutMasterId r:id="rId23"/>
   </p:handoutMasterIdLst>
   <p:sldIdLst>
     <p:sldId id="278" r:id="rId8"/>
     <p:sldId id="265" r:id="rId9"/>
     <p:sldId id="675" r:id="rId10"/>
     <p:sldId id="688" r:id="rId11"/>
-    <p:sldId id="692" r:id="rId12"/>
-    <p:sldId id="279" r:id="rId13"/>
-    <p:sldId id="691" r:id="rId14"/>
-    <p:sldId id="695" r:id="rId15"/>
-    <p:sldId id="690" r:id="rId16"/>
-    <p:sldId id="693" r:id="rId17"/>
-    <p:sldId id="280" r:id="rId18"/>
-    <p:sldId id="689" r:id="rId19"/>
-    <p:sldId id="264" r:id="rId20"/>
+    <p:sldId id="697" r:id="rId12"/>
+    <p:sldId id="692" r:id="rId13"/>
+    <p:sldId id="279" r:id="rId14"/>
+    <p:sldId id="691" r:id="rId15"/>
+    <p:sldId id="695" r:id="rId16"/>
+    <p:sldId id="690" r:id="rId17"/>
+    <p:sldId id="693" r:id="rId18"/>
+    <p:sldId id="280" r:id="rId19"/>
+    <p:sldId id="689" r:id="rId20"/>
+    <p:sldId id="264" r:id="rId21"/>
   </p:sldIdLst>
   <p:sldSz cx="24384000" cy="13716000"/>
   <p:notesSz cx="6858000" cy="9144000"/>
@@ -343,19 +344,389 @@
 <p1510:revInfo xmlns:a="http://schemas.openxmlformats.org/drawingml/2006/main" xmlns:r="http://schemas.openxmlformats.org/officeDocument/2006/relationships" xmlns:p1510="http://schemas.microsoft.com/office/powerpoint/2015/10/main">
   <p1510:revLst>
     <p1510:client id="{0950B21C-3EFB-7AA9-69DA-33946E74927B}" v="62" dt="2025-04-30T18:24:38.018"/>
-    <p1510:client id="{0FEE287E-1966-394B-94BF-53038D774F09}" v="4683" dt="2025-04-30T18:25:29.566"/>
+    <p1510:client id="{0FEE287E-1966-394B-94BF-53038D774F09}" v="4738" dt="2025-04-30T20:33:26.232"/>
+    <p1510:client id="{1C3EAF91-458F-C64F-A19D-E5A2169A7527}" v="2" dt="2025-04-30T20:01:47.012"/>
     <p1510:client id="{33774333-907D-2364-38A5-191BE88830FC}" v="3" dt="2025-04-30T17:13:17.124"/>
-    <p1510:client id="{36A048C0-A877-0741-BFC6-3146A6F58B53}" v="26" dt="2025-04-30T18:26:51.554"/>
+    <p1510:client id="{36A048C0-A877-0741-BFC6-3146A6F58B53}" v="39" dt="2025-04-30T20:31:11.281"/>
     <p1510:client id="{38814E23-57B3-49C4-BFE3-39731C5AE2A7}" v="2" dt="2025-04-30T18:23:31.553"/>
     <p1510:client id="{7B289495-062F-77A5-6510-C0A226B1C5A3}" v="3927" dt="2025-04-30T01:02:17.798"/>
     <p1510:client id="{AB4AAF8C-80FC-F755-22F5-A59AC850F230}" v="9" dt="2025-04-30T01:31:50.459"/>
     <p1510:client id="{AECA3316-73A9-7695-51CF-9853D4C79B5C}" v="487" dt="2025-04-30T16:34:00.153"/>
+    <p1510:client id="{B08EEC10-D946-A4AB-A02B-18388C630241}" v="73" dt="2025-04-30T18:57:55.600"/>
+    <p1510:client id="{E7B890AF-C09D-3663-C637-D60BCA16F738}" v="4" dt="2025-04-30T18:51:23.686"/>
   </p1510:revLst>
 </p1510:revInfo>
 </file>
 
 <file path=ppt/changesInfos/changesInfo1.xml><?xml version="1.0" encoding="utf-8"?>
 <pc:chgInfo xmlns:a="http://schemas.openxmlformats.org/drawingml/2006/main" xmlns:r="http://schemas.openxmlformats.org/officeDocument/2006/relationships" xmlns:ac="http://schemas.microsoft.com/office/drawing/2013/main/command" xmlns:pc="http://schemas.microsoft.com/office/powerpoint/2013/main/command">
+  <pc:docChgLst>
+    <pc:chgData name="Eun, Morgan" userId="S::meun@smu.edu::dbb1ad2b-7e27-4a54-93ef-47628e7a32c9" providerId="AD" clId="Web-{B08EEC10-D946-A4AB-A02B-18388C630241}"/>
+    <pc:docChg chg="addSld modSld">
+      <pc:chgData name="Eun, Morgan" userId="S::meun@smu.edu::dbb1ad2b-7e27-4a54-93ef-47628e7a32c9" providerId="AD" clId="Web-{B08EEC10-D946-A4AB-A02B-18388C630241}" dt="2025-04-30T18:57:55.600" v="71" actId="1076"/>
+      <pc:docMkLst>
+        <pc:docMk/>
+      </pc:docMkLst>
+      <pc:sldChg chg="modSp">
+        <pc:chgData name="Eun, Morgan" userId="S::meun@smu.edu::dbb1ad2b-7e27-4a54-93ef-47628e7a32c9" providerId="AD" clId="Web-{B08EEC10-D946-A4AB-A02B-18388C630241}" dt="2025-04-30T18:45:59.416" v="26" actId="1076"/>
+        <pc:sldMkLst>
+          <pc:docMk/>
+          <pc:sldMk cId="1505823097" sldId="265"/>
+        </pc:sldMkLst>
+        <pc:spChg chg="mod">
+          <ac:chgData name="Eun, Morgan" userId="S::meun@smu.edu::dbb1ad2b-7e27-4a54-93ef-47628e7a32c9" providerId="AD" clId="Web-{B08EEC10-D946-A4AB-A02B-18388C630241}" dt="2025-04-30T18:44:28.413" v="21" actId="1076"/>
+          <ac:spMkLst>
+            <pc:docMk/>
+            <pc:sldMk cId="1505823097" sldId="265"/>
+            <ac:spMk id="2" creationId="{F83B0120-5D7C-AED5-C808-D154FBBB509D}"/>
+          </ac:spMkLst>
+        </pc:spChg>
+        <pc:spChg chg="mod">
+          <ac:chgData name="Eun, Morgan" userId="S::meun@smu.edu::dbb1ad2b-7e27-4a54-93ef-47628e7a32c9" providerId="AD" clId="Web-{B08EEC10-D946-A4AB-A02B-18388C630241}" dt="2025-04-30T18:44:22.600" v="20" actId="1076"/>
+          <ac:spMkLst>
+            <pc:docMk/>
+            <pc:sldMk cId="1505823097" sldId="265"/>
+            <ac:spMk id="3" creationId="{67376405-A736-F70F-6BFC-69505CA7DFE0}"/>
+          </ac:spMkLst>
+        </pc:spChg>
+        <pc:spChg chg="mod">
+          <ac:chgData name="Eun, Morgan" userId="S::meun@smu.edu::dbb1ad2b-7e27-4a54-93ef-47628e7a32c9" providerId="AD" clId="Web-{B08EEC10-D946-A4AB-A02B-18388C630241}" dt="2025-04-30T18:45:59.416" v="26" actId="1076"/>
+          <ac:spMkLst>
+            <pc:docMk/>
+            <pc:sldMk cId="1505823097" sldId="265"/>
+            <ac:spMk id="4" creationId="{DC21E3BA-9ED9-DE5F-1A1D-F51EE48DC6DA}"/>
+          </ac:spMkLst>
+        </pc:spChg>
+      </pc:sldChg>
+      <pc:sldChg chg="modSp">
+        <pc:chgData name="Eun, Morgan" userId="S::meun@smu.edu::dbb1ad2b-7e27-4a54-93ef-47628e7a32c9" providerId="AD" clId="Web-{B08EEC10-D946-A4AB-A02B-18388C630241}" dt="2025-04-30T18:43:53.427" v="15" actId="20577"/>
+        <pc:sldMkLst>
+          <pc:docMk/>
+          <pc:sldMk cId="1485909516" sldId="278"/>
+        </pc:sldMkLst>
+        <pc:spChg chg="mod">
+          <ac:chgData name="Eun, Morgan" userId="S::meun@smu.edu::dbb1ad2b-7e27-4a54-93ef-47628e7a32c9" providerId="AD" clId="Web-{B08EEC10-D946-A4AB-A02B-18388C630241}" dt="2025-04-30T18:43:53.427" v="15" actId="20577"/>
+          <ac:spMkLst>
+            <pc:docMk/>
+            <pc:sldMk cId="1485909516" sldId="278"/>
+            <ac:spMk id="2" creationId="{70065272-B427-C3B2-BCA4-56F952DB8AED}"/>
+          </ac:spMkLst>
+        </pc:spChg>
+      </pc:sldChg>
+      <pc:sldChg chg="modSp">
+        <pc:chgData name="Eun, Morgan" userId="S::meun@smu.edu::dbb1ad2b-7e27-4a54-93ef-47628e7a32c9" providerId="AD" clId="Web-{B08EEC10-D946-A4AB-A02B-18388C630241}" dt="2025-04-30T18:51:08.600" v="68" actId="1076"/>
+        <pc:sldMkLst>
+          <pc:docMk/>
+          <pc:sldMk cId="2204278369" sldId="279"/>
+        </pc:sldMkLst>
+        <pc:spChg chg="mod">
+          <ac:chgData name="Eun, Morgan" userId="S::meun@smu.edu::dbb1ad2b-7e27-4a54-93ef-47628e7a32c9" providerId="AD" clId="Web-{B08EEC10-D946-A4AB-A02B-18388C630241}" dt="2025-04-30T18:50:53.990" v="57" actId="1076"/>
+          <ac:spMkLst>
+            <pc:docMk/>
+            <pc:sldMk cId="2204278369" sldId="279"/>
+            <ac:spMk id="2" creationId="{56140C4E-4396-0F28-5699-21BA9AFF53C9}"/>
+          </ac:spMkLst>
+        </pc:spChg>
+        <pc:spChg chg="mod">
+          <ac:chgData name="Eun, Morgan" userId="S::meun@smu.edu::dbb1ad2b-7e27-4a54-93ef-47628e7a32c9" providerId="AD" clId="Web-{B08EEC10-D946-A4AB-A02B-18388C630241}" dt="2025-04-30T18:50:54.006" v="58" actId="1076"/>
+          <ac:spMkLst>
+            <pc:docMk/>
+            <pc:sldMk cId="2204278369" sldId="279"/>
+            <ac:spMk id="3" creationId="{B459024D-4E10-F5C5-8178-BBD9C3E290C0}"/>
+          </ac:spMkLst>
+        </pc:spChg>
+        <pc:spChg chg="mod">
+          <ac:chgData name="Eun, Morgan" userId="S::meun@smu.edu::dbb1ad2b-7e27-4a54-93ef-47628e7a32c9" providerId="AD" clId="Web-{B08EEC10-D946-A4AB-A02B-18388C630241}" dt="2025-04-30T18:50:54.021" v="59" actId="1076"/>
+          <ac:spMkLst>
+            <pc:docMk/>
+            <pc:sldMk cId="2204278369" sldId="279"/>
+            <ac:spMk id="4" creationId="{052BBF47-4639-0A62-6009-AFAD5F88287A}"/>
+          </ac:spMkLst>
+        </pc:spChg>
+        <pc:spChg chg="mod">
+          <ac:chgData name="Eun, Morgan" userId="S::meun@smu.edu::dbb1ad2b-7e27-4a54-93ef-47628e7a32c9" providerId="AD" clId="Web-{B08EEC10-D946-A4AB-A02B-18388C630241}" dt="2025-04-30T18:51:01.459" v="66" actId="1076"/>
+          <ac:spMkLst>
+            <pc:docMk/>
+            <pc:sldMk cId="2204278369" sldId="279"/>
+            <ac:spMk id="6" creationId="{1117B20C-CCB6-8454-6C29-A9AF6C7BD1EE}"/>
+          </ac:spMkLst>
+        </pc:spChg>
+        <pc:spChg chg="mod">
+          <ac:chgData name="Eun, Morgan" userId="S::meun@smu.edu::dbb1ad2b-7e27-4a54-93ef-47628e7a32c9" providerId="AD" clId="Web-{B08EEC10-D946-A4AB-A02B-18388C630241}" dt="2025-04-30T18:50:54.131" v="63" actId="1076"/>
+          <ac:spMkLst>
+            <pc:docMk/>
+            <pc:sldMk cId="2204278369" sldId="279"/>
+            <ac:spMk id="9" creationId="{30CF2952-416B-1B66-A5DA-FA4529208B5E}"/>
+          </ac:spMkLst>
+        </pc:spChg>
+        <pc:spChg chg="mod">
+          <ac:chgData name="Eun, Morgan" userId="S::meun@smu.edu::dbb1ad2b-7e27-4a54-93ef-47628e7a32c9" providerId="AD" clId="Web-{B08EEC10-D946-A4AB-A02B-18388C630241}" dt="2025-04-30T18:51:08.600" v="68" actId="1076"/>
+          <ac:spMkLst>
+            <pc:docMk/>
+            <pc:sldMk cId="2204278369" sldId="279"/>
+            <ac:spMk id="12" creationId="{9B24EC75-B2E6-0D0B-F2B8-C12B2782261A}"/>
+          </ac:spMkLst>
+        </pc:spChg>
+        <pc:picChg chg="mod">
+          <ac:chgData name="Eun, Morgan" userId="S::meun@smu.edu::dbb1ad2b-7e27-4a54-93ef-47628e7a32c9" providerId="AD" clId="Web-{B08EEC10-D946-A4AB-A02B-18388C630241}" dt="2025-04-30T18:50:54.084" v="61" actId="1076"/>
+          <ac:picMkLst>
+            <pc:docMk/>
+            <pc:sldMk cId="2204278369" sldId="279"/>
+            <ac:picMk id="10" creationId="{A0185114-A37D-C855-8F8A-53308DD1BC27}"/>
+          </ac:picMkLst>
+        </pc:picChg>
+        <pc:picChg chg="mod">
+          <ac:chgData name="Eun, Morgan" userId="S::meun@smu.edu::dbb1ad2b-7e27-4a54-93ef-47628e7a32c9" providerId="AD" clId="Web-{B08EEC10-D946-A4AB-A02B-18388C630241}" dt="2025-04-30T18:51:03.741" v="67" actId="1076"/>
+          <ac:picMkLst>
+            <pc:docMk/>
+            <pc:sldMk cId="2204278369" sldId="279"/>
+            <ac:picMk id="14" creationId="{A1828716-5E47-440A-3C9D-C9714616EE25}"/>
+          </ac:picMkLst>
+        </pc:picChg>
+      </pc:sldChg>
+      <pc:sldChg chg="modSp">
+        <pc:chgData name="Eun, Morgan" userId="S::meun@smu.edu::dbb1ad2b-7e27-4a54-93ef-47628e7a32c9" providerId="AD" clId="Web-{B08EEC10-D946-A4AB-A02B-18388C630241}" dt="2025-04-30T18:47:06.560" v="31" actId="1076"/>
+        <pc:sldMkLst>
+          <pc:docMk/>
+          <pc:sldMk cId="2709205666" sldId="675"/>
+        </pc:sldMkLst>
+        <pc:spChg chg="mod">
+          <ac:chgData name="Eun, Morgan" userId="S::meun@smu.edu::dbb1ad2b-7e27-4a54-93ef-47628e7a32c9" providerId="AD" clId="Web-{B08EEC10-D946-A4AB-A02B-18388C630241}" dt="2025-04-30T18:47:06.560" v="30" actId="1076"/>
+          <ac:spMkLst>
+            <pc:docMk/>
+            <pc:sldMk cId="2709205666" sldId="675"/>
+            <ac:spMk id="2" creationId="{47794BFE-8F93-4710-8FCC-F1C6F0640BF6}"/>
+          </ac:spMkLst>
+        </pc:spChg>
+        <pc:spChg chg="mod">
+          <ac:chgData name="Eun, Morgan" userId="S::meun@smu.edu::dbb1ad2b-7e27-4a54-93ef-47628e7a32c9" providerId="AD" clId="Web-{B08EEC10-D946-A4AB-A02B-18388C630241}" dt="2025-04-30T18:47:06.560" v="31" actId="1076"/>
+          <ac:spMkLst>
+            <pc:docMk/>
+            <pc:sldMk cId="2709205666" sldId="675"/>
+            <ac:spMk id="3" creationId="{BE314DDB-AFD9-8A0D-81BE-7C71EBD4906B}"/>
+          </ac:spMkLst>
+        </pc:spChg>
+      </pc:sldChg>
+      <pc:sldChg chg="modSp">
+        <pc:chgData name="Eun, Morgan" userId="S::meun@smu.edu::dbb1ad2b-7e27-4a54-93ef-47628e7a32c9" providerId="AD" clId="Web-{B08EEC10-D946-A4AB-A02B-18388C630241}" dt="2025-04-30T18:47:24.795" v="33" actId="1076"/>
+        <pc:sldMkLst>
+          <pc:docMk/>
+          <pc:sldMk cId="82344637" sldId="688"/>
+        </pc:sldMkLst>
+        <pc:spChg chg="mod">
+          <ac:chgData name="Eun, Morgan" userId="S::meun@smu.edu::dbb1ad2b-7e27-4a54-93ef-47628e7a32c9" providerId="AD" clId="Web-{B08EEC10-D946-A4AB-A02B-18388C630241}" dt="2025-04-30T18:47:24.795" v="33" actId="1076"/>
+          <ac:spMkLst>
+            <pc:docMk/>
+            <pc:sldMk cId="82344637" sldId="688"/>
+            <ac:spMk id="4" creationId="{2004611E-8D45-109D-A9C3-5869DF262823}"/>
+          </ac:spMkLst>
+        </pc:spChg>
+      </pc:sldChg>
+      <pc:sldChg chg="modSp">
+        <pc:chgData name="Eun, Morgan" userId="S::meun@smu.edu::dbb1ad2b-7e27-4a54-93ef-47628e7a32c9" providerId="AD" clId="Web-{B08EEC10-D946-A4AB-A02B-18388C630241}" dt="2025-04-30T18:42:47.362" v="9" actId="20577"/>
+        <pc:sldMkLst>
+          <pc:docMk/>
+          <pc:sldMk cId="3262927434" sldId="689"/>
+        </pc:sldMkLst>
+        <pc:spChg chg="mod">
+          <ac:chgData name="Eun, Morgan" userId="S::meun@smu.edu::dbb1ad2b-7e27-4a54-93ef-47628e7a32c9" providerId="AD" clId="Web-{B08EEC10-D946-A4AB-A02B-18388C630241}" dt="2025-04-30T18:42:47.362" v="9" actId="20577"/>
+          <ac:spMkLst>
+            <pc:docMk/>
+            <pc:sldMk cId="3262927434" sldId="689"/>
+            <ac:spMk id="2" creationId="{D92BB043-1D76-9350-CB66-7C6C0AE3CF33}"/>
+          </ac:spMkLst>
+        </pc:spChg>
+      </pc:sldChg>
+      <pc:sldChg chg="modSp">
+        <pc:chgData name="Eun, Morgan" userId="S::meun@smu.edu::dbb1ad2b-7e27-4a54-93ef-47628e7a32c9" providerId="AD" clId="Web-{B08EEC10-D946-A4AB-A02B-18388C630241}" dt="2025-04-30T18:57:55.600" v="71" actId="1076"/>
+        <pc:sldMkLst>
+          <pc:docMk/>
+          <pc:sldMk cId="1524050222" sldId="693"/>
+        </pc:sldMkLst>
+        <pc:spChg chg="mod">
+          <ac:chgData name="Eun, Morgan" userId="S::meun@smu.edu::dbb1ad2b-7e27-4a54-93ef-47628e7a32c9" providerId="AD" clId="Web-{B08EEC10-D946-A4AB-A02B-18388C630241}" dt="2025-04-30T18:57:55.600" v="71" actId="1076"/>
+          <ac:spMkLst>
+            <pc:docMk/>
+            <pc:sldMk cId="1524050222" sldId="693"/>
+            <ac:spMk id="7" creationId="{165C15A8-E0B4-D645-C5B0-153FADA7DC1B}"/>
+          </ac:spMkLst>
+        </pc:spChg>
+      </pc:sldChg>
+      <pc:sldChg chg="add replId">
+        <pc:chgData name="Eun, Morgan" userId="S::meun@smu.edu::dbb1ad2b-7e27-4a54-93ef-47628e7a32c9" providerId="AD" clId="Web-{B08EEC10-D946-A4AB-A02B-18388C630241}" dt="2025-04-30T18:47:42.545" v="34"/>
+        <pc:sldMkLst>
+          <pc:docMk/>
+          <pc:sldMk cId="2815425597" sldId="696"/>
+        </pc:sldMkLst>
+      </pc:sldChg>
+    </pc:docChg>
+  </pc:docChgLst>
+  <pc:docChgLst>
+    <pc:chgData name="Kroeger, William" userId="S::wkroeger@smu.edu::9769a18c-35e5-46de-999e-56a20cde7d62" providerId="AD" clId="Web-{E7B890AF-C09D-3663-C637-D60BCA16F738}"/>
+    <pc:docChg chg="modSld">
+      <pc:chgData name="Kroeger, William" userId="S::wkroeger@smu.edu::9769a18c-35e5-46de-999e-56a20cde7d62" providerId="AD" clId="Web-{E7B890AF-C09D-3663-C637-D60BCA16F738}" dt="2025-04-30T18:51:23.686" v="3" actId="14100"/>
+      <pc:docMkLst>
+        <pc:docMk/>
+      </pc:docMkLst>
+      <pc:sldChg chg="modSp">
+        <pc:chgData name="Kroeger, William" userId="S::wkroeger@smu.edu::9769a18c-35e5-46de-999e-56a20cde7d62" providerId="AD" clId="Web-{E7B890AF-C09D-3663-C637-D60BCA16F738}" dt="2025-04-30T18:51:23.686" v="3" actId="14100"/>
+        <pc:sldMkLst>
+          <pc:docMk/>
+          <pc:sldMk cId="2290687881" sldId="691"/>
+        </pc:sldMkLst>
+        <pc:picChg chg="mod">
+          <ac:chgData name="Kroeger, William" userId="S::wkroeger@smu.edu::9769a18c-35e5-46de-999e-56a20cde7d62" providerId="AD" clId="Web-{E7B890AF-C09D-3663-C637-D60BCA16F738}" dt="2025-04-30T18:51:23.686" v="3" actId="14100"/>
+          <ac:picMkLst>
+            <pc:docMk/>
+            <pc:sldMk cId="2290687881" sldId="691"/>
+            <ac:picMk id="7" creationId="{D027E0FE-0C84-E098-0B7E-381BBEA52757}"/>
+          </ac:picMkLst>
+        </pc:picChg>
+        <pc:picChg chg="mod">
+          <ac:chgData name="Kroeger, William" userId="S::wkroeger@smu.edu::9769a18c-35e5-46de-999e-56a20cde7d62" providerId="AD" clId="Web-{E7B890AF-C09D-3663-C637-D60BCA16F738}" dt="2025-04-30T18:51:12.451" v="1" actId="14100"/>
+          <ac:picMkLst>
+            <pc:docMk/>
+            <pc:sldMk cId="2290687881" sldId="691"/>
+            <ac:picMk id="8" creationId="{3108D383-E240-B4A2-2027-12A3CFF9861B}"/>
+          </ac:picMkLst>
+        </pc:picChg>
+      </pc:sldChg>
+    </pc:docChg>
+  </pc:docChgLst>
+  <pc:docChgLst>
+    <pc:chgData name="Kroeger, William" userId="S::wkroeger@smu.edu::9769a18c-35e5-46de-999e-56a20cde7d62" providerId="AD" clId="Web-{AB4AAF8C-80FC-F755-22F5-A59AC850F230}"/>
+    <pc:docChg chg="modSld">
+      <pc:chgData name="Kroeger, William" userId="S::wkroeger@smu.edu::9769a18c-35e5-46de-999e-56a20cde7d62" providerId="AD" clId="Web-{AB4AAF8C-80FC-F755-22F5-A59AC850F230}" dt="2025-04-30T01:31:50.459" v="8" actId="14100"/>
+      <pc:docMkLst>
+        <pc:docMk/>
+      </pc:docMkLst>
+      <pc:sldChg chg="modSp">
+        <pc:chgData name="Kroeger, William" userId="S::wkroeger@smu.edu::9769a18c-35e5-46de-999e-56a20cde7d62" providerId="AD" clId="Web-{AB4AAF8C-80FC-F755-22F5-A59AC850F230}" dt="2025-04-30T01:31:50.459" v="8" actId="14100"/>
+        <pc:sldMkLst>
+          <pc:docMk/>
+          <pc:sldMk cId="2290687881" sldId="691"/>
+        </pc:sldMkLst>
+        <pc:spChg chg="mod">
+          <ac:chgData name="Kroeger, William" userId="S::wkroeger@smu.edu::9769a18c-35e5-46de-999e-56a20cde7d62" providerId="AD" clId="Web-{AB4AAF8C-80FC-F755-22F5-A59AC850F230}" dt="2025-04-30T01:28:31.123" v="1" actId="1076"/>
+          <ac:spMkLst>
+            <pc:docMk/>
+            <pc:sldMk cId="2290687881" sldId="691"/>
+            <ac:spMk id="12" creationId="{0DD6519A-A6D9-E4C3-E808-69DD1F3770FA}"/>
+          </ac:spMkLst>
+        </pc:spChg>
+        <pc:picChg chg="mod">
+          <ac:chgData name="Kroeger, William" userId="S::wkroeger@smu.edu::9769a18c-35e5-46de-999e-56a20cde7d62" providerId="AD" clId="Web-{AB4AAF8C-80FC-F755-22F5-A59AC850F230}" dt="2025-04-30T01:31:50.459" v="8" actId="14100"/>
+          <ac:picMkLst>
+            <pc:docMk/>
+            <pc:sldMk cId="2290687881" sldId="691"/>
+            <ac:picMk id="7" creationId="{D027E0FE-0C84-E098-0B7E-381BBEA52757}"/>
+          </ac:picMkLst>
+        </pc:picChg>
+        <pc:picChg chg="mod">
+          <ac:chgData name="Kroeger, William" userId="S::wkroeger@smu.edu::9769a18c-35e5-46de-999e-56a20cde7d62" providerId="AD" clId="Web-{AB4AAF8C-80FC-F755-22F5-A59AC850F230}" dt="2025-04-30T01:31:21.926" v="7" actId="14100"/>
+          <ac:picMkLst>
+            <pc:docMk/>
+            <pc:sldMk cId="2290687881" sldId="691"/>
+            <ac:picMk id="8" creationId="{3108D383-E240-B4A2-2027-12A3CFF9861B}"/>
+          </ac:picMkLst>
+        </pc:picChg>
+      </pc:sldChg>
+    </pc:docChg>
+  </pc:docChgLst>
+  <pc:docChgLst>
+    <pc:chgData name="Eun, Morgan" userId="dbb1ad2b-7e27-4a54-93ef-47628e7a32c9" providerId="ADAL" clId="{1C3EAF91-458F-C64F-A19D-E5A2169A7527}"/>
+    <pc:docChg chg="modSld">
+      <pc:chgData name="Eun, Morgan" userId="dbb1ad2b-7e27-4a54-93ef-47628e7a32c9" providerId="ADAL" clId="{1C3EAF91-458F-C64F-A19D-E5A2169A7527}" dt="2025-04-30T20:01:47.012" v="1" actId="1076"/>
+      <pc:docMkLst>
+        <pc:docMk/>
+      </pc:docMkLst>
+      <pc:sldChg chg="modSp">
+        <pc:chgData name="Eun, Morgan" userId="dbb1ad2b-7e27-4a54-93ef-47628e7a32c9" providerId="ADAL" clId="{1C3EAF91-458F-C64F-A19D-E5A2169A7527}" dt="2025-04-30T20:01:47.012" v="1" actId="1076"/>
+        <pc:sldMkLst>
+          <pc:docMk/>
+          <pc:sldMk cId="2709205666" sldId="675"/>
+        </pc:sldMkLst>
+        <pc:spChg chg="mod">
+          <ac:chgData name="Eun, Morgan" userId="dbb1ad2b-7e27-4a54-93ef-47628e7a32c9" providerId="ADAL" clId="{1C3EAF91-458F-C64F-A19D-E5A2169A7527}" dt="2025-04-30T20:01:47.012" v="1" actId="1076"/>
+          <ac:spMkLst>
+            <pc:docMk/>
+            <pc:sldMk cId="2709205666" sldId="675"/>
+            <ac:spMk id="3" creationId="{BE314DDB-AFD9-8A0D-81BE-7C71EBD4906B}"/>
+          </ac:spMkLst>
+        </pc:spChg>
+      </pc:sldChg>
+    </pc:docChg>
+  </pc:docChgLst>
+  <pc:docChgLst>
+    <pc:chgData name="Lahiri, Demetrios" userId="S::dlahiri@smu.edu::9d1ad5ea-57b1-4018-85f6-0d05db0c1ea2" providerId="AD" clId="Web-{AECA3316-73A9-7695-51CF-9853D4C79B5C}"/>
+    <pc:docChg chg="addSld delSld modSld">
+      <pc:chgData name="Lahiri, Demetrios" userId="S::dlahiri@smu.edu::9d1ad5ea-57b1-4018-85f6-0d05db0c1ea2" providerId="AD" clId="Web-{AECA3316-73A9-7695-51CF-9853D4C79B5C}" dt="2025-04-30T16:34:00.153" v="485" actId="20577"/>
+      <pc:docMkLst>
+        <pc:docMk/>
+      </pc:docMkLst>
+      <pc:sldChg chg="modSp">
+        <pc:chgData name="Lahiri, Demetrios" userId="S::dlahiri@smu.edu::9d1ad5ea-57b1-4018-85f6-0d05db0c1ea2" providerId="AD" clId="Web-{AECA3316-73A9-7695-51CF-9853D4C79B5C}" dt="2025-04-30T16:34:00.153" v="485" actId="20577"/>
+        <pc:sldMkLst>
+          <pc:docMk/>
+          <pc:sldMk cId="3262927434" sldId="689"/>
+        </pc:sldMkLst>
+        <pc:spChg chg="mod">
+          <ac:chgData name="Lahiri, Demetrios" userId="S::dlahiri@smu.edu::9d1ad5ea-57b1-4018-85f6-0d05db0c1ea2" providerId="AD" clId="Web-{AECA3316-73A9-7695-51CF-9853D4C79B5C}" dt="2025-04-30T16:34:00.153" v="485" actId="20577"/>
+          <ac:spMkLst>
+            <pc:docMk/>
+            <pc:sldMk cId="3262927434" sldId="689"/>
+            <ac:spMk id="3" creationId="{ADDC5DA6-2943-20DD-AC3F-D3CF246D1C76}"/>
+          </ac:spMkLst>
+        </pc:spChg>
+      </pc:sldChg>
+      <pc:sldChg chg="addSp modSp add del">
+        <pc:chgData name="Lahiri, Demetrios" userId="S::dlahiri@smu.edu::9d1ad5ea-57b1-4018-85f6-0d05db0c1ea2" providerId="AD" clId="Web-{AECA3316-73A9-7695-51CF-9853D4C79B5C}" dt="2025-04-30T16:20:41.787" v="474" actId="20577"/>
+        <pc:sldMkLst>
+          <pc:docMk/>
+          <pc:sldMk cId="1858521055" sldId="690"/>
+        </pc:sldMkLst>
+        <pc:spChg chg="mod">
+          <ac:chgData name="Lahiri, Demetrios" userId="S::dlahiri@smu.edu::9d1ad5ea-57b1-4018-85f6-0d05db0c1ea2" providerId="AD" clId="Web-{AECA3316-73A9-7695-51CF-9853D4C79B5C}" dt="2025-04-30T16:20:41.787" v="474" actId="20577"/>
+          <ac:spMkLst>
+            <pc:docMk/>
+            <pc:sldMk cId="1858521055" sldId="690"/>
+            <ac:spMk id="3" creationId="{B62CDD79-84A4-3C5E-10B4-EC48939503B9}"/>
+          </ac:spMkLst>
+        </pc:spChg>
+        <pc:spChg chg="add mod">
+          <ac:chgData name="Lahiri, Demetrios" userId="S::dlahiri@smu.edu::9d1ad5ea-57b1-4018-85f6-0d05db0c1ea2" providerId="AD" clId="Web-{AECA3316-73A9-7695-51CF-9853D4C79B5C}" dt="2025-04-30T15:07:36.754" v="267" actId="20577"/>
+          <ac:spMkLst>
+            <pc:docMk/>
+            <pc:sldMk cId="1858521055" sldId="690"/>
+            <ac:spMk id="10" creationId="{22056BB8-CA6F-3B6F-F08C-5B55E1BA437C}"/>
+          </ac:spMkLst>
+        </pc:spChg>
+        <pc:picChg chg="add mod modCrop">
+          <ac:chgData name="Lahiri, Demetrios" userId="S::dlahiri@smu.edu::9d1ad5ea-57b1-4018-85f6-0d05db0c1ea2" providerId="AD" clId="Web-{AECA3316-73A9-7695-51CF-9853D4C79B5C}" dt="2025-04-30T15:00:12.128" v="99" actId="1076"/>
+          <ac:picMkLst>
+            <pc:docMk/>
+            <pc:sldMk cId="1858521055" sldId="690"/>
+            <ac:picMk id="11" creationId="{10E02E43-2EA5-9D91-F3E1-D105493A5139}"/>
+          </ac:picMkLst>
+        </pc:picChg>
+      </pc:sldChg>
+      <pc:sldChg chg="modSp">
+        <pc:chgData name="Lahiri, Demetrios" userId="S::dlahiri@smu.edu::9d1ad5ea-57b1-4018-85f6-0d05db0c1ea2" providerId="AD" clId="Web-{AECA3316-73A9-7695-51CF-9853D4C79B5C}" dt="2025-04-30T15:09:48.368" v="273" actId="20577"/>
+        <pc:sldMkLst>
+          <pc:docMk/>
+          <pc:sldMk cId="1524050222" sldId="693"/>
+        </pc:sldMkLst>
+        <pc:spChg chg="mod">
+          <ac:chgData name="Lahiri, Demetrios" userId="S::dlahiri@smu.edu::9d1ad5ea-57b1-4018-85f6-0d05db0c1ea2" providerId="AD" clId="Web-{AECA3316-73A9-7695-51CF-9853D4C79B5C}" dt="2025-04-30T15:09:48.368" v="273" actId="20577"/>
+          <ac:spMkLst>
+            <pc:docMk/>
+            <pc:sldMk cId="1524050222" sldId="693"/>
+            <ac:spMk id="7" creationId="{165C15A8-E0B4-D645-C5B0-153FADA7DC1B}"/>
+          </ac:spMkLst>
+        </pc:spChg>
+      </pc:sldChg>
+    </pc:docChg>
+  </pc:docChgLst>
   <pc:docChgLst>
     <pc:chgData name="Lahiri, Demetrios" userId="S::dlahiri@smu.edu::9d1ad5ea-57b1-4018-85f6-0d05db0c1ea2" providerId="AD" clId="Web-{33774333-907D-2364-38A5-191BE88830FC}"/>
     <pc:docChg chg="addSld delSld">
@@ -373,20 +744,28 @@
     </pc:docChg>
   </pc:docChgLst>
   <pc:docChgLst>
-    <pc:chgData name="Lahiri, Demetrios" userId="S::dlahiri@smu.edu::9d1ad5ea-57b1-4018-85f6-0d05db0c1ea2" providerId="AD" clId="Web-{4E657F89-8034-136D-A6D8-6CA256C294F5}"/>
-    <pc:docChg chg="addSld modSld">
-      <pc:chgData name="Lahiri, Demetrios" userId="S::dlahiri@smu.edu::9d1ad5ea-57b1-4018-85f6-0d05db0c1ea2" providerId="AD" clId="Web-{4E657F89-8034-136D-A6D8-6CA256C294F5}" dt="2025-04-29T00:33:10.444" v="67" actId="20577"/>
+    <pc:chgData name="Lahiri, Demetrios" userId="S::dlahiri@smu.edu::9d1ad5ea-57b1-4018-85f6-0d05db0c1ea2" providerId="AD" clId="Web-{7FA0B9DB-6D66-EA52-CB9C-336AD3E38121}"/>
+    <pc:docChg chg="modSld">
+      <pc:chgData name="Lahiri, Demetrios" userId="S::dlahiri@smu.edu::9d1ad5ea-57b1-4018-85f6-0d05db0c1ea2" providerId="AD" clId="Web-{7FA0B9DB-6D66-EA52-CB9C-336AD3E38121}" dt="2025-04-28T17:07:03.138" v="118" actId="20577"/>
       <pc:docMkLst>
         <pc:docMk/>
       </pc:docMkLst>
       <pc:sldChg chg="modSp">
-        <pc:chgData name="Lahiri, Demetrios" userId="S::dlahiri@smu.edu::9d1ad5ea-57b1-4018-85f6-0d05db0c1ea2" providerId="AD" clId="Web-{4E657F89-8034-136D-A6D8-6CA256C294F5}" dt="2025-04-29T00:33:10.444" v="67" actId="20577"/>
+        <pc:chgData name="Lahiri, Demetrios" userId="S::dlahiri@smu.edu::9d1ad5ea-57b1-4018-85f6-0d05db0c1ea2" providerId="AD" clId="Web-{7FA0B9DB-6D66-EA52-CB9C-336AD3E38121}" dt="2025-04-28T17:07:03.138" v="118" actId="20577"/>
         <pc:sldMkLst>
           <pc:docMk/>
           <pc:sldMk cId="2204278369" sldId="279"/>
         </pc:sldMkLst>
         <pc:spChg chg="mod">
-          <ac:chgData name="Lahiri, Demetrios" userId="S::dlahiri@smu.edu::9d1ad5ea-57b1-4018-85f6-0d05db0c1ea2" providerId="AD" clId="Web-{4E657F89-8034-136D-A6D8-6CA256C294F5}" dt="2025-04-29T00:33:10.444" v="67" actId="20577"/>
+          <ac:chgData name="Lahiri, Demetrios" userId="S::dlahiri@smu.edu::9d1ad5ea-57b1-4018-85f6-0d05db0c1ea2" providerId="AD" clId="Web-{7FA0B9DB-6D66-EA52-CB9C-336AD3E38121}" dt="2025-04-28T17:04:04.913" v="29" actId="20577"/>
+          <ac:spMkLst>
+            <pc:docMk/>
+            <pc:sldMk cId="2204278369" sldId="279"/>
+            <ac:spMk id="2" creationId="{56140C4E-4396-0F28-5699-21BA9AFF53C9}"/>
+          </ac:spMkLst>
+        </pc:spChg>
+        <pc:spChg chg="mod">
+          <ac:chgData name="Lahiri, Demetrios" userId="S::dlahiri@smu.edu::9d1ad5ea-57b1-4018-85f6-0d05db0c1ea2" providerId="AD" clId="Web-{7FA0B9DB-6D66-EA52-CB9C-336AD3E38121}" dt="2025-04-28T17:07:03.138" v="118" actId="20577"/>
           <ac:spMkLst>
             <pc:docMk/>
             <pc:sldMk cId="2204278369" sldId="279"/>
@@ -394,285 +773,23 @@
           </ac:spMkLst>
         </pc:spChg>
       </pc:sldChg>
-      <pc:sldChg chg="modSp">
-        <pc:chgData name="Lahiri, Demetrios" userId="S::dlahiri@smu.edu::9d1ad5ea-57b1-4018-85f6-0d05db0c1ea2" providerId="AD" clId="Web-{4E657F89-8034-136D-A6D8-6CA256C294F5}" dt="2025-04-28T23:29:48.763" v="19" actId="20577"/>
-        <pc:sldMkLst>
-          <pc:docMk/>
-          <pc:sldMk cId="2012267991" sldId="280"/>
-        </pc:sldMkLst>
-        <pc:spChg chg="mod">
-          <ac:chgData name="Lahiri, Demetrios" userId="S::dlahiri@smu.edu::9d1ad5ea-57b1-4018-85f6-0d05db0c1ea2" providerId="AD" clId="Web-{4E657F89-8034-136D-A6D8-6CA256C294F5}" dt="2025-04-28T23:29:48.763" v="19" actId="20577"/>
-          <ac:spMkLst>
-            <pc:docMk/>
-            <pc:sldMk cId="2012267991" sldId="280"/>
-            <ac:spMk id="6" creationId="{7227299B-8512-10B0-622E-C1DC7995537D}"/>
-          </ac:spMkLst>
-        </pc:spChg>
-      </pc:sldChg>
-      <pc:sldChg chg="modSp">
-        <pc:chgData name="Lahiri, Demetrios" userId="S::dlahiri@smu.edu::9d1ad5ea-57b1-4018-85f6-0d05db0c1ea2" providerId="AD" clId="Web-{4E657F89-8034-136D-A6D8-6CA256C294F5}" dt="2025-04-28T22:52:18.833" v="17"/>
-        <pc:sldMkLst>
-          <pc:docMk/>
-          <pc:sldMk cId="82344637" sldId="688"/>
-        </pc:sldMkLst>
-        <pc:graphicFrameChg chg="mod modGraphic">
-          <ac:chgData name="Lahiri, Demetrios" userId="S::dlahiri@smu.edu::9d1ad5ea-57b1-4018-85f6-0d05db0c1ea2" providerId="AD" clId="Web-{4E657F89-8034-136D-A6D8-6CA256C294F5}" dt="2025-04-28T22:52:18.833" v="17"/>
-          <ac:graphicFrameMkLst>
-            <pc:docMk/>
-            <pc:sldMk cId="82344637" sldId="688"/>
-            <ac:graphicFrameMk id="43" creationId="{B9510C78-EC26-EC73-1C3F-C420B4D496D0}"/>
-          </ac:graphicFrameMkLst>
-        </pc:graphicFrameChg>
-      </pc:sldChg>
-      <pc:sldChg chg="modSp new">
-        <pc:chgData name="Lahiri, Demetrios" userId="S::dlahiri@smu.edu::9d1ad5ea-57b1-4018-85f6-0d05db0c1ea2" providerId="AD" clId="Web-{4E657F89-8034-136D-A6D8-6CA256C294F5}" dt="2025-04-28T23:30:39.093" v="65" actId="20577"/>
-        <pc:sldMkLst>
-          <pc:docMk/>
-          <pc:sldMk cId="2290687881" sldId="691"/>
-        </pc:sldMkLst>
-        <pc:spChg chg="mod">
-          <ac:chgData name="Lahiri, Demetrios" userId="S::dlahiri@smu.edu::9d1ad5ea-57b1-4018-85f6-0d05db0c1ea2" providerId="AD" clId="Web-{4E657F89-8034-136D-A6D8-6CA256C294F5}" dt="2025-04-28T23:30:29.295" v="39" actId="20577"/>
-          <ac:spMkLst>
-            <pc:docMk/>
-            <pc:sldMk cId="2290687881" sldId="691"/>
-            <ac:spMk id="6" creationId="{18AFB53F-FA9C-C2A2-014E-709D2272E7C6}"/>
-          </ac:spMkLst>
-        </pc:spChg>
-      </pc:sldChg>
-    </pc:docChg>
-  </pc:docChgLst>
-  <pc:docChgLst>
-    <pc:chgData name="Lahiri, Demetrios" userId="S::dlahiri@smu.edu::9d1ad5ea-57b1-4018-85f6-0d05db0c1ea2" providerId="AD" clId="Web-{7B289495-062F-77A5-6510-C0A226B1C5A3}"/>
-    <pc:docChg chg="addSld delSld modSld sldOrd">
-      <pc:chgData name="Lahiri, Demetrios" userId="S::dlahiri@smu.edu::9d1ad5ea-57b1-4018-85f6-0d05db0c1ea2" providerId="AD" clId="Web-{7B289495-062F-77A5-6510-C0A226B1C5A3}" dt="2025-04-30T01:02:17.501" v="2961"/>
-      <pc:docMkLst>
-        <pc:docMk/>
-      </pc:docMkLst>
-      <pc:sldChg chg="addSp delSp modSp">
-        <pc:chgData name="Lahiri, Demetrios" userId="S::dlahiri@smu.edu::9d1ad5ea-57b1-4018-85f6-0d05db0c1ea2" providerId="AD" clId="Web-{7B289495-062F-77A5-6510-C0A226B1C5A3}" dt="2025-04-30T00:52:33.842" v="2355" actId="20577"/>
-        <pc:sldMkLst>
-          <pc:docMk/>
-          <pc:sldMk cId="2204278369" sldId="279"/>
-        </pc:sldMkLst>
-        <pc:spChg chg="mod">
-          <ac:chgData name="Lahiri, Demetrios" userId="S::dlahiri@smu.edu::9d1ad5ea-57b1-4018-85f6-0d05db0c1ea2" providerId="AD" clId="Web-{7B289495-062F-77A5-6510-C0A226B1C5A3}" dt="2025-04-30T00:25:44.392" v="2207" actId="20577"/>
-          <ac:spMkLst>
-            <pc:docMk/>
-            <pc:sldMk cId="2204278369" sldId="279"/>
-            <ac:spMk id="2" creationId="{56140C4E-4396-0F28-5699-21BA9AFF53C9}"/>
-          </ac:spMkLst>
-        </pc:spChg>
-        <pc:spChg chg="mod">
-          <ac:chgData name="Lahiri, Demetrios" userId="S::dlahiri@smu.edu::9d1ad5ea-57b1-4018-85f6-0d05db0c1ea2" providerId="AD" clId="Web-{7B289495-062F-77A5-6510-C0A226B1C5A3}" dt="2025-04-30T00:50:47.744" v="2292" actId="20577"/>
-          <ac:spMkLst>
-            <pc:docMk/>
-            <pc:sldMk cId="2204278369" sldId="279"/>
-            <ac:spMk id="3" creationId="{B459024D-4E10-F5C5-8178-BBD9C3E290C0}"/>
-          </ac:spMkLst>
-        </pc:spChg>
-        <pc:spChg chg="add mod">
-          <ac:chgData name="Lahiri, Demetrios" userId="S::dlahiri@smu.edu::9d1ad5ea-57b1-4018-85f6-0d05db0c1ea2" providerId="AD" clId="Web-{7B289495-062F-77A5-6510-C0A226B1C5A3}" dt="2025-04-30T00:52:33.842" v="2355" actId="20577"/>
-          <ac:spMkLst>
-            <pc:docMk/>
-            <pc:sldMk cId="2204278369" sldId="279"/>
-            <ac:spMk id="6" creationId="{1117B20C-CCB6-8454-6C29-A9AF6C7BD1EE}"/>
-          </ac:spMkLst>
-        </pc:spChg>
-        <pc:spChg chg="add del mod">
-          <ac:chgData name="Lahiri, Demetrios" userId="S::dlahiri@smu.edu::9d1ad5ea-57b1-4018-85f6-0d05db0c1ea2" providerId="AD" clId="Web-{7B289495-062F-77A5-6510-C0A226B1C5A3}" dt="2025-04-30T00:41:36.539" v="2208"/>
-          <ac:spMkLst>
-            <pc:docMk/>
-            <pc:sldMk cId="2204278369" sldId="279"/>
-            <ac:spMk id="7" creationId="{9C703C65-679F-C2A2-A3E0-51121F122EA7}"/>
-          </ac:spMkLst>
-        </pc:spChg>
-        <pc:picChg chg="add del mod">
-          <ac:chgData name="Lahiri, Demetrios" userId="S::dlahiri@smu.edu::9d1ad5ea-57b1-4018-85f6-0d05db0c1ea2" providerId="AD" clId="Web-{7B289495-062F-77A5-6510-C0A226B1C5A3}" dt="2025-04-30T00:46:14.704" v="2251"/>
-          <ac:picMkLst>
-            <pc:docMk/>
-            <pc:sldMk cId="2204278369" sldId="279"/>
-            <ac:picMk id="8" creationId="{CDF5C047-A1E1-A8E8-12B1-77A3252746C5}"/>
-          </ac:picMkLst>
-        </pc:picChg>
-        <pc:picChg chg="add del mod">
-          <ac:chgData name="Lahiri, Demetrios" userId="S::dlahiri@smu.edu::9d1ad5ea-57b1-4018-85f6-0d05db0c1ea2" providerId="AD" clId="Web-{7B289495-062F-77A5-6510-C0A226B1C5A3}" dt="2025-04-30T00:48:01.458" v="2279" actId="14100"/>
-          <ac:picMkLst>
-            <pc:docMk/>
-            <pc:sldMk cId="2204278369" sldId="279"/>
-            <ac:picMk id="10" creationId="{A0185114-A37D-C855-8F8A-53308DD1BC27}"/>
-          </ac:picMkLst>
-        </pc:picChg>
-        <pc:picChg chg="add del mod">
-          <ac:chgData name="Lahiri, Demetrios" userId="S::dlahiri@smu.edu::9d1ad5ea-57b1-4018-85f6-0d05db0c1ea2" providerId="AD" clId="Web-{7B289495-062F-77A5-6510-C0A226B1C5A3}" dt="2025-04-30T00:48:44.162" v="2280"/>
-          <ac:picMkLst>
-            <pc:docMk/>
-            <pc:sldMk cId="2204278369" sldId="279"/>
-            <ac:picMk id="11" creationId="{8A972EC9-9402-5F3F-9515-8A8176AAE3BE}"/>
-          </ac:picMkLst>
-        </pc:picChg>
-        <pc:picChg chg="add del mod">
-          <ac:chgData name="Lahiri, Demetrios" userId="S::dlahiri@smu.edu::9d1ad5ea-57b1-4018-85f6-0d05db0c1ea2" providerId="AD" clId="Web-{7B289495-062F-77A5-6510-C0A226B1C5A3}" dt="2025-04-30T00:47:50.192" v="2276"/>
-          <ac:picMkLst>
-            <pc:docMk/>
-            <pc:sldMk cId="2204278369" sldId="279"/>
-            <ac:picMk id="13" creationId="{C0482CD5-0D34-129B-B03B-335D87F0EE86}"/>
-          </ac:picMkLst>
-        </pc:picChg>
-        <pc:picChg chg="add mod">
-          <ac:chgData name="Lahiri, Demetrios" userId="S::dlahiri@smu.edu::9d1ad5ea-57b1-4018-85f6-0d05db0c1ea2" providerId="AD" clId="Web-{7B289495-062F-77A5-6510-C0A226B1C5A3}" dt="2025-04-30T00:49:14.491" v="2287" actId="1076"/>
-          <ac:picMkLst>
-            <pc:docMk/>
-            <pc:sldMk cId="2204278369" sldId="279"/>
-            <ac:picMk id="14" creationId="{A1828716-5E47-440A-3C9D-C9714616EE25}"/>
-          </ac:picMkLst>
-        </pc:picChg>
-      </pc:sldChg>
-      <pc:sldChg chg="modSp">
-        <pc:chgData name="Lahiri, Demetrios" userId="S::dlahiri@smu.edu::9d1ad5ea-57b1-4018-85f6-0d05db0c1ea2" providerId="AD" clId="Web-{7B289495-062F-77A5-6510-C0A226B1C5A3}" dt="2025-04-30T00:00:30.257" v="64" actId="20577"/>
-        <pc:sldMkLst>
-          <pc:docMk/>
-          <pc:sldMk cId="2012267991" sldId="280"/>
-        </pc:sldMkLst>
-        <pc:spChg chg="mod">
-          <ac:chgData name="Lahiri, Demetrios" userId="S::dlahiri@smu.edu::9d1ad5ea-57b1-4018-85f6-0d05db0c1ea2" providerId="AD" clId="Web-{7B289495-062F-77A5-6510-C0A226B1C5A3}" dt="2025-04-30T00:00:30.257" v="64" actId="20577"/>
-          <ac:spMkLst>
-            <pc:docMk/>
-            <pc:sldMk cId="2012267991" sldId="280"/>
-            <ac:spMk id="7" creationId="{B1353D64-8A59-23E8-97F9-2C0035D495F7}"/>
-          </ac:spMkLst>
-        </pc:spChg>
-      </pc:sldChg>
-      <pc:sldChg chg="addSp modSp ord">
-        <pc:chgData name="Lahiri, Demetrios" userId="S::dlahiri@smu.edu::9d1ad5ea-57b1-4018-85f6-0d05db0c1ea2" providerId="AD" clId="Web-{7B289495-062F-77A5-6510-C0A226B1C5A3}" dt="2025-04-30T01:02:17.501" v="2961"/>
-        <pc:sldMkLst>
-          <pc:docMk/>
-          <pc:sldMk cId="1858521055" sldId="690"/>
-        </pc:sldMkLst>
-        <pc:spChg chg="add mod">
-          <ac:chgData name="Lahiri, Demetrios" userId="S::dlahiri@smu.edu::9d1ad5ea-57b1-4018-85f6-0d05db0c1ea2" providerId="AD" clId="Web-{7B289495-062F-77A5-6510-C0A226B1C5A3}" dt="2025-04-29T23:55:11.592" v="37" actId="1076"/>
-          <ac:spMkLst>
-            <pc:docMk/>
-            <pc:sldMk cId="1858521055" sldId="690"/>
-            <ac:spMk id="3" creationId="{B62CDD79-84A4-3C5E-10B4-EC48939503B9}"/>
-          </ac:spMkLst>
-        </pc:spChg>
-        <pc:graphicFrameChg chg="mod modGraphic">
-          <ac:chgData name="Lahiri, Demetrios" userId="S::dlahiri@smu.edu::9d1ad5ea-57b1-4018-85f6-0d05db0c1ea2" providerId="AD" clId="Web-{7B289495-062F-77A5-6510-C0A226B1C5A3}" dt="2025-04-30T01:02:17.501" v="2961"/>
-          <ac:graphicFrameMkLst>
-            <pc:docMk/>
-            <pc:sldMk cId="1858521055" sldId="690"/>
-            <ac:graphicFrameMk id="15" creationId="{03738B03-90B0-3D94-9233-EE14278C0C29}"/>
-          </ac:graphicFrameMkLst>
-        </pc:graphicFrameChg>
-      </pc:sldChg>
-      <pc:sldChg chg="addSp delSp modSp ord">
-        <pc:chgData name="Lahiri, Demetrios" userId="S::dlahiri@smu.edu::9d1ad5ea-57b1-4018-85f6-0d05db0c1ea2" providerId="AD" clId="Web-{7B289495-062F-77A5-6510-C0A226B1C5A3}" dt="2025-04-30T00:47:09.315" v="2263"/>
-        <pc:sldMkLst>
-          <pc:docMk/>
-          <pc:sldMk cId="2290687881" sldId="691"/>
-        </pc:sldMkLst>
-        <pc:spChg chg="del">
-          <ac:chgData name="Lahiri, Demetrios" userId="S::dlahiri@smu.edu::9d1ad5ea-57b1-4018-85f6-0d05db0c1ea2" providerId="AD" clId="Web-{7B289495-062F-77A5-6510-C0A226B1C5A3}" dt="2025-04-30T00:47:09.315" v="2263"/>
-          <ac:spMkLst>
-            <pc:docMk/>
-            <pc:sldMk cId="2290687881" sldId="691"/>
-            <ac:spMk id="2" creationId="{35D22E8E-F2B8-93BD-417D-F3546CB8ECBD}"/>
-          </ac:spMkLst>
-        </pc:spChg>
-        <pc:spChg chg="mod">
-          <ac:chgData name="Lahiri, Demetrios" userId="S::dlahiri@smu.edu::9d1ad5ea-57b1-4018-85f6-0d05db0c1ea2" providerId="AD" clId="Web-{7B289495-062F-77A5-6510-C0A226B1C5A3}" dt="2025-04-30T00:47:07.675" v="2262" actId="20577"/>
-          <ac:spMkLst>
-            <pc:docMk/>
-            <pc:sldMk cId="2290687881" sldId="691"/>
-            <ac:spMk id="6" creationId="{18AFB53F-FA9C-C2A2-014E-709D2272E7C6}"/>
-          </ac:spMkLst>
-        </pc:spChg>
-        <pc:spChg chg="add mod">
-          <ac:chgData name="Lahiri, Demetrios" userId="S::dlahiri@smu.edu::9d1ad5ea-57b1-4018-85f6-0d05db0c1ea2" providerId="AD" clId="Web-{7B289495-062F-77A5-6510-C0A226B1C5A3}" dt="2025-04-30T00:47:09.315" v="2263"/>
-          <ac:spMkLst>
-            <pc:docMk/>
-            <pc:sldMk cId="2290687881" sldId="691"/>
-            <ac:spMk id="10" creationId="{1CC8506B-7F45-8598-2C49-A8E8929D096C}"/>
-          </ac:spMkLst>
-        </pc:spChg>
-      </pc:sldChg>
-      <pc:sldChg chg="modSp">
-        <pc:chgData name="Lahiri, Demetrios" userId="S::dlahiri@smu.edu::9d1ad5ea-57b1-4018-85f6-0d05db0c1ea2" providerId="AD" clId="Web-{7B289495-062F-77A5-6510-C0A226B1C5A3}" dt="2025-04-30T00:59:28.308" v="2835" actId="20577"/>
-        <pc:sldMkLst>
-          <pc:docMk/>
-          <pc:sldMk cId="1524050222" sldId="693"/>
-        </pc:sldMkLst>
-        <pc:spChg chg="mod">
-          <ac:chgData name="Lahiri, Demetrios" userId="S::dlahiri@smu.edu::9d1ad5ea-57b1-4018-85f6-0d05db0c1ea2" providerId="AD" clId="Web-{7B289495-062F-77A5-6510-C0A226B1C5A3}" dt="2025-04-30T00:10:13.257" v="506" actId="20577"/>
-          <ac:spMkLst>
-            <pc:docMk/>
-            <pc:sldMk cId="1524050222" sldId="693"/>
-            <ac:spMk id="6" creationId="{02A2FB6F-B5C7-C88D-EC19-89601DE0EBE0}"/>
-          </ac:spMkLst>
-        </pc:spChg>
-        <pc:spChg chg="mod">
-          <ac:chgData name="Lahiri, Demetrios" userId="S::dlahiri@smu.edu::9d1ad5ea-57b1-4018-85f6-0d05db0c1ea2" providerId="AD" clId="Web-{7B289495-062F-77A5-6510-C0A226B1C5A3}" dt="2025-04-30T00:58:57.448" v="2823" actId="20577"/>
-          <ac:spMkLst>
-            <pc:docMk/>
-            <pc:sldMk cId="1524050222" sldId="693"/>
-            <ac:spMk id="7" creationId="{165C15A8-E0B4-D645-C5B0-153FADA7DC1B}"/>
-          </ac:spMkLst>
-        </pc:spChg>
-        <pc:spChg chg="mod">
-          <ac:chgData name="Lahiri, Demetrios" userId="S::dlahiri@smu.edu::9d1ad5ea-57b1-4018-85f6-0d05db0c1ea2" providerId="AD" clId="Web-{7B289495-062F-77A5-6510-C0A226B1C5A3}" dt="2025-04-30T00:59:28.308" v="2835" actId="20577"/>
-          <ac:spMkLst>
-            <pc:docMk/>
-            <pc:sldMk cId="1524050222" sldId="693"/>
-            <ac:spMk id="16" creationId="{F9CC5FD4-9AB6-38ED-DB45-E6FBE9FE5417}"/>
-          </ac:spMkLst>
-        </pc:spChg>
-      </pc:sldChg>
-      <pc:sldChg chg="add del replId">
-        <pc:chgData name="Lahiri, Demetrios" userId="S::dlahiri@smu.edu::9d1ad5ea-57b1-4018-85f6-0d05db0c1ea2" providerId="AD" clId="Web-{7B289495-062F-77A5-6510-C0A226B1C5A3}" dt="2025-04-30T00:49:00.147" v="2284"/>
-        <pc:sldMkLst>
-          <pc:docMk/>
-          <pc:sldMk cId="2442753842" sldId="694"/>
-        </pc:sldMkLst>
-      </pc:sldChg>
-      <pc:sldChg chg="modSp">
-        <pc:chgData name="Lahiri, Demetrios" userId="S::dlahiri@smu.edu::9d1ad5ea-57b1-4018-85f6-0d05db0c1ea2" providerId="AD" clId="Web-{7B289495-062F-77A5-6510-C0A226B1C5A3}" dt="2025-04-30T00:47:25.222" v="2271" actId="20577"/>
-        <pc:sldMkLst>
-          <pc:docMk/>
-          <pc:sldMk cId="3536170688" sldId="694"/>
-        </pc:sldMkLst>
-        <pc:spChg chg="mod">
-          <ac:chgData name="Lahiri, Demetrios" userId="S::dlahiri@smu.edu::9d1ad5ea-57b1-4018-85f6-0d05db0c1ea2" providerId="AD" clId="Web-{7B289495-062F-77A5-6510-C0A226B1C5A3}" dt="2025-04-30T00:47:25.222" v="2271" actId="20577"/>
-          <ac:spMkLst>
-            <pc:docMk/>
-            <pc:sldMk cId="3536170688" sldId="694"/>
-            <ac:spMk id="2" creationId="{689A4366-E458-190A-54B8-45DCC2141A6B}"/>
-          </ac:spMkLst>
-        </pc:spChg>
-      </pc:sldChg>
-      <pc:sldChg chg="add del replId">
-        <pc:chgData name="Lahiri, Demetrios" userId="S::dlahiri@smu.edu::9d1ad5ea-57b1-4018-85f6-0d05db0c1ea2" providerId="AD" clId="Web-{7B289495-062F-77A5-6510-C0A226B1C5A3}" dt="2025-04-30T00:48:58.241" v="2283"/>
-        <pc:sldMkLst>
-          <pc:docMk/>
-          <pc:sldMk cId="2411380321" sldId="695"/>
-        </pc:sldMkLst>
-      </pc:sldChg>
     </pc:docChg>
   </pc:docChgLst>
   <pc:docChgLst>
     <pc:chgData name="Eun, Morgan" userId="dbb1ad2b-7e27-4a54-93ef-47628e7a32c9" providerId="ADAL" clId="{0FEE287E-1966-394B-94BF-53038D774F09}"/>
     <pc:docChg chg="undo redo custSel addSld delSld modSld sldOrd">
-      <pc:chgData name="Eun, Morgan" userId="dbb1ad2b-7e27-4a54-93ef-47628e7a32c9" providerId="ADAL" clId="{0FEE287E-1966-394B-94BF-53038D774F09}" dt="2025-04-30T18:25:29.567" v="7872" actId="20577"/>
+      <pc:chgData name="Eun, Morgan" userId="dbb1ad2b-7e27-4a54-93ef-47628e7a32c9" providerId="ADAL" clId="{0FEE287E-1966-394B-94BF-53038D774F09}" dt="2025-04-30T21:00:00.425" v="7928" actId="1076"/>
       <pc:docMkLst>
         <pc:docMk/>
       </pc:docMkLst>
       <pc:sldChg chg="addSp modSp mod">
-        <pc:chgData name="Eun, Morgan" userId="dbb1ad2b-7e27-4a54-93ef-47628e7a32c9" providerId="ADAL" clId="{0FEE287E-1966-394B-94BF-53038D774F09}" dt="2025-04-30T04:30:44.966" v="7650" actId="20577"/>
+        <pc:chgData name="Eun, Morgan" userId="dbb1ad2b-7e27-4a54-93ef-47628e7a32c9" providerId="ADAL" clId="{0FEE287E-1966-394B-94BF-53038D774F09}" dt="2025-04-30T19:28:01.190" v="7873" actId="20577"/>
         <pc:sldMkLst>
           <pc:docMk/>
           <pc:sldMk cId="1505823097" sldId="265"/>
         </pc:sldMkLst>
         <pc:spChg chg="mod">
-          <ac:chgData name="Eun, Morgan" userId="dbb1ad2b-7e27-4a54-93ef-47628e7a32c9" providerId="ADAL" clId="{0FEE287E-1966-394B-94BF-53038D774F09}" dt="2025-04-29T00:32:21.796" v="1980" actId="20577"/>
+          <ac:chgData name="Eun, Morgan" userId="dbb1ad2b-7e27-4a54-93ef-47628e7a32c9" providerId="ADAL" clId="{0FEE287E-1966-394B-94BF-53038D774F09}" dt="2025-04-30T19:28:01.190" v="7873" actId="20577"/>
           <ac:spMkLst>
             <pc:docMk/>
             <pc:sldMk cId="1505823097" sldId="265"/>
@@ -815,7 +932,7 @@
         </pc:spChg>
       </pc:sldChg>
       <pc:sldChg chg="addSp delSp modSp mod modNotesTx">
-        <pc:chgData name="Eun, Morgan" userId="dbb1ad2b-7e27-4a54-93ef-47628e7a32c9" providerId="ADAL" clId="{0FEE287E-1966-394B-94BF-53038D774F09}" dt="2025-04-30T04:25:33.235" v="7615" actId="207"/>
+        <pc:chgData name="Eun, Morgan" userId="dbb1ad2b-7e27-4a54-93ef-47628e7a32c9" providerId="ADAL" clId="{0FEE287E-1966-394B-94BF-53038D774F09}" dt="2025-04-30T20:33:26.232" v="7926" actId="1076"/>
         <pc:sldMkLst>
           <pc:docMk/>
           <pc:sldMk cId="2204278369" sldId="279"/>
@@ -868,6 +985,14 @@
             <ac:spMk id="12" creationId="{9B24EC75-B2E6-0D0B-F2B8-C12B2782261A}"/>
           </ac:spMkLst>
         </pc:spChg>
+        <pc:picChg chg="mod">
+          <ac:chgData name="Eun, Morgan" userId="dbb1ad2b-7e27-4a54-93ef-47628e7a32c9" providerId="ADAL" clId="{0FEE287E-1966-394B-94BF-53038D774F09}" dt="2025-04-30T20:33:26.232" v="7926" actId="1076"/>
+          <ac:picMkLst>
+            <pc:docMk/>
+            <pc:sldMk cId="2204278369" sldId="279"/>
+            <ac:picMk id="10" creationId="{A0185114-A37D-C855-8F8A-53308DD1BC27}"/>
+          </ac:picMkLst>
+        </pc:picChg>
         <pc:picChg chg="mod">
           <ac:chgData name="Eun, Morgan" userId="dbb1ad2b-7e27-4a54-93ef-47628e7a32c9" providerId="ADAL" clId="{0FEE287E-1966-394B-94BF-53038D774F09}" dt="2025-04-30T01:05:11.434" v="5983"/>
           <ac:picMkLst>
@@ -965,7 +1090,7 @@
         </pc:picChg>
       </pc:sldChg>
       <pc:sldChg chg="addSp delSp modSp add del mod setBg">
-        <pc:chgData name="Eun, Morgan" userId="dbb1ad2b-7e27-4a54-93ef-47628e7a32c9" providerId="ADAL" clId="{0FEE287E-1966-394B-94BF-53038D774F09}" dt="2025-04-30T17:52:32.292" v="7871" actId="20577"/>
+        <pc:chgData name="Eun, Morgan" userId="dbb1ad2b-7e27-4a54-93ef-47628e7a32c9" providerId="ADAL" clId="{0FEE287E-1966-394B-94BF-53038D774F09}" dt="2025-04-30T21:00:00.425" v="7928" actId="1076"/>
         <pc:sldMkLst>
           <pc:docMk/>
           <pc:sldMk cId="2709205666" sldId="675"/>
@@ -979,7 +1104,7 @@
           </ac:spMkLst>
         </pc:spChg>
         <pc:spChg chg="mod">
-          <ac:chgData name="Eun, Morgan" userId="dbb1ad2b-7e27-4a54-93ef-47628e7a32c9" providerId="ADAL" clId="{0FEE287E-1966-394B-94BF-53038D774F09}" dt="2025-04-30T17:52:32.292" v="7871" actId="20577"/>
+          <ac:chgData name="Eun, Morgan" userId="dbb1ad2b-7e27-4a54-93ef-47628e7a32c9" providerId="ADAL" clId="{0FEE287E-1966-394B-94BF-53038D774F09}" dt="2025-04-30T21:00:00.425" v="7928" actId="1076"/>
           <ac:spMkLst>
             <pc:docMk/>
             <pc:sldMk cId="2709205666" sldId="675"/>
@@ -1288,11 +1413,19 @@
         </pc:spChg>
       </pc:sldChg>
       <pc:sldChg chg="addSp delSp modSp new mod">
-        <pc:chgData name="Eun, Morgan" userId="dbb1ad2b-7e27-4a54-93ef-47628e7a32c9" providerId="ADAL" clId="{0FEE287E-1966-394B-94BF-53038D774F09}" dt="2025-04-30T03:47:50.439" v="7432" actId="113"/>
+        <pc:chgData name="Eun, Morgan" userId="dbb1ad2b-7e27-4a54-93ef-47628e7a32c9" providerId="ADAL" clId="{0FEE287E-1966-394B-94BF-53038D774F09}" dt="2025-04-30T19:50:58.130" v="7916" actId="692"/>
         <pc:sldMkLst>
           <pc:docMk/>
           <pc:sldMk cId="1858521055" sldId="690"/>
         </pc:sldMkLst>
+        <pc:spChg chg="add mod">
+          <ac:chgData name="Eun, Morgan" userId="dbb1ad2b-7e27-4a54-93ef-47628e7a32c9" providerId="ADAL" clId="{0FEE287E-1966-394B-94BF-53038D774F09}" dt="2025-04-30T19:50:58.130" v="7916" actId="692"/>
+          <ac:spMkLst>
+            <pc:docMk/>
+            <pc:sldMk cId="1858521055" sldId="690"/>
+            <ac:spMk id="2" creationId="{39D6B2D9-2BBC-6155-DE22-FE5A4A890736}"/>
+          </ac:spMkLst>
+        </pc:spChg>
         <pc:spChg chg="del">
           <ac:chgData name="Eun, Morgan" userId="dbb1ad2b-7e27-4a54-93ef-47628e7a32c9" providerId="ADAL" clId="{0FEE287E-1966-394B-94BF-53038D774F09}" dt="2025-04-29T00:33:27.593" v="1981"/>
           <ac:spMkLst>
@@ -1913,98 +2046,219 @@
           </ac:spMkLst>
         </pc:spChg>
       </pc:sldChg>
-    </pc:docChg>
-  </pc:docChgLst>
-  <pc:docChgLst>
-    <pc:chgData name="Lahiri, Demetrios" userId="9d1ad5ea-57b1-4018-85f6-0d05db0c1ea2" providerId="ADAL" clId="{38814E23-57B3-49C4-BFE3-39731C5AE2A7}"/>
-    <pc:docChg chg="addSld delSld modSld">
-      <pc:chgData name="Lahiri, Demetrios" userId="9d1ad5ea-57b1-4018-85f6-0d05db0c1ea2" providerId="ADAL" clId="{38814E23-57B3-49C4-BFE3-39731C5AE2A7}" dt="2025-04-30T18:23:31.569" v="1" actId="47"/>
-      <pc:docMkLst>
-        <pc:docMk/>
-      </pc:docMkLst>
-      <pc:sldChg chg="del">
-        <pc:chgData name="Lahiri, Demetrios" userId="9d1ad5ea-57b1-4018-85f6-0d05db0c1ea2" providerId="ADAL" clId="{38814E23-57B3-49C4-BFE3-39731C5AE2A7}" dt="2025-04-30T18:23:31.569" v="1" actId="47"/>
+      <pc:sldChg chg="addSp modSp del">
+        <pc:chgData name="Eun, Morgan" userId="dbb1ad2b-7e27-4a54-93ef-47628e7a32c9" providerId="ADAL" clId="{0FEE287E-1966-394B-94BF-53038D774F09}" dt="2025-04-30T20:59:55.549" v="7927" actId="2696"/>
         <pc:sldMkLst>
           <pc:docMk/>
-          <pc:sldMk cId="4213065125" sldId="694"/>
-        </pc:sldMkLst>
-      </pc:sldChg>
-      <pc:sldChg chg="add">
-        <pc:chgData name="Lahiri, Demetrios" userId="9d1ad5ea-57b1-4018-85f6-0d05db0c1ea2" providerId="ADAL" clId="{38814E23-57B3-49C4-BFE3-39731C5AE2A7}" dt="2025-04-30T18:23:26.792" v="0"/>
-        <pc:sldMkLst>
-          <pc:docMk/>
-          <pc:sldMk cId="1129092985" sldId="695"/>
-        </pc:sldMkLst>
-      </pc:sldChg>
-    </pc:docChg>
-  </pc:docChgLst>
-  <pc:docChgLst>
-    <pc:chgData name="Lahiri, Demetrios" userId="S::dlahiri@smu.edu::9d1ad5ea-57b1-4018-85f6-0d05db0c1ea2" providerId="AD" clId="Web-{AECA3316-73A9-7695-51CF-9853D4C79B5C}"/>
-    <pc:docChg chg="addSld delSld modSld">
-      <pc:chgData name="Lahiri, Demetrios" userId="S::dlahiri@smu.edu::9d1ad5ea-57b1-4018-85f6-0d05db0c1ea2" providerId="AD" clId="Web-{AECA3316-73A9-7695-51CF-9853D4C79B5C}" dt="2025-04-30T16:34:00.153" v="485" actId="20577"/>
-      <pc:docMkLst>
-        <pc:docMk/>
-      </pc:docMkLst>
-      <pc:sldChg chg="modSp">
-        <pc:chgData name="Lahiri, Demetrios" userId="S::dlahiri@smu.edu::9d1ad5ea-57b1-4018-85f6-0d05db0c1ea2" providerId="AD" clId="Web-{AECA3316-73A9-7695-51CF-9853D4C79B5C}" dt="2025-04-30T16:34:00.153" v="485" actId="20577"/>
-        <pc:sldMkLst>
-          <pc:docMk/>
-          <pc:sldMk cId="3262927434" sldId="689"/>
+          <pc:sldMk cId="2815425597" sldId="696"/>
         </pc:sldMkLst>
         <pc:spChg chg="mod">
-          <ac:chgData name="Lahiri, Demetrios" userId="S::dlahiri@smu.edu::9d1ad5ea-57b1-4018-85f6-0d05db0c1ea2" providerId="AD" clId="Web-{AECA3316-73A9-7695-51CF-9853D4C79B5C}" dt="2025-04-30T16:34:00.153" v="485" actId="20577"/>
+          <ac:chgData name="Eun, Morgan" userId="dbb1ad2b-7e27-4a54-93ef-47628e7a32c9" providerId="ADAL" clId="{0FEE287E-1966-394B-94BF-53038D774F09}" dt="2025-04-30T19:48:29.919" v="7874"/>
           <ac:spMkLst>
             <pc:docMk/>
-            <pc:sldMk cId="3262927434" sldId="689"/>
-            <ac:spMk id="3" creationId="{ADDC5DA6-2943-20DD-AC3F-D3CF246D1C76}"/>
+            <pc:sldMk cId="2815425597" sldId="696"/>
+            <ac:spMk id="7" creationId="{A2F05734-57CA-E28E-8426-FDD0303674BA}"/>
           </ac:spMkLst>
         </pc:spChg>
-      </pc:sldChg>
-      <pc:sldChg chg="addSp modSp add del">
-        <pc:chgData name="Lahiri, Demetrios" userId="S::dlahiri@smu.edu::9d1ad5ea-57b1-4018-85f6-0d05db0c1ea2" providerId="AD" clId="Web-{AECA3316-73A9-7695-51CF-9853D4C79B5C}" dt="2025-04-30T16:20:41.787" v="474" actId="20577"/>
-        <pc:sldMkLst>
-          <pc:docMk/>
-          <pc:sldMk cId="1858521055" sldId="690"/>
-        </pc:sldMkLst>
         <pc:spChg chg="mod">
-          <ac:chgData name="Lahiri, Demetrios" userId="S::dlahiri@smu.edu::9d1ad5ea-57b1-4018-85f6-0d05db0c1ea2" providerId="AD" clId="Web-{AECA3316-73A9-7695-51CF-9853D4C79B5C}" dt="2025-04-30T16:20:41.787" v="474" actId="20577"/>
+          <ac:chgData name="Eun, Morgan" userId="dbb1ad2b-7e27-4a54-93ef-47628e7a32c9" providerId="ADAL" clId="{0FEE287E-1966-394B-94BF-53038D774F09}" dt="2025-04-30T19:48:29.919" v="7874"/>
           <ac:spMkLst>
             <pc:docMk/>
-            <pc:sldMk cId="1858521055" sldId="690"/>
-            <ac:spMk id="3" creationId="{B62CDD79-84A4-3C5E-10B4-EC48939503B9}"/>
+            <pc:sldMk cId="2815425597" sldId="696"/>
+            <ac:spMk id="8" creationId="{4CCECE3A-C22F-F5A3-E81D-958B9161CD93}"/>
           </ac:spMkLst>
         </pc:spChg>
-        <pc:spChg chg="add mod">
-          <ac:chgData name="Lahiri, Demetrios" userId="S::dlahiri@smu.edu::9d1ad5ea-57b1-4018-85f6-0d05db0c1ea2" providerId="AD" clId="Web-{AECA3316-73A9-7695-51CF-9853D4C79B5C}" dt="2025-04-30T15:07:36.754" v="267" actId="20577"/>
+        <pc:spChg chg="mod">
+          <ac:chgData name="Eun, Morgan" userId="dbb1ad2b-7e27-4a54-93ef-47628e7a32c9" providerId="ADAL" clId="{0FEE287E-1966-394B-94BF-53038D774F09}" dt="2025-04-30T19:48:29.919" v="7874"/>
           <ac:spMkLst>
             <pc:docMk/>
-            <pc:sldMk cId="1858521055" sldId="690"/>
-            <ac:spMk id="10" creationId="{22056BB8-CA6F-3B6F-F08C-5B55E1BA437C}"/>
+            <pc:sldMk cId="2815425597" sldId="696"/>
+            <ac:spMk id="9" creationId="{E3443174-769A-FDD4-7560-3F4EDFFE2821}"/>
           </ac:spMkLst>
         </pc:spChg>
-        <pc:picChg chg="add mod modCrop">
-          <ac:chgData name="Lahiri, Demetrios" userId="S::dlahiri@smu.edu::9d1ad5ea-57b1-4018-85f6-0d05db0c1ea2" providerId="AD" clId="Web-{AECA3316-73A9-7695-51CF-9853D4C79B5C}" dt="2025-04-30T15:00:12.128" v="99" actId="1076"/>
+        <pc:spChg chg="mod">
+          <ac:chgData name="Eun, Morgan" userId="dbb1ad2b-7e27-4a54-93ef-47628e7a32c9" providerId="ADAL" clId="{0FEE287E-1966-394B-94BF-53038D774F09}" dt="2025-04-30T19:48:29.919" v="7874"/>
+          <ac:spMkLst>
+            <pc:docMk/>
+            <pc:sldMk cId="2815425597" sldId="696"/>
+            <ac:spMk id="10" creationId="{EF44BDFF-679B-1743-796A-5AE36CBD51CE}"/>
+          </ac:spMkLst>
+        </pc:spChg>
+        <pc:spChg chg="mod">
+          <ac:chgData name="Eun, Morgan" userId="dbb1ad2b-7e27-4a54-93ef-47628e7a32c9" providerId="ADAL" clId="{0FEE287E-1966-394B-94BF-53038D774F09}" dt="2025-04-30T19:48:29.919" v="7874"/>
+          <ac:spMkLst>
+            <pc:docMk/>
+            <pc:sldMk cId="2815425597" sldId="696"/>
+            <ac:spMk id="11" creationId="{BE08011E-FB15-C911-4A50-BF566D65D18E}"/>
+          </ac:spMkLst>
+        </pc:spChg>
+        <pc:grpChg chg="add mod">
+          <ac:chgData name="Eun, Morgan" userId="dbb1ad2b-7e27-4a54-93ef-47628e7a32c9" providerId="ADAL" clId="{0FEE287E-1966-394B-94BF-53038D774F09}" dt="2025-04-30T19:48:29.919" v="7874"/>
+          <ac:grpSpMkLst>
+            <pc:docMk/>
+            <pc:sldMk cId="2815425597" sldId="696"/>
+            <ac:grpSpMk id="3" creationId="{EE226BFC-0C5E-1E93-DABF-2600E550F791}"/>
+          </ac:grpSpMkLst>
+        </pc:grpChg>
+        <pc:picChg chg="mod">
+          <ac:chgData name="Eun, Morgan" userId="dbb1ad2b-7e27-4a54-93ef-47628e7a32c9" providerId="ADAL" clId="{0FEE287E-1966-394B-94BF-53038D774F09}" dt="2025-04-30T19:48:29.919" v="7874"/>
           <ac:picMkLst>
             <pc:docMk/>
-            <pc:sldMk cId="1858521055" sldId="690"/>
-            <ac:picMk id="11" creationId="{10E02E43-2EA5-9D91-F3E1-D105493A5139}"/>
+            <pc:sldMk cId="2815425597" sldId="696"/>
+            <ac:picMk id="5" creationId="{F8C2BA6D-3A47-3AEE-2BA9-22D7984D46BC}"/>
           </ac:picMkLst>
         </pc:picChg>
       </pc:sldChg>
-      <pc:sldChg chg="modSp">
-        <pc:chgData name="Lahiri, Demetrios" userId="S::dlahiri@smu.edu::9d1ad5ea-57b1-4018-85f6-0d05db0c1ea2" providerId="AD" clId="Web-{AECA3316-73A9-7695-51CF-9853D4C79B5C}" dt="2025-04-30T15:09:48.368" v="273" actId="20577"/>
+      <pc:sldChg chg="addSp delSp modSp add mod ord">
+        <pc:chgData name="Eun, Morgan" userId="dbb1ad2b-7e27-4a54-93ef-47628e7a32c9" providerId="ADAL" clId="{0FEE287E-1966-394B-94BF-53038D774F09}" dt="2025-04-30T19:49:21.902" v="7898" actId="255"/>
         <pc:sldMkLst>
           <pc:docMk/>
-          <pc:sldMk cId="1524050222" sldId="693"/>
+          <pc:sldMk cId="2791662657" sldId="697"/>
         </pc:sldMkLst>
-        <pc:spChg chg="mod">
-          <ac:chgData name="Lahiri, Demetrios" userId="S::dlahiri@smu.edu::9d1ad5ea-57b1-4018-85f6-0d05db0c1ea2" providerId="AD" clId="Web-{AECA3316-73A9-7695-51CF-9853D4C79B5C}" dt="2025-04-30T15:09:48.368" v="273" actId="20577"/>
+        <pc:spChg chg="del">
+          <ac:chgData name="Eun, Morgan" userId="dbb1ad2b-7e27-4a54-93ef-47628e7a32c9" providerId="ADAL" clId="{0FEE287E-1966-394B-94BF-53038D774F09}" dt="2025-04-30T19:48:47.939" v="7889" actId="478"/>
           <ac:spMkLst>
             <pc:docMk/>
-            <pc:sldMk cId="1524050222" sldId="693"/>
-            <ac:spMk id="7" creationId="{165C15A8-E0B4-D645-C5B0-153FADA7DC1B}"/>
+            <pc:sldMk cId="2791662657" sldId="697"/>
+            <ac:spMk id="5" creationId="{E337C175-DD0C-BEEB-2383-099BED3C755C}"/>
           </ac:spMkLst>
         </pc:spChg>
+        <pc:spChg chg="mod">
+          <ac:chgData name="Eun, Morgan" userId="dbb1ad2b-7e27-4a54-93ef-47628e7a32c9" providerId="ADAL" clId="{0FEE287E-1966-394B-94BF-53038D774F09}" dt="2025-04-30T19:48:44.736" v="7888" actId="20577"/>
+          <ac:spMkLst>
+            <pc:docMk/>
+            <pc:sldMk cId="2791662657" sldId="697"/>
+            <ac:spMk id="6" creationId="{04A06671-EEF6-AA0D-49FA-D482DCCA146E}"/>
+          </ac:spMkLst>
+        </pc:spChg>
+        <pc:spChg chg="del">
+          <ac:chgData name="Eun, Morgan" userId="dbb1ad2b-7e27-4a54-93ef-47628e7a32c9" providerId="ADAL" clId="{0FEE287E-1966-394B-94BF-53038D774F09}" dt="2025-04-30T19:48:47.939" v="7889" actId="478"/>
+          <ac:spMkLst>
+            <pc:docMk/>
+            <pc:sldMk cId="2791662657" sldId="697"/>
+            <ac:spMk id="7" creationId="{55D45B47-27D1-43CF-0246-84F38956D007}"/>
+          </ac:spMkLst>
+        </pc:spChg>
+        <pc:spChg chg="del">
+          <ac:chgData name="Eun, Morgan" userId="dbb1ad2b-7e27-4a54-93ef-47628e7a32c9" providerId="ADAL" clId="{0FEE287E-1966-394B-94BF-53038D774F09}" dt="2025-04-30T19:48:47.939" v="7889" actId="478"/>
+          <ac:spMkLst>
+            <pc:docMk/>
+            <pc:sldMk cId="2791662657" sldId="697"/>
+            <ac:spMk id="8" creationId="{82C4F266-DF31-D879-F9ED-7935D1B8B7E4}"/>
+          </ac:spMkLst>
+        </pc:spChg>
+        <pc:spChg chg="del">
+          <ac:chgData name="Eun, Morgan" userId="dbb1ad2b-7e27-4a54-93ef-47628e7a32c9" providerId="ADAL" clId="{0FEE287E-1966-394B-94BF-53038D774F09}" dt="2025-04-30T19:48:47.939" v="7889" actId="478"/>
+          <ac:spMkLst>
+            <pc:docMk/>
+            <pc:sldMk cId="2791662657" sldId="697"/>
+            <ac:spMk id="9" creationId="{A6625932-61E1-78F1-8449-0CB0FB7C8B18}"/>
+          </ac:spMkLst>
+        </pc:spChg>
+        <pc:spChg chg="mod">
+          <ac:chgData name="Eun, Morgan" userId="dbb1ad2b-7e27-4a54-93ef-47628e7a32c9" providerId="ADAL" clId="{0FEE287E-1966-394B-94BF-53038D774F09}" dt="2025-04-30T19:48:49.077" v="7890"/>
+          <ac:spMkLst>
+            <pc:docMk/>
+            <pc:sldMk cId="2791662657" sldId="697"/>
+            <ac:spMk id="20" creationId="{69ABF5C8-86BC-9D13-425B-66A9D4CBDEEE}"/>
+          </ac:spMkLst>
+        </pc:spChg>
+        <pc:spChg chg="mod">
+          <ac:chgData name="Eun, Morgan" userId="dbb1ad2b-7e27-4a54-93ef-47628e7a32c9" providerId="ADAL" clId="{0FEE287E-1966-394B-94BF-53038D774F09}" dt="2025-04-30T19:49:13.133" v="7896" actId="1076"/>
+          <ac:spMkLst>
+            <pc:docMk/>
+            <pc:sldMk cId="2791662657" sldId="697"/>
+            <ac:spMk id="22" creationId="{90552561-B453-F46F-0909-5A20388D17AF}"/>
+          </ac:spMkLst>
+        </pc:spChg>
+        <pc:spChg chg="mod">
+          <ac:chgData name="Eun, Morgan" userId="dbb1ad2b-7e27-4a54-93ef-47628e7a32c9" providerId="ADAL" clId="{0FEE287E-1966-394B-94BF-53038D774F09}" dt="2025-04-30T19:48:49.077" v="7890"/>
+          <ac:spMkLst>
+            <pc:docMk/>
+            <pc:sldMk cId="2791662657" sldId="697"/>
+            <ac:spMk id="23" creationId="{20C1CFE3-5DD1-CC51-0205-4169E8B53487}"/>
+          </ac:spMkLst>
+        </pc:spChg>
+        <pc:spChg chg="mod">
+          <ac:chgData name="Eun, Morgan" userId="dbb1ad2b-7e27-4a54-93ef-47628e7a32c9" providerId="ADAL" clId="{0FEE287E-1966-394B-94BF-53038D774F09}" dt="2025-04-30T19:49:21.902" v="7898" actId="255"/>
+          <ac:spMkLst>
+            <pc:docMk/>
+            <pc:sldMk cId="2791662657" sldId="697"/>
+            <ac:spMk id="26" creationId="{8C83B5CD-90A8-24FB-C2F2-8D003E04F25D}"/>
+          </ac:spMkLst>
+        </pc:spChg>
+        <pc:spChg chg="mod">
+          <ac:chgData name="Eun, Morgan" userId="dbb1ad2b-7e27-4a54-93ef-47628e7a32c9" providerId="ADAL" clId="{0FEE287E-1966-394B-94BF-53038D774F09}" dt="2025-04-30T19:49:21.902" v="7898" actId="255"/>
+          <ac:spMkLst>
+            <pc:docMk/>
+            <pc:sldMk cId="2791662657" sldId="697"/>
+            <ac:spMk id="27" creationId="{F1029899-7AD5-0B1F-B019-CC9307509A56}"/>
+          </ac:spMkLst>
+        </pc:spChg>
+        <pc:grpChg chg="add mod">
+          <ac:chgData name="Eun, Morgan" userId="dbb1ad2b-7e27-4a54-93ef-47628e7a32c9" providerId="ADAL" clId="{0FEE287E-1966-394B-94BF-53038D774F09}" dt="2025-04-30T19:49:01.726" v="7893" actId="1076"/>
+          <ac:grpSpMkLst>
+            <pc:docMk/>
+            <pc:sldMk cId="2791662657" sldId="697"/>
+            <ac:grpSpMk id="2" creationId="{24F6B54A-C9F6-9BC9-45DB-4A8CDD8A803E}"/>
+          </ac:grpSpMkLst>
+        </pc:grpChg>
+        <pc:picChg chg="mod">
+          <ac:chgData name="Eun, Morgan" userId="dbb1ad2b-7e27-4a54-93ef-47628e7a32c9" providerId="ADAL" clId="{0FEE287E-1966-394B-94BF-53038D774F09}" dt="2025-04-30T19:48:49.077" v="7890"/>
+          <ac:picMkLst>
+            <pc:docMk/>
+            <pc:sldMk cId="2791662657" sldId="697"/>
+            <ac:picMk id="11" creationId="{C0999A8D-2288-0896-B121-801376B87ECB}"/>
+          </ac:picMkLst>
+        </pc:picChg>
+        <pc:picChg chg="del">
+          <ac:chgData name="Eun, Morgan" userId="dbb1ad2b-7e27-4a54-93ef-47628e7a32c9" providerId="ADAL" clId="{0FEE287E-1966-394B-94BF-53038D774F09}" dt="2025-04-30T19:48:47.939" v="7889" actId="478"/>
+          <ac:picMkLst>
+            <pc:docMk/>
+            <pc:sldMk cId="2791662657" sldId="697"/>
+            <ac:picMk id="14" creationId="{A1075474-DEA7-0C34-601D-7875642C35F7}"/>
+          </ac:picMkLst>
+        </pc:picChg>
+        <pc:picChg chg="del">
+          <ac:chgData name="Eun, Morgan" userId="dbb1ad2b-7e27-4a54-93ef-47628e7a32c9" providerId="ADAL" clId="{0FEE287E-1966-394B-94BF-53038D774F09}" dt="2025-04-30T19:48:47.939" v="7889" actId="478"/>
+          <ac:picMkLst>
+            <pc:docMk/>
+            <pc:sldMk cId="2791662657" sldId="697"/>
+            <ac:picMk id="15" creationId="{BBC97F1B-3930-AD73-6D99-304EF2F1CEF4}"/>
+          </ac:picMkLst>
+        </pc:picChg>
+        <pc:picChg chg="del">
+          <ac:chgData name="Eun, Morgan" userId="dbb1ad2b-7e27-4a54-93ef-47628e7a32c9" providerId="ADAL" clId="{0FEE287E-1966-394B-94BF-53038D774F09}" dt="2025-04-30T19:48:47.939" v="7889" actId="478"/>
+          <ac:picMkLst>
+            <pc:docMk/>
+            <pc:sldMk cId="2791662657" sldId="697"/>
+            <ac:picMk id="16" creationId="{EF3457DB-BD69-7644-C8D1-1F9F349713D4}"/>
+          </ac:picMkLst>
+        </pc:picChg>
+        <pc:picChg chg="del">
+          <ac:chgData name="Eun, Morgan" userId="dbb1ad2b-7e27-4a54-93ef-47628e7a32c9" providerId="ADAL" clId="{0FEE287E-1966-394B-94BF-53038D774F09}" dt="2025-04-30T19:48:47.939" v="7889" actId="478"/>
+          <ac:picMkLst>
+            <pc:docMk/>
+            <pc:sldMk cId="2791662657" sldId="697"/>
+            <ac:picMk id="18" creationId="{C07894D7-3C92-13DF-00AB-92B125065C02}"/>
+          </ac:picMkLst>
+        </pc:picChg>
+        <pc:picChg chg="del">
+          <ac:chgData name="Eun, Morgan" userId="dbb1ad2b-7e27-4a54-93ef-47628e7a32c9" providerId="ADAL" clId="{0FEE287E-1966-394B-94BF-53038D774F09}" dt="2025-04-30T19:48:47.939" v="7889" actId="478"/>
+          <ac:picMkLst>
+            <pc:docMk/>
+            <pc:sldMk cId="2791662657" sldId="697"/>
+            <ac:picMk id="21" creationId="{50B7168F-515A-166B-A36B-86773055BB31}"/>
+          </ac:picMkLst>
+        </pc:picChg>
+        <pc:picChg chg="del">
+          <ac:chgData name="Eun, Morgan" userId="dbb1ad2b-7e27-4a54-93ef-47628e7a32c9" providerId="ADAL" clId="{0FEE287E-1966-394B-94BF-53038D774F09}" dt="2025-04-30T19:48:47.939" v="7889" actId="478"/>
+          <ac:picMkLst>
+            <pc:docMk/>
+            <pc:sldMk cId="2791662657" sldId="697"/>
+            <ac:picMk id="30" creationId="{AD1FC058-2462-72D2-8761-5C34E608B8F8}"/>
+          </ac:picMkLst>
+        </pc:picChg>
       </pc:sldChg>
     </pc:docChg>
   </pc:docChgLst>
@@ -2057,19 +2311,19 @@
   </pc:docChgLst>
   <pc:docChgLst>
     <pc:chgData name="Gijsbertsen, Laurens" userId="35a76cf5-4e68-4cb5-81af-839fc0604d05" providerId="ADAL" clId="{36A048C0-A877-0741-BFC6-3146A6F58B53}"/>
-    <pc:docChg chg="custSel modSld modMainMaster">
-      <pc:chgData name="Gijsbertsen, Laurens" userId="35a76cf5-4e68-4cb5-81af-839fc0604d05" providerId="ADAL" clId="{36A048C0-A877-0741-BFC6-3146A6F58B53}" dt="2025-04-30T18:26:51.554" v="25" actId="1076"/>
+    <pc:docChg chg="undo redo custSel modSld modMainMaster">
+      <pc:chgData name="Gijsbertsen, Laurens" userId="35a76cf5-4e68-4cb5-81af-839fc0604d05" providerId="ADAL" clId="{36A048C0-A877-0741-BFC6-3146A6F58B53}" dt="2025-04-30T20:31:11.281" v="38" actId="1076"/>
       <pc:docMkLst>
         <pc:docMk/>
       </pc:docMkLst>
       <pc:sldChg chg="modSp mod">
-        <pc:chgData name="Gijsbertsen, Laurens" userId="35a76cf5-4e68-4cb5-81af-839fc0604d05" providerId="ADAL" clId="{36A048C0-A877-0741-BFC6-3146A6F58B53}" dt="2025-04-30T17:09:18.193" v="2" actId="1076"/>
+        <pc:chgData name="Gijsbertsen, Laurens" userId="35a76cf5-4e68-4cb5-81af-839fc0604d05" providerId="ADAL" clId="{36A048C0-A877-0741-BFC6-3146A6F58B53}" dt="2025-04-30T20:29:28.446" v="35" actId="14100"/>
         <pc:sldMkLst>
           <pc:docMk/>
           <pc:sldMk cId="1505823097" sldId="265"/>
         </pc:sldMkLst>
         <pc:spChg chg="mod">
-          <ac:chgData name="Gijsbertsen, Laurens" userId="35a76cf5-4e68-4cb5-81af-839fc0604d05" providerId="ADAL" clId="{36A048C0-A877-0741-BFC6-3146A6F58B53}" dt="2025-04-30T17:09:18.193" v="2" actId="1076"/>
+          <ac:chgData name="Gijsbertsen, Laurens" userId="35a76cf5-4e68-4cb5-81af-839fc0604d05" providerId="ADAL" clId="{36A048C0-A877-0741-BFC6-3146A6F58B53}" dt="2025-04-30T20:29:28.446" v="35" actId="14100"/>
           <ac:spMkLst>
             <pc:docMk/>
             <pc:sldMk cId="1505823097" sldId="265"/>
@@ -2077,7 +2331,15 @@
           </ac:spMkLst>
         </pc:spChg>
         <pc:spChg chg="mod">
-          <ac:chgData name="Gijsbertsen, Laurens" userId="35a76cf5-4e68-4cb5-81af-839fc0604d05" providerId="ADAL" clId="{36A048C0-A877-0741-BFC6-3146A6F58B53}" dt="2025-04-30T17:09:15.035" v="0"/>
+          <ac:chgData name="Gijsbertsen, Laurens" userId="35a76cf5-4e68-4cb5-81af-839fc0604d05" providerId="ADAL" clId="{36A048C0-A877-0741-BFC6-3146A6F58B53}" dt="2025-04-30T20:28:42.810" v="28" actId="14100"/>
+          <ac:spMkLst>
+            <pc:docMk/>
+            <pc:sldMk cId="1505823097" sldId="265"/>
+            <ac:spMk id="3" creationId="{67376405-A736-F70F-6BFC-69505CA7DFE0}"/>
+          </ac:spMkLst>
+        </pc:spChg>
+        <pc:spChg chg="mod">
+          <ac:chgData name="Gijsbertsen, Laurens" userId="35a76cf5-4e68-4cb5-81af-839fc0604d05" providerId="ADAL" clId="{36A048C0-A877-0741-BFC6-3146A6F58B53}" dt="2025-04-30T20:29:28.446" v="35" actId="14100"/>
           <ac:spMkLst>
             <pc:docMk/>
             <pc:sldMk cId="1505823097" sldId="265"/>
@@ -2085,12 +2347,20 @@
           </ac:spMkLst>
         </pc:spChg>
       </pc:sldChg>
-      <pc:sldChg chg="modSp">
-        <pc:chgData name="Gijsbertsen, Laurens" userId="35a76cf5-4e68-4cb5-81af-839fc0604d05" providerId="ADAL" clId="{36A048C0-A877-0741-BFC6-3146A6F58B53}" dt="2025-04-30T17:49:43.541" v="7"/>
+      <pc:sldChg chg="modSp mod">
+        <pc:chgData name="Gijsbertsen, Laurens" userId="35a76cf5-4e68-4cb5-81af-839fc0604d05" providerId="ADAL" clId="{36A048C0-A877-0741-BFC6-3146A6F58B53}" dt="2025-04-30T20:31:11.281" v="38" actId="1076"/>
         <pc:sldMkLst>
           <pc:docMk/>
           <pc:sldMk cId="2204278369" sldId="279"/>
         </pc:sldMkLst>
+        <pc:spChg chg="mod">
+          <ac:chgData name="Gijsbertsen, Laurens" userId="35a76cf5-4e68-4cb5-81af-839fc0604d05" providerId="ADAL" clId="{36A048C0-A877-0741-BFC6-3146A6F58B53}" dt="2025-04-30T20:29:02.476" v="31" actId="20577"/>
+          <ac:spMkLst>
+            <pc:docMk/>
+            <pc:sldMk cId="2204278369" sldId="279"/>
+            <ac:spMk id="2" creationId="{56140C4E-4396-0F28-5699-21BA9AFF53C9}"/>
+          </ac:spMkLst>
+        </pc:spChg>
         <pc:spChg chg="mod">
           <ac:chgData name="Gijsbertsen, Laurens" userId="35a76cf5-4e68-4cb5-81af-839fc0604d05" providerId="ADAL" clId="{36A048C0-A877-0741-BFC6-3146A6F58B53}" dt="2025-04-30T17:49:43.541" v="7"/>
           <ac:spMkLst>
@@ -2099,6 +2369,14 @@
             <ac:spMk id="4" creationId="{052BBF47-4639-0A62-6009-AFAD5F88287A}"/>
           </ac:spMkLst>
         </pc:spChg>
+        <pc:picChg chg="mod">
+          <ac:chgData name="Gijsbertsen, Laurens" userId="35a76cf5-4e68-4cb5-81af-839fc0604d05" providerId="ADAL" clId="{36A048C0-A877-0741-BFC6-3146A6F58B53}" dt="2025-04-30T20:31:11.281" v="38" actId="1076"/>
+          <ac:picMkLst>
+            <pc:docMk/>
+            <pc:sldMk cId="2204278369" sldId="279"/>
+            <ac:picMk id="10" creationId="{A0185114-A37D-C855-8F8A-53308DD1BC27}"/>
+          </ac:picMkLst>
+        </pc:picChg>
       </pc:sldChg>
       <pc:sldChg chg="modSp mod">
         <pc:chgData name="Gijsbertsen, Laurens" userId="35a76cf5-4e68-4cb5-81af-839fc0604d05" providerId="ADAL" clId="{36A048C0-A877-0741-BFC6-3146A6F58B53}" dt="2025-04-30T17:54:19.768" v="17" actId="33524"/>
@@ -2120,6 +2398,21 @@
             <pc:docMk/>
             <pc:sldMk cId="2012267991" sldId="280"/>
             <ac:spMk id="9" creationId="{7E653C0D-868B-9F63-0E72-191ABEBFF3BE}"/>
+          </ac:spMkLst>
+        </pc:spChg>
+      </pc:sldChg>
+      <pc:sldChg chg="modSp mod">
+        <pc:chgData name="Gijsbertsen, Laurens" userId="35a76cf5-4e68-4cb5-81af-839fc0604d05" providerId="ADAL" clId="{36A048C0-A877-0741-BFC6-3146A6F58B53}" dt="2025-04-30T20:28:35.446" v="27" actId="1076"/>
+        <pc:sldMkLst>
+          <pc:docMk/>
+          <pc:sldMk cId="2709205666" sldId="675"/>
+        </pc:sldMkLst>
+        <pc:spChg chg="mod">
+          <ac:chgData name="Gijsbertsen, Laurens" userId="35a76cf5-4e68-4cb5-81af-839fc0604d05" providerId="ADAL" clId="{36A048C0-A877-0741-BFC6-3146A6F58B53}" dt="2025-04-30T20:28:35.446" v="27" actId="1076"/>
+          <ac:spMkLst>
+            <pc:docMk/>
+            <pc:sldMk cId="2709205666" sldId="675"/>
+            <ac:spMk id="3" creationId="{BE314DDB-AFD9-8A0D-81BE-7C71EBD4906B}"/>
           </ac:spMkLst>
         </pc:spChg>
       </pc:sldChg>
@@ -2292,6 +2585,21 @@
           </ac:spMkLst>
         </pc:spChg>
       </pc:sldChg>
+      <pc:sldChg chg="modSp mod">
+        <pc:chgData name="Gijsbertsen, Laurens" userId="35a76cf5-4e68-4cb5-81af-839fc0604d05" providerId="ADAL" clId="{36A048C0-A877-0741-BFC6-3146A6F58B53}" dt="2025-04-30T20:29:41.502" v="36"/>
+        <pc:sldMkLst>
+          <pc:docMk/>
+          <pc:sldMk cId="1129092985" sldId="695"/>
+        </pc:sldMkLst>
+        <pc:spChg chg="mod">
+          <ac:chgData name="Gijsbertsen, Laurens" userId="35a76cf5-4e68-4cb5-81af-839fc0604d05" providerId="ADAL" clId="{36A048C0-A877-0741-BFC6-3146A6F58B53}" dt="2025-04-30T20:29:41.502" v="36"/>
+          <ac:spMkLst>
+            <pc:docMk/>
+            <pc:sldMk cId="1129092985" sldId="695"/>
+            <ac:spMk id="4" creationId="{999787CC-4E26-2594-4CD5-366021E15447}"/>
+          </ac:spMkLst>
+        </pc:spChg>
+      </pc:sldChg>
       <pc:sldMasterChg chg="modSldLayout">
         <pc:chgData name="Gijsbertsen, Laurens" userId="35a76cf5-4e68-4cb5-81af-839fc0604d05" providerId="ADAL" clId="{36A048C0-A877-0741-BFC6-3146A6F58B53}" dt="2025-04-30T17:47:45.105" v="3" actId="313"/>
         <pc:sldMasterMkLst>
@@ -2319,60 +2627,89 @@
     </pc:docChg>
   </pc:docChgLst>
   <pc:docChgLst>
-    <pc:chgData name="Kroeger, William" userId="S::wkroeger@smu.edu::9769a18c-35e5-46de-999e-56a20cde7d62" providerId="AD" clId="Web-{AB4AAF8C-80FC-F755-22F5-A59AC850F230}"/>
-    <pc:docChg chg="modSld">
-      <pc:chgData name="Kroeger, William" userId="S::wkroeger@smu.edu::9769a18c-35e5-46de-999e-56a20cde7d62" providerId="AD" clId="Web-{AB4AAF8C-80FC-F755-22F5-A59AC850F230}" dt="2025-04-30T01:31:50.459" v="8" actId="14100"/>
+    <pc:chgData name="Lahiri, Demetrios" userId="S::dlahiri@smu.edu::9d1ad5ea-57b1-4018-85f6-0d05db0c1ea2" providerId="AD" clId="Web-{4E657F89-8034-136D-A6D8-6CA256C294F5}"/>
+    <pc:docChg chg="addSld modSld">
+      <pc:chgData name="Lahiri, Demetrios" userId="S::dlahiri@smu.edu::9d1ad5ea-57b1-4018-85f6-0d05db0c1ea2" providerId="AD" clId="Web-{4E657F89-8034-136D-A6D8-6CA256C294F5}" dt="2025-04-29T00:33:10.444" v="67" actId="20577"/>
       <pc:docMkLst>
         <pc:docMk/>
       </pc:docMkLst>
       <pc:sldChg chg="modSp">
-        <pc:chgData name="Kroeger, William" userId="S::wkroeger@smu.edu::9769a18c-35e5-46de-999e-56a20cde7d62" providerId="AD" clId="Web-{AB4AAF8C-80FC-F755-22F5-A59AC850F230}" dt="2025-04-30T01:31:50.459" v="8" actId="14100"/>
+        <pc:chgData name="Lahiri, Demetrios" userId="S::dlahiri@smu.edu::9d1ad5ea-57b1-4018-85f6-0d05db0c1ea2" providerId="AD" clId="Web-{4E657F89-8034-136D-A6D8-6CA256C294F5}" dt="2025-04-29T00:33:10.444" v="67" actId="20577"/>
+        <pc:sldMkLst>
+          <pc:docMk/>
+          <pc:sldMk cId="2204278369" sldId="279"/>
+        </pc:sldMkLst>
+        <pc:spChg chg="mod">
+          <ac:chgData name="Lahiri, Demetrios" userId="S::dlahiri@smu.edu::9d1ad5ea-57b1-4018-85f6-0d05db0c1ea2" providerId="AD" clId="Web-{4E657F89-8034-136D-A6D8-6CA256C294F5}" dt="2025-04-29T00:33:10.444" v="67" actId="20577"/>
+          <ac:spMkLst>
+            <pc:docMk/>
+            <pc:sldMk cId="2204278369" sldId="279"/>
+            <ac:spMk id="3" creationId="{B459024D-4E10-F5C5-8178-BBD9C3E290C0}"/>
+          </ac:spMkLst>
+        </pc:spChg>
+      </pc:sldChg>
+      <pc:sldChg chg="modSp">
+        <pc:chgData name="Lahiri, Demetrios" userId="S::dlahiri@smu.edu::9d1ad5ea-57b1-4018-85f6-0d05db0c1ea2" providerId="AD" clId="Web-{4E657F89-8034-136D-A6D8-6CA256C294F5}" dt="2025-04-28T23:29:48.763" v="19" actId="20577"/>
+        <pc:sldMkLst>
+          <pc:docMk/>
+          <pc:sldMk cId="2012267991" sldId="280"/>
+        </pc:sldMkLst>
+        <pc:spChg chg="mod">
+          <ac:chgData name="Lahiri, Demetrios" userId="S::dlahiri@smu.edu::9d1ad5ea-57b1-4018-85f6-0d05db0c1ea2" providerId="AD" clId="Web-{4E657F89-8034-136D-A6D8-6CA256C294F5}" dt="2025-04-28T23:29:48.763" v="19" actId="20577"/>
+          <ac:spMkLst>
+            <pc:docMk/>
+            <pc:sldMk cId="2012267991" sldId="280"/>
+            <ac:spMk id="6" creationId="{7227299B-8512-10B0-622E-C1DC7995537D}"/>
+          </ac:spMkLst>
+        </pc:spChg>
+      </pc:sldChg>
+      <pc:sldChg chg="modSp">
+        <pc:chgData name="Lahiri, Demetrios" userId="S::dlahiri@smu.edu::9d1ad5ea-57b1-4018-85f6-0d05db0c1ea2" providerId="AD" clId="Web-{4E657F89-8034-136D-A6D8-6CA256C294F5}" dt="2025-04-28T22:52:18.833" v="17"/>
+        <pc:sldMkLst>
+          <pc:docMk/>
+          <pc:sldMk cId="82344637" sldId="688"/>
+        </pc:sldMkLst>
+        <pc:graphicFrameChg chg="mod modGraphic">
+          <ac:chgData name="Lahiri, Demetrios" userId="S::dlahiri@smu.edu::9d1ad5ea-57b1-4018-85f6-0d05db0c1ea2" providerId="AD" clId="Web-{4E657F89-8034-136D-A6D8-6CA256C294F5}" dt="2025-04-28T22:52:18.833" v="17"/>
+          <ac:graphicFrameMkLst>
+            <pc:docMk/>
+            <pc:sldMk cId="82344637" sldId="688"/>
+            <ac:graphicFrameMk id="43" creationId="{B9510C78-EC26-EC73-1C3F-C420B4D496D0}"/>
+          </ac:graphicFrameMkLst>
+        </pc:graphicFrameChg>
+      </pc:sldChg>
+      <pc:sldChg chg="modSp new">
+        <pc:chgData name="Lahiri, Demetrios" userId="S::dlahiri@smu.edu::9d1ad5ea-57b1-4018-85f6-0d05db0c1ea2" providerId="AD" clId="Web-{4E657F89-8034-136D-A6D8-6CA256C294F5}" dt="2025-04-28T23:30:39.093" v="65" actId="20577"/>
         <pc:sldMkLst>
           <pc:docMk/>
           <pc:sldMk cId="2290687881" sldId="691"/>
         </pc:sldMkLst>
         <pc:spChg chg="mod">
-          <ac:chgData name="Kroeger, William" userId="S::wkroeger@smu.edu::9769a18c-35e5-46de-999e-56a20cde7d62" providerId="AD" clId="Web-{AB4AAF8C-80FC-F755-22F5-A59AC850F230}" dt="2025-04-30T01:28:31.123" v="1" actId="1076"/>
+          <ac:chgData name="Lahiri, Demetrios" userId="S::dlahiri@smu.edu::9d1ad5ea-57b1-4018-85f6-0d05db0c1ea2" providerId="AD" clId="Web-{4E657F89-8034-136D-A6D8-6CA256C294F5}" dt="2025-04-28T23:30:29.295" v="39" actId="20577"/>
           <ac:spMkLst>
             <pc:docMk/>
             <pc:sldMk cId="2290687881" sldId="691"/>
-            <ac:spMk id="12" creationId="{0DD6519A-A6D9-E4C3-E808-69DD1F3770FA}"/>
+            <ac:spMk id="6" creationId="{18AFB53F-FA9C-C2A2-014E-709D2272E7C6}"/>
           </ac:spMkLst>
         </pc:spChg>
-        <pc:picChg chg="mod">
-          <ac:chgData name="Kroeger, William" userId="S::wkroeger@smu.edu::9769a18c-35e5-46de-999e-56a20cde7d62" providerId="AD" clId="Web-{AB4AAF8C-80FC-F755-22F5-A59AC850F230}" dt="2025-04-30T01:31:50.459" v="8" actId="14100"/>
-          <ac:picMkLst>
-            <pc:docMk/>
-            <pc:sldMk cId="2290687881" sldId="691"/>
-            <ac:picMk id="7" creationId="{D027E0FE-0C84-E098-0B7E-381BBEA52757}"/>
-          </ac:picMkLst>
-        </pc:picChg>
-        <pc:picChg chg="mod">
-          <ac:chgData name="Kroeger, William" userId="S::wkroeger@smu.edu::9769a18c-35e5-46de-999e-56a20cde7d62" providerId="AD" clId="Web-{AB4AAF8C-80FC-F755-22F5-A59AC850F230}" dt="2025-04-30T01:31:21.926" v="7" actId="14100"/>
-          <ac:picMkLst>
-            <pc:docMk/>
-            <pc:sldMk cId="2290687881" sldId="691"/>
-            <ac:picMk id="8" creationId="{3108D383-E240-B4A2-2027-12A3CFF9861B}"/>
-          </ac:picMkLst>
-        </pc:picChg>
       </pc:sldChg>
     </pc:docChg>
   </pc:docChgLst>
   <pc:docChgLst>
-    <pc:chgData name="Lahiri, Demetrios" userId="S::dlahiri@smu.edu::9d1ad5ea-57b1-4018-85f6-0d05db0c1ea2" providerId="AD" clId="Web-{7FA0B9DB-6D66-EA52-CB9C-336AD3E38121}"/>
-    <pc:docChg chg="modSld">
-      <pc:chgData name="Lahiri, Demetrios" userId="S::dlahiri@smu.edu::9d1ad5ea-57b1-4018-85f6-0d05db0c1ea2" providerId="AD" clId="Web-{7FA0B9DB-6D66-EA52-CB9C-336AD3E38121}" dt="2025-04-28T17:07:03.138" v="118" actId="20577"/>
+    <pc:chgData name="Lahiri, Demetrios" userId="S::dlahiri@smu.edu::9d1ad5ea-57b1-4018-85f6-0d05db0c1ea2" providerId="AD" clId="Web-{7B289495-062F-77A5-6510-C0A226B1C5A3}"/>
+    <pc:docChg chg="addSld delSld modSld sldOrd">
+      <pc:chgData name="Lahiri, Demetrios" userId="S::dlahiri@smu.edu::9d1ad5ea-57b1-4018-85f6-0d05db0c1ea2" providerId="AD" clId="Web-{7B289495-062F-77A5-6510-C0A226B1C5A3}" dt="2025-04-30T01:02:17.501" v="2961"/>
       <pc:docMkLst>
         <pc:docMk/>
       </pc:docMkLst>
-      <pc:sldChg chg="modSp">
-        <pc:chgData name="Lahiri, Demetrios" userId="S::dlahiri@smu.edu::9d1ad5ea-57b1-4018-85f6-0d05db0c1ea2" providerId="AD" clId="Web-{7FA0B9DB-6D66-EA52-CB9C-336AD3E38121}" dt="2025-04-28T17:07:03.138" v="118" actId="20577"/>
+      <pc:sldChg chg="addSp delSp modSp">
+        <pc:chgData name="Lahiri, Demetrios" userId="S::dlahiri@smu.edu::9d1ad5ea-57b1-4018-85f6-0d05db0c1ea2" providerId="AD" clId="Web-{7B289495-062F-77A5-6510-C0A226B1C5A3}" dt="2025-04-30T00:52:33.842" v="2355" actId="20577"/>
         <pc:sldMkLst>
           <pc:docMk/>
           <pc:sldMk cId="2204278369" sldId="279"/>
         </pc:sldMkLst>
         <pc:spChg chg="mod">
-          <ac:chgData name="Lahiri, Demetrios" userId="S::dlahiri@smu.edu::9d1ad5ea-57b1-4018-85f6-0d05db0c1ea2" providerId="AD" clId="Web-{7FA0B9DB-6D66-EA52-CB9C-336AD3E38121}" dt="2025-04-28T17:04:04.913" v="29" actId="20577"/>
+          <ac:chgData name="Lahiri, Demetrios" userId="S::dlahiri@smu.edu::9d1ad5ea-57b1-4018-85f6-0d05db0c1ea2" providerId="AD" clId="Web-{7B289495-062F-77A5-6510-C0A226B1C5A3}" dt="2025-04-30T00:25:44.392" v="2207" actId="20577"/>
           <ac:spMkLst>
             <pc:docMk/>
             <pc:sldMk cId="2204278369" sldId="279"/>
@@ -2380,13 +2717,221 @@
           </ac:spMkLst>
         </pc:spChg>
         <pc:spChg chg="mod">
-          <ac:chgData name="Lahiri, Demetrios" userId="S::dlahiri@smu.edu::9d1ad5ea-57b1-4018-85f6-0d05db0c1ea2" providerId="AD" clId="Web-{7FA0B9DB-6D66-EA52-CB9C-336AD3E38121}" dt="2025-04-28T17:07:03.138" v="118" actId="20577"/>
+          <ac:chgData name="Lahiri, Demetrios" userId="S::dlahiri@smu.edu::9d1ad5ea-57b1-4018-85f6-0d05db0c1ea2" providerId="AD" clId="Web-{7B289495-062F-77A5-6510-C0A226B1C5A3}" dt="2025-04-30T00:50:47.744" v="2292" actId="20577"/>
           <ac:spMkLst>
             <pc:docMk/>
             <pc:sldMk cId="2204278369" sldId="279"/>
             <ac:spMk id="3" creationId="{B459024D-4E10-F5C5-8178-BBD9C3E290C0}"/>
           </ac:spMkLst>
         </pc:spChg>
+        <pc:spChg chg="add mod">
+          <ac:chgData name="Lahiri, Demetrios" userId="S::dlahiri@smu.edu::9d1ad5ea-57b1-4018-85f6-0d05db0c1ea2" providerId="AD" clId="Web-{7B289495-062F-77A5-6510-C0A226B1C5A3}" dt="2025-04-30T00:52:33.842" v="2355" actId="20577"/>
+          <ac:spMkLst>
+            <pc:docMk/>
+            <pc:sldMk cId="2204278369" sldId="279"/>
+            <ac:spMk id="6" creationId="{1117B20C-CCB6-8454-6C29-A9AF6C7BD1EE}"/>
+          </ac:spMkLst>
+        </pc:spChg>
+        <pc:spChg chg="add del mod">
+          <ac:chgData name="Lahiri, Demetrios" userId="S::dlahiri@smu.edu::9d1ad5ea-57b1-4018-85f6-0d05db0c1ea2" providerId="AD" clId="Web-{7B289495-062F-77A5-6510-C0A226B1C5A3}" dt="2025-04-30T00:41:36.539" v="2208"/>
+          <ac:spMkLst>
+            <pc:docMk/>
+            <pc:sldMk cId="2204278369" sldId="279"/>
+            <ac:spMk id="7" creationId="{9C703C65-679F-C2A2-A3E0-51121F122EA7}"/>
+          </ac:spMkLst>
+        </pc:spChg>
+        <pc:picChg chg="add del mod">
+          <ac:chgData name="Lahiri, Demetrios" userId="S::dlahiri@smu.edu::9d1ad5ea-57b1-4018-85f6-0d05db0c1ea2" providerId="AD" clId="Web-{7B289495-062F-77A5-6510-C0A226B1C5A3}" dt="2025-04-30T00:46:14.704" v="2251"/>
+          <ac:picMkLst>
+            <pc:docMk/>
+            <pc:sldMk cId="2204278369" sldId="279"/>
+            <ac:picMk id="8" creationId="{CDF5C047-A1E1-A8E8-12B1-77A3252746C5}"/>
+          </ac:picMkLst>
+        </pc:picChg>
+        <pc:picChg chg="add del mod">
+          <ac:chgData name="Lahiri, Demetrios" userId="S::dlahiri@smu.edu::9d1ad5ea-57b1-4018-85f6-0d05db0c1ea2" providerId="AD" clId="Web-{7B289495-062F-77A5-6510-C0A226B1C5A3}" dt="2025-04-30T00:48:01.458" v="2279" actId="14100"/>
+          <ac:picMkLst>
+            <pc:docMk/>
+            <pc:sldMk cId="2204278369" sldId="279"/>
+            <ac:picMk id="10" creationId="{A0185114-A37D-C855-8F8A-53308DD1BC27}"/>
+          </ac:picMkLst>
+        </pc:picChg>
+        <pc:picChg chg="add del mod">
+          <ac:chgData name="Lahiri, Demetrios" userId="S::dlahiri@smu.edu::9d1ad5ea-57b1-4018-85f6-0d05db0c1ea2" providerId="AD" clId="Web-{7B289495-062F-77A5-6510-C0A226B1C5A3}" dt="2025-04-30T00:48:44.162" v="2280"/>
+          <ac:picMkLst>
+            <pc:docMk/>
+            <pc:sldMk cId="2204278369" sldId="279"/>
+            <ac:picMk id="11" creationId="{8A972EC9-9402-5F3F-9515-8A8176AAE3BE}"/>
+          </ac:picMkLst>
+        </pc:picChg>
+        <pc:picChg chg="add del mod">
+          <ac:chgData name="Lahiri, Demetrios" userId="S::dlahiri@smu.edu::9d1ad5ea-57b1-4018-85f6-0d05db0c1ea2" providerId="AD" clId="Web-{7B289495-062F-77A5-6510-C0A226B1C5A3}" dt="2025-04-30T00:47:50.192" v="2276"/>
+          <ac:picMkLst>
+            <pc:docMk/>
+            <pc:sldMk cId="2204278369" sldId="279"/>
+            <ac:picMk id="13" creationId="{C0482CD5-0D34-129B-B03B-335D87F0EE86}"/>
+          </ac:picMkLst>
+        </pc:picChg>
+        <pc:picChg chg="add mod">
+          <ac:chgData name="Lahiri, Demetrios" userId="S::dlahiri@smu.edu::9d1ad5ea-57b1-4018-85f6-0d05db0c1ea2" providerId="AD" clId="Web-{7B289495-062F-77A5-6510-C0A226B1C5A3}" dt="2025-04-30T00:49:14.491" v="2287" actId="1076"/>
+          <ac:picMkLst>
+            <pc:docMk/>
+            <pc:sldMk cId="2204278369" sldId="279"/>
+            <ac:picMk id="14" creationId="{A1828716-5E47-440A-3C9D-C9714616EE25}"/>
+          </ac:picMkLst>
+        </pc:picChg>
+      </pc:sldChg>
+      <pc:sldChg chg="modSp">
+        <pc:chgData name="Lahiri, Demetrios" userId="S::dlahiri@smu.edu::9d1ad5ea-57b1-4018-85f6-0d05db0c1ea2" providerId="AD" clId="Web-{7B289495-062F-77A5-6510-C0A226B1C5A3}" dt="2025-04-30T00:00:30.257" v="64" actId="20577"/>
+        <pc:sldMkLst>
+          <pc:docMk/>
+          <pc:sldMk cId="2012267991" sldId="280"/>
+        </pc:sldMkLst>
+        <pc:spChg chg="mod">
+          <ac:chgData name="Lahiri, Demetrios" userId="S::dlahiri@smu.edu::9d1ad5ea-57b1-4018-85f6-0d05db0c1ea2" providerId="AD" clId="Web-{7B289495-062F-77A5-6510-C0A226B1C5A3}" dt="2025-04-30T00:00:30.257" v="64" actId="20577"/>
+          <ac:spMkLst>
+            <pc:docMk/>
+            <pc:sldMk cId="2012267991" sldId="280"/>
+            <ac:spMk id="7" creationId="{B1353D64-8A59-23E8-97F9-2C0035D495F7}"/>
+          </ac:spMkLst>
+        </pc:spChg>
+      </pc:sldChg>
+      <pc:sldChg chg="addSp modSp ord">
+        <pc:chgData name="Lahiri, Demetrios" userId="S::dlahiri@smu.edu::9d1ad5ea-57b1-4018-85f6-0d05db0c1ea2" providerId="AD" clId="Web-{7B289495-062F-77A5-6510-C0A226B1C5A3}" dt="2025-04-30T01:02:17.501" v="2961"/>
+        <pc:sldMkLst>
+          <pc:docMk/>
+          <pc:sldMk cId="1858521055" sldId="690"/>
+        </pc:sldMkLst>
+        <pc:spChg chg="add mod">
+          <ac:chgData name="Lahiri, Demetrios" userId="S::dlahiri@smu.edu::9d1ad5ea-57b1-4018-85f6-0d05db0c1ea2" providerId="AD" clId="Web-{7B289495-062F-77A5-6510-C0A226B1C5A3}" dt="2025-04-29T23:55:11.592" v="37" actId="1076"/>
+          <ac:spMkLst>
+            <pc:docMk/>
+            <pc:sldMk cId="1858521055" sldId="690"/>
+            <ac:spMk id="3" creationId="{B62CDD79-84A4-3C5E-10B4-EC48939503B9}"/>
+          </ac:spMkLst>
+        </pc:spChg>
+        <pc:graphicFrameChg chg="mod modGraphic">
+          <ac:chgData name="Lahiri, Demetrios" userId="S::dlahiri@smu.edu::9d1ad5ea-57b1-4018-85f6-0d05db0c1ea2" providerId="AD" clId="Web-{7B289495-062F-77A5-6510-C0A226B1C5A3}" dt="2025-04-30T01:02:17.501" v="2961"/>
+          <ac:graphicFrameMkLst>
+            <pc:docMk/>
+            <pc:sldMk cId="1858521055" sldId="690"/>
+            <ac:graphicFrameMk id="15" creationId="{03738B03-90B0-3D94-9233-EE14278C0C29}"/>
+          </ac:graphicFrameMkLst>
+        </pc:graphicFrameChg>
+      </pc:sldChg>
+      <pc:sldChg chg="addSp delSp modSp ord">
+        <pc:chgData name="Lahiri, Demetrios" userId="S::dlahiri@smu.edu::9d1ad5ea-57b1-4018-85f6-0d05db0c1ea2" providerId="AD" clId="Web-{7B289495-062F-77A5-6510-C0A226B1C5A3}" dt="2025-04-30T00:47:09.315" v="2263"/>
+        <pc:sldMkLst>
+          <pc:docMk/>
+          <pc:sldMk cId="2290687881" sldId="691"/>
+        </pc:sldMkLst>
+        <pc:spChg chg="del">
+          <ac:chgData name="Lahiri, Demetrios" userId="S::dlahiri@smu.edu::9d1ad5ea-57b1-4018-85f6-0d05db0c1ea2" providerId="AD" clId="Web-{7B289495-062F-77A5-6510-C0A226B1C5A3}" dt="2025-04-30T00:47:09.315" v="2263"/>
+          <ac:spMkLst>
+            <pc:docMk/>
+            <pc:sldMk cId="2290687881" sldId="691"/>
+            <ac:spMk id="2" creationId="{35D22E8E-F2B8-93BD-417D-F3546CB8ECBD}"/>
+          </ac:spMkLst>
+        </pc:spChg>
+        <pc:spChg chg="mod">
+          <ac:chgData name="Lahiri, Demetrios" userId="S::dlahiri@smu.edu::9d1ad5ea-57b1-4018-85f6-0d05db0c1ea2" providerId="AD" clId="Web-{7B289495-062F-77A5-6510-C0A226B1C5A3}" dt="2025-04-30T00:47:07.675" v="2262" actId="20577"/>
+          <ac:spMkLst>
+            <pc:docMk/>
+            <pc:sldMk cId="2290687881" sldId="691"/>
+            <ac:spMk id="6" creationId="{18AFB53F-FA9C-C2A2-014E-709D2272E7C6}"/>
+          </ac:spMkLst>
+        </pc:spChg>
+        <pc:spChg chg="add mod">
+          <ac:chgData name="Lahiri, Demetrios" userId="S::dlahiri@smu.edu::9d1ad5ea-57b1-4018-85f6-0d05db0c1ea2" providerId="AD" clId="Web-{7B289495-062F-77A5-6510-C0A226B1C5A3}" dt="2025-04-30T00:47:09.315" v="2263"/>
+          <ac:spMkLst>
+            <pc:docMk/>
+            <pc:sldMk cId="2290687881" sldId="691"/>
+            <ac:spMk id="10" creationId="{1CC8506B-7F45-8598-2C49-A8E8929D096C}"/>
+          </ac:spMkLst>
+        </pc:spChg>
+      </pc:sldChg>
+      <pc:sldChg chg="modSp">
+        <pc:chgData name="Lahiri, Demetrios" userId="S::dlahiri@smu.edu::9d1ad5ea-57b1-4018-85f6-0d05db0c1ea2" providerId="AD" clId="Web-{7B289495-062F-77A5-6510-C0A226B1C5A3}" dt="2025-04-30T00:59:28.308" v="2835" actId="20577"/>
+        <pc:sldMkLst>
+          <pc:docMk/>
+          <pc:sldMk cId="1524050222" sldId="693"/>
+        </pc:sldMkLst>
+        <pc:spChg chg="mod">
+          <ac:chgData name="Lahiri, Demetrios" userId="S::dlahiri@smu.edu::9d1ad5ea-57b1-4018-85f6-0d05db0c1ea2" providerId="AD" clId="Web-{7B289495-062F-77A5-6510-C0A226B1C5A3}" dt="2025-04-30T00:10:13.257" v="506" actId="20577"/>
+          <ac:spMkLst>
+            <pc:docMk/>
+            <pc:sldMk cId="1524050222" sldId="693"/>
+            <ac:spMk id="6" creationId="{02A2FB6F-B5C7-C88D-EC19-89601DE0EBE0}"/>
+          </ac:spMkLst>
+        </pc:spChg>
+        <pc:spChg chg="mod">
+          <ac:chgData name="Lahiri, Demetrios" userId="S::dlahiri@smu.edu::9d1ad5ea-57b1-4018-85f6-0d05db0c1ea2" providerId="AD" clId="Web-{7B289495-062F-77A5-6510-C0A226B1C5A3}" dt="2025-04-30T00:58:57.448" v="2823" actId="20577"/>
+          <ac:spMkLst>
+            <pc:docMk/>
+            <pc:sldMk cId="1524050222" sldId="693"/>
+            <ac:spMk id="7" creationId="{165C15A8-E0B4-D645-C5B0-153FADA7DC1B}"/>
+          </ac:spMkLst>
+        </pc:spChg>
+        <pc:spChg chg="mod">
+          <ac:chgData name="Lahiri, Demetrios" userId="S::dlahiri@smu.edu::9d1ad5ea-57b1-4018-85f6-0d05db0c1ea2" providerId="AD" clId="Web-{7B289495-062F-77A5-6510-C0A226B1C5A3}" dt="2025-04-30T00:59:28.308" v="2835" actId="20577"/>
+          <ac:spMkLst>
+            <pc:docMk/>
+            <pc:sldMk cId="1524050222" sldId="693"/>
+            <ac:spMk id="16" creationId="{F9CC5FD4-9AB6-38ED-DB45-E6FBE9FE5417}"/>
+          </ac:spMkLst>
+        </pc:spChg>
+      </pc:sldChg>
+      <pc:sldChg chg="add del replId">
+        <pc:chgData name="Lahiri, Demetrios" userId="S::dlahiri@smu.edu::9d1ad5ea-57b1-4018-85f6-0d05db0c1ea2" providerId="AD" clId="Web-{7B289495-062F-77A5-6510-C0A226B1C5A3}" dt="2025-04-30T00:49:00.147" v="2284"/>
+        <pc:sldMkLst>
+          <pc:docMk/>
+          <pc:sldMk cId="2442753842" sldId="694"/>
+        </pc:sldMkLst>
+      </pc:sldChg>
+      <pc:sldChg chg="modSp">
+        <pc:chgData name="Lahiri, Demetrios" userId="S::dlahiri@smu.edu::9d1ad5ea-57b1-4018-85f6-0d05db0c1ea2" providerId="AD" clId="Web-{7B289495-062F-77A5-6510-C0A226B1C5A3}" dt="2025-04-30T00:47:25.222" v="2271" actId="20577"/>
+        <pc:sldMkLst>
+          <pc:docMk/>
+          <pc:sldMk cId="3536170688" sldId="694"/>
+        </pc:sldMkLst>
+        <pc:spChg chg="mod">
+          <ac:chgData name="Lahiri, Demetrios" userId="S::dlahiri@smu.edu::9d1ad5ea-57b1-4018-85f6-0d05db0c1ea2" providerId="AD" clId="Web-{7B289495-062F-77A5-6510-C0A226B1C5A3}" dt="2025-04-30T00:47:25.222" v="2271" actId="20577"/>
+          <ac:spMkLst>
+            <pc:docMk/>
+            <pc:sldMk cId="3536170688" sldId="694"/>
+            <ac:spMk id="2" creationId="{689A4366-E458-190A-54B8-45DCC2141A6B}"/>
+          </ac:spMkLst>
+        </pc:spChg>
+      </pc:sldChg>
+      <pc:sldChg chg="add del replId">
+        <pc:chgData name="Lahiri, Demetrios" userId="S::dlahiri@smu.edu::9d1ad5ea-57b1-4018-85f6-0d05db0c1ea2" providerId="AD" clId="Web-{7B289495-062F-77A5-6510-C0A226B1C5A3}" dt="2025-04-30T00:48:58.241" v="2283"/>
+        <pc:sldMkLst>
+          <pc:docMk/>
+          <pc:sldMk cId="2411380321" sldId="695"/>
+        </pc:sldMkLst>
+      </pc:sldChg>
+    </pc:docChg>
+  </pc:docChgLst>
+  <pc:docChgLst>
+    <pc:chgData name="Lahiri, Demetrios" userId="9d1ad5ea-57b1-4018-85f6-0d05db0c1ea2" providerId="ADAL" clId="{38814E23-57B3-49C4-BFE3-39731C5AE2A7}"/>
+    <pc:docChg chg="addSld delSld modSld">
+      <pc:chgData name="Lahiri, Demetrios" userId="9d1ad5ea-57b1-4018-85f6-0d05db0c1ea2" providerId="ADAL" clId="{38814E23-57B3-49C4-BFE3-39731C5AE2A7}" dt="2025-04-30T18:23:31.569" v="1" actId="47"/>
+      <pc:docMkLst>
+        <pc:docMk/>
+      </pc:docMkLst>
+      <pc:sldChg chg="del">
+        <pc:chgData name="Lahiri, Demetrios" userId="9d1ad5ea-57b1-4018-85f6-0d05db0c1ea2" providerId="ADAL" clId="{38814E23-57B3-49C4-BFE3-39731C5AE2A7}" dt="2025-04-30T18:23:31.569" v="1" actId="47"/>
+        <pc:sldMkLst>
+          <pc:docMk/>
+          <pc:sldMk cId="4213065125" sldId="694"/>
+        </pc:sldMkLst>
+      </pc:sldChg>
+      <pc:sldChg chg="add">
+        <pc:chgData name="Lahiri, Demetrios" userId="9d1ad5ea-57b1-4018-85f6-0d05db0c1ea2" providerId="ADAL" clId="{38814E23-57B3-49C4-BFE3-39731C5AE2A7}" dt="2025-04-30T18:23:26.792" v="0"/>
+        <pc:sldMkLst>
+          <pc:docMk/>
+          <pc:sldMk cId="1129092985" sldId="695"/>
+        </pc:sldMkLst>
       </pc:sldChg>
     </pc:docChg>
   </pc:docChgLst>
@@ -5688,7 +6233,7 @@
           </a:ln>
           <a:extLst>
             <a:ext uri="{C572A759-6A51-4108-AA02-DFA0A04FC94B}">
-              <ma14:wrappingTextBoxFlag xmlns:m="http://schemas.openxmlformats.org/officeDocument/2006/math" xmlns:a14="http://schemas.microsoft.com/office/drawing/2010/main" xmlns:ma14="http://schemas.microsoft.com/office/mac/drawingml/2011/main" xmlns:lc="http://schemas.openxmlformats.org/drawingml/2006/lockedCanvas" xmlns="" val="1"/>
+              <ma14:wrappingTextBoxFlag xmlns:lc="http://schemas.openxmlformats.org/drawingml/2006/lockedCanvas" xmlns:ma14="http://schemas.microsoft.com/office/mac/drawingml/2011/main" xmlns:a14="http://schemas.microsoft.com/office/drawing/2010/main" xmlns:m="http://schemas.openxmlformats.org/officeDocument/2006/math" xmlns="" val="1"/>
             </a:ext>
           </a:extLst>
         </p:spPr>
@@ -6265,7 +6810,7 @@
           </a:ln>
           <a:extLst>
             <a:ext uri="{C572A759-6A51-4108-AA02-DFA0A04FC94B}">
-              <ma14:wrappingTextBoxFlag xmlns:m="http://schemas.openxmlformats.org/officeDocument/2006/math" xmlns:a14="http://schemas.microsoft.com/office/drawing/2010/main" xmlns:ma14="http://schemas.microsoft.com/office/mac/drawingml/2011/main" xmlns="" val="1"/>
+              <ma14:wrappingTextBoxFlag xmlns:ma14="http://schemas.microsoft.com/office/mac/drawingml/2011/main" xmlns:a14="http://schemas.microsoft.com/office/drawing/2010/main" xmlns:m="http://schemas.openxmlformats.org/officeDocument/2006/math" xmlns="" val="1"/>
             </a:ext>
           </a:extLst>
         </p:spPr>
@@ -6306,7 +6851,7 @@
           </a:ln>
           <a:extLst>
             <a:ext uri="{C572A759-6A51-4108-AA02-DFA0A04FC94B}">
-              <ma14:wrappingTextBoxFlag xmlns:m="http://schemas.openxmlformats.org/officeDocument/2006/math" xmlns:a14="http://schemas.microsoft.com/office/drawing/2010/main" xmlns:ma14="http://schemas.microsoft.com/office/mac/drawingml/2011/main" xmlns="" val="1"/>
+              <ma14:wrappingTextBoxFlag xmlns:ma14="http://schemas.microsoft.com/office/mac/drawingml/2011/main" xmlns:a14="http://schemas.microsoft.com/office/drawing/2010/main" xmlns:m="http://schemas.openxmlformats.org/officeDocument/2006/math" xmlns="" val="1"/>
             </a:ext>
           </a:extLst>
         </p:spPr>
@@ -8638,14 +9183,17 @@
         </p:nvSpPr>
         <p:spPr/>
         <p:txBody>
-          <a:bodyPr>
+          <a:bodyPr lIns="0" tIns="45719" rIns="45719" bIns="45719" anchor="t">
             <a:normAutofit lnSpcReduction="10000"/>
           </a:bodyPr>
           <a:lstStyle/>
           <a:p>
             <a:r>
-              <a:rPr lang="en-US"/>
-              <a:t>Morgan Eun, Demitrios Lahiri, William Kroeger</a:t>
+              <a:rPr lang="en-US">
+                <a:latin typeface="Poppins Medium"/>
+                <a:cs typeface="Poppins Medium"/>
+              </a:rPr>
+              <a:t>Morgan Eun, Demetrios Lahiri, William Kroeger</a:t>
             </a:r>
           </a:p>
         </p:txBody>
@@ -8726,6 +9274,1704 @@
   <p:cSld>
     <p:spTree>
       <p:nvGrpSpPr>
+        <p:cNvPr id="1" name=""/>
+        <p:cNvGrpSpPr/>
+        <p:nvPr/>
+      </p:nvGrpSpPr>
+      <p:grpSpPr>
+        <a:xfrm>
+          <a:off x="0" y="0"/>
+          <a:ext cx="0" cy="0"/>
+          <a:chOff x="0" y="0"/>
+          <a:chExt cx="0" cy="0"/>
+        </a:xfrm>
+      </p:grpSpPr>
+      <p:sp>
+        <p:nvSpPr>
+          <p:cNvPr id="4" name="Text Placeholder 3">
+            <a:extLst>
+              <a:ext uri="{FF2B5EF4-FFF2-40B4-BE49-F238E27FC236}">
+                <a16:creationId xmlns:a16="http://schemas.microsoft.com/office/drawing/2014/main" id="{D60A0B70-A009-7213-459A-4ECAD848FCDA}"/>
+              </a:ext>
+            </a:extLst>
+          </p:cNvPr>
+          <p:cNvSpPr>
+            <a:spLocks noGrp="1"/>
+          </p:cNvSpPr>
+          <p:nvPr>
+            <p:ph type="body" sz="quarter" idx="13"/>
+          </p:nvPr>
+        </p:nvSpPr>
+        <p:spPr/>
+        <p:txBody>
+          <a:bodyPr/>
+          <a:lstStyle/>
+          <a:p>
+            <a:r>
+              <a:rPr lang="en-US"/>
+              <a:t>BETA OF AI TECH STOCKS</a:t>
+            </a:r>
+          </a:p>
+        </p:txBody>
+      </p:sp>
+      <p:sp>
+        <p:nvSpPr>
+          <p:cNvPr id="5" name="Slide Number Placeholder 4">
+            <a:extLst>
+              <a:ext uri="{FF2B5EF4-FFF2-40B4-BE49-F238E27FC236}">
+                <a16:creationId xmlns:a16="http://schemas.microsoft.com/office/drawing/2014/main" id="{96F5D29B-FAF8-6446-6738-4CAD6B23007F}"/>
+              </a:ext>
+            </a:extLst>
+          </p:cNvPr>
+          <p:cNvSpPr>
+            <a:spLocks noGrp="1"/>
+          </p:cNvSpPr>
+          <p:nvPr>
+            <p:ph type="sldNum" sz="quarter" idx="2"/>
+          </p:nvPr>
+        </p:nvSpPr>
+        <p:spPr>
+          <a:xfrm>
+            <a:off x="11869819" y="12864743"/>
+            <a:ext cx="631660" cy="409277"/>
+          </a:xfrm>
+        </p:spPr>
+        <p:txBody>
+          <a:bodyPr/>
+          <a:lstStyle/>
+          <a:p>
+            <a:fld id="{86CB4B4D-7CA3-9044-876B-883B54F8677D}" type="slidenum">
+              <a:rPr lang="en-US" smtClean="0"/>
+              <a:pPr/>
+              <a:t>10</a:t>
+            </a:fld>
+            <a:endParaRPr lang="en-US"/>
+          </a:p>
+        </p:txBody>
+      </p:sp>
+      <p:sp>
+        <p:nvSpPr>
+          <p:cNvPr id="6" name="Title 1">
+            <a:extLst>
+              <a:ext uri="{FF2B5EF4-FFF2-40B4-BE49-F238E27FC236}">
+                <a16:creationId xmlns:a16="http://schemas.microsoft.com/office/drawing/2014/main" id="{D2DED2EA-030F-CF86-2952-62E7B98E279D}"/>
+              </a:ext>
+            </a:extLst>
+          </p:cNvPr>
+          <p:cNvSpPr>
+            <a:spLocks noGrp="1"/>
+          </p:cNvSpPr>
+          <p:nvPr>
+            <p:ph type="title"/>
+          </p:nvPr>
+        </p:nvSpPr>
+        <p:spPr>
+          <a:xfrm>
+            <a:off x="914397" y="855759"/>
+            <a:ext cx="21031201" cy="1371600"/>
+          </a:xfrm>
+        </p:spPr>
+        <p:txBody>
+          <a:bodyPr>
+            <a:normAutofit/>
+          </a:bodyPr>
+          <a:lstStyle/>
+          <a:p>
+            <a:r>
+              <a:rPr lang="en-US">
+                <a:latin typeface="Inter"/>
+                <a:cs typeface="Poppins"/>
+              </a:rPr>
+              <a:t>Beta – In Action</a:t>
+            </a:r>
+          </a:p>
+        </p:txBody>
+      </p:sp>
+      <p:sp>
+        <p:nvSpPr>
+          <p:cNvPr id="7" name="Rectangle 6">
+            <a:extLst>
+              <a:ext uri="{FF2B5EF4-FFF2-40B4-BE49-F238E27FC236}">
+                <a16:creationId xmlns:a16="http://schemas.microsoft.com/office/drawing/2014/main" id="{9FE67CC8-5C5C-29CB-92D2-25499864A2E1}"/>
+              </a:ext>
+            </a:extLst>
+          </p:cNvPr>
+          <p:cNvSpPr/>
+          <p:nvPr/>
+        </p:nvSpPr>
+        <p:spPr>
+          <a:xfrm>
+            <a:off x="914397" y="2120592"/>
+            <a:ext cx="11133533" cy="522358"/>
+          </a:xfrm>
+          <a:prstGeom prst="rect">
+            <a:avLst/>
+          </a:prstGeom>
+          <a:solidFill>
+            <a:srgbClr val="0C1543"/>
+          </a:solidFill>
+          <a:ln>
+            <a:noFill/>
+          </a:ln>
+        </p:spPr>
+        <p:style>
+          <a:lnRef idx="2">
+            <a:schemeClr val="accent1">
+              <a:shade val="15000"/>
+            </a:schemeClr>
+          </a:lnRef>
+          <a:fillRef idx="1">
+            <a:schemeClr val="accent1"/>
+          </a:fillRef>
+          <a:effectRef idx="0">
+            <a:schemeClr val="accent1"/>
+          </a:effectRef>
+          <a:fontRef idx="minor">
+            <a:schemeClr val="lt1"/>
+          </a:fontRef>
+        </p:style>
+        <p:txBody>
+          <a:bodyPr rtlCol="0" anchor="ctr"/>
+          <a:lstStyle/>
+          <a:p>
+            <a:pPr algn="ctr"/>
+            <a:r>
+              <a:rPr lang="en-US" sz="3000">
+                <a:latin typeface="Inter" panose="02000503000000020004"/>
+              </a:rPr>
+              <a:t>How its Used</a:t>
+            </a:r>
+          </a:p>
+        </p:txBody>
+      </p:sp>
+      <p:sp>
+        <p:nvSpPr>
+          <p:cNvPr id="8" name="Rectangle 7">
+            <a:extLst>
+              <a:ext uri="{FF2B5EF4-FFF2-40B4-BE49-F238E27FC236}">
+                <a16:creationId xmlns:a16="http://schemas.microsoft.com/office/drawing/2014/main" id="{6F09893A-7594-0A42-D135-446A889A36D2}"/>
+              </a:ext>
+            </a:extLst>
+          </p:cNvPr>
+          <p:cNvSpPr/>
+          <p:nvPr/>
+        </p:nvSpPr>
+        <p:spPr>
+          <a:xfrm>
+            <a:off x="914397" y="7127075"/>
+            <a:ext cx="11133533" cy="522358"/>
+          </a:xfrm>
+          <a:prstGeom prst="rect">
+            <a:avLst/>
+          </a:prstGeom>
+          <a:solidFill>
+            <a:srgbClr val="0C1543"/>
+          </a:solidFill>
+          <a:ln>
+            <a:noFill/>
+          </a:ln>
+        </p:spPr>
+        <p:style>
+          <a:lnRef idx="2">
+            <a:schemeClr val="accent1">
+              <a:shade val="15000"/>
+            </a:schemeClr>
+          </a:lnRef>
+          <a:fillRef idx="1">
+            <a:schemeClr val="accent1"/>
+          </a:fillRef>
+          <a:effectRef idx="0">
+            <a:schemeClr val="accent1"/>
+          </a:effectRef>
+          <a:fontRef idx="minor">
+            <a:schemeClr val="lt1"/>
+          </a:fontRef>
+        </p:style>
+        <p:txBody>
+          <a:bodyPr rtlCol="0" anchor="ctr"/>
+          <a:lstStyle/>
+          <a:p>
+            <a:pPr algn="ctr"/>
+            <a:r>
+              <a:rPr lang="en-US" sz="3000">
+                <a:latin typeface="Inter" panose="02000503000000020004"/>
+              </a:rPr>
+              <a:t>What its Useful For</a:t>
+            </a:r>
+          </a:p>
+        </p:txBody>
+      </p:sp>
+      <p:sp>
+        <p:nvSpPr>
+          <p:cNvPr id="9" name="Rectangle 8">
+            <a:extLst>
+              <a:ext uri="{FF2B5EF4-FFF2-40B4-BE49-F238E27FC236}">
+                <a16:creationId xmlns:a16="http://schemas.microsoft.com/office/drawing/2014/main" id="{0864766B-22EC-C515-157F-4DD1EFAD3C1F}"/>
+              </a:ext>
+            </a:extLst>
+          </p:cNvPr>
+          <p:cNvSpPr/>
+          <p:nvPr/>
+        </p:nvSpPr>
+        <p:spPr>
+          <a:xfrm>
+            <a:off x="12336070" y="2120592"/>
+            <a:ext cx="11133533" cy="522358"/>
+          </a:xfrm>
+          <a:prstGeom prst="rect">
+            <a:avLst/>
+          </a:prstGeom>
+          <a:solidFill>
+            <a:srgbClr val="0C1543"/>
+          </a:solidFill>
+          <a:ln>
+            <a:noFill/>
+          </a:ln>
+        </p:spPr>
+        <p:style>
+          <a:lnRef idx="2">
+            <a:schemeClr val="accent1">
+              <a:shade val="15000"/>
+            </a:schemeClr>
+          </a:lnRef>
+          <a:fillRef idx="1">
+            <a:schemeClr val="accent1"/>
+          </a:fillRef>
+          <a:effectRef idx="0">
+            <a:schemeClr val="accent1"/>
+          </a:effectRef>
+          <a:fontRef idx="minor">
+            <a:schemeClr val="lt1"/>
+          </a:fontRef>
+        </p:style>
+        <p:txBody>
+          <a:bodyPr rtlCol="0" anchor="ctr"/>
+          <a:lstStyle/>
+          <a:p>
+            <a:pPr algn="ctr"/>
+            <a:r>
+              <a:rPr lang="en-US" sz="3000">
+                <a:latin typeface="Inter" panose="02000503000000020004"/>
+              </a:rPr>
+              <a:t>Other Risk-Predictor Indicators</a:t>
+            </a:r>
+          </a:p>
+        </p:txBody>
+      </p:sp>
+      <p:graphicFrame>
+        <p:nvGraphicFramePr>
+          <p:cNvPr id="15" name="Table 14">
+            <a:extLst>
+              <a:ext uri="{FF2B5EF4-FFF2-40B4-BE49-F238E27FC236}">
+                <a16:creationId xmlns:a16="http://schemas.microsoft.com/office/drawing/2014/main" id="{03738B03-90B0-3D94-9233-EE14278C0C29}"/>
+              </a:ext>
+            </a:extLst>
+          </p:cNvPr>
+          <p:cNvGraphicFramePr>
+            <a:graphicFrameLocks noGrp="1"/>
+          </p:cNvGraphicFramePr>
+          <p:nvPr>
+            <p:custDataLst>
+              <p:tags r:id="rId1"/>
+            </p:custDataLst>
+            <p:extLst>
+              <p:ext uri="{D42A27DB-BD31-4B8C-83A1-F6EECF244321}">
+                <p14:modId xmlns:p14="http://schemas.microsoft.com/office/powerpoint/2010/main" val="1486132197"/>
+              </p:ext>
+            </p:extLst>
+          </p:nvPr>
+        </p:nvGraphicFramePr>
+        <p:xfrm>
+          <a:off x="911110" y="7649433"/>
+          <a:ext cx="11136820" cy="5210810"/>
+        </p:xfrm>
+        <a:graphic>
+          <a:graphicData uri="http://schemas.openxmlformats.org/drawingml/2006/table">
+            <a:tbl>
+              <a:tblPr/>
+              <a:tblGrid>
+                <a:gridCol w="10737633">
+                  <a:extLst>
+                    <a:ext uri="{9D8B030D-6E8A-4147-A177-3AD203B41FA5}">
+                      <a16:colId xmlns:a16="http://schemas.microsoft.com/office/drawing/2014/main" val="296525212"/>
+                    </a:ext>
+                  </a:extLst>
+                </a:gridCol>
+                <a:gridCol w="399187">
+                  <a:extLst>
+                    <a:ext uri="{9D8B030D-6E8A-4147-A177-3AD203B41FA5}">
+                      <a16:colId xmlns:a16="http://schemas.microsoft.com/office/drawing/2014/main" val="386091632"/>
+                    </a:ext>
+                  </a:extLst>
+                </a:gridCol>
+              </a:tblGrid>
+              <a:tr h="1668425">
+                <a:tc>
+                  <a:txBody>
+                    <a:bodyPr/>
+                    <a:lstStyle>
+                      <a:lvl1pPr marL="0" algn="l" defTabSz="914400" rtl="0" eaLnBrk="1" latinLnBrk="0" hangingPunct="1">
+                        <a:defRPr sz="1800" kern="1200">
+                          <a:solidFill>
+                            <a:schemeClr val="dk1"/>
+                          </a:solidFill>
+                          <a:latin typeface="Arial" panose="020B0604020202020204"/>
+                        </a:defRPr>
+                      </a:lvl1pPr>
+                      <a:lvl2pPr marL="457200" algn="l" defTabSz="914400" rtl="0" eaLnBrk="1" latinLnBrk="0" hangingPunct="1">
+                        <a:defRPr sz="1800" kern="1200">
+                          <a:solidFill>
+                            <a:schemeClr val="dk1"/>
+                          </a:solidFill>
+                          <a:latin typeface="Arial" panose="020B0604020202020204"/>
+                        </a:defRPr>
+                      </a:lvl2pPr>
+                      <a:lvl3pPr marL="914400" algn="l" defTabSz="914400" rtl="0" eaLnBrk="1" latinLnBrk="0" hangingPunct="1">
+                        <a:defRPr sz="1800" kern="1200">
+                          <a:solidFill>
+                            <a:schemeClr val="dk1"/>
+                          </a:solidFill>
+                          <a:latin typeface="Arial" panose="020B0604020202020204"/>
+                        </a:defRPr>
+                      </a:lvl3pPr>
+                      <a:lvl4pPr marL="1371600" algn="l" defTabSz="914400" rtl="0" eaLnBrk="1" latinLnBrk="0" hangingPunct="1">
+                        <a:defRPr sz="1800" kern="1200">
+                          <a:solidFill>
+                            <a:schemeClr val="dk1"/>
+                          </a:solidFill>
+                          <a:latin typeface="Arial" panose="020B0604020202020204"/>
+                        </a:defRPr>
+                      </a:lvl4pPr>
+                      <a:lvl5pPr marL="1828800" algn="l" defTabSz="914400" rtl="0" eaLnBrk="1" latinLnBrk="0" hangingPunct="1">
+                        <a:defRPr sz="1800" kern="1200">
+                          <a:solidFill>
+                            <a:schemeClr val="dk1"/>
+                          </a:solidFill>
+                          <a:latin typeface="Arial" panose="020B0604020202020204"/>
+                        </a:defRPr>
+                      </a:lvl5pPr>
+                      <a:lvl6pPr marL="2286000" algn="l" defTabSz="914400" rtl="0" eaLnBrk="1" latinLnBrk="0" hangingPunct="1">
+                        <a:defRPr sz="1800" kern="1200">
+                          <a:solidFill>
+                            <a:schemeClr val="dk1"/>
+                          </a:solidFill>
+                          <a:latin typeface="Arial" panose="020B0604020202020204"/>
+                        </a:defRPr>
+                      </a:lvl6pPr>
+                      <a:lvl7pPr marL="2743200" algn="l" defTabSz="914400" rtl="0" eaLnBrk="1" latinLnBrk="0" hangingPunct="1">
+                        <a:defRPr sz="1800" kern="1200">
+                          <a:solidFill>
+                            <a:schemeClr val="dk1"/>
+                          </a:solidFill>
+                          <a:latin typeface="Arial" panose="020B0604020202020204"/>
+                        </a:defRPr>
+                      </a:lvl7pPr>
+                      <a:lvl8pPr marL="3200400" algn="l" defTabSz="914400" rtl="0" eaLnBrk="1" latinLnBrk="0" hangingPunct="1">
+                        <a:defRPr sz="1800" kern="1200">
+                          <a:solidFill>
+                            <a:schemeClr val="dk1"/>
+                          </a:solidFill>
+                          <a:latin typeface="Arial" panose="020B0604020202020204"/>
+                        </a:defRPr>
+                      </a:lvl8pPr>
+                      <a:lvl9pPr marL="3657600" algn="l" defTabSz="914400" rtl="0" eaLnBrk="1" latinLnBrk="0" hangingPunct="1">
+                        <a:defRPr sz="1800" kern="1200">
+                          <a:solidFill>
+                            <a:schemeClr val="dk1"/>
+                          </a:solidFill>
+                          <a:latin typeface="Arial" panose="020B0604020202020204"/>
+                        </a:defRPr>
+                      </a:lvl9pPr>
+                    </a:lstStyle>
+                    <a:p>
+                      <a:r>
+                        <a:rPr lang="en-US" sz="2500" b="1"/>
+                        <a:t>Everyday Use:</a:t>
+                      </a:r>
+                      <a:r>
+                        <a:rPr lang="en-US" sz="2500" b="0"/>
+                        <a:t> Measurement of how volatile a stock is going to be in relation to the market. </a:t>
+                      </a:r>
+                      <a:r>
+                        <a:rPr lang="en-US" sz="2500" b="1" u="none"/>
+                        <a:t>Every 1% move in the market = </a:t>
+                      </a:r>
+                      <a:r>
+                        <a:rPr lang="el-GR" sz="2500" b="1" u="none"/>
+                        <a:t>β</a:t>
+                      </a:r>
+                      <a:r>
+                        <a:rPr lang="en-US" sz="2500" b="1" u="none"/>
+                        <a:t>% move in the market</a:t>
+                      </a:r>
+                    </a:p>
+                  </a:txBody>
+                  <a:tcPr marL="182880" marR="182880" marT="91440" marB="91440" anchor="ctr">
+                    <a:lnL w="12700" cmpd="sng">
+                      <a:noFill/>
+                    </a:lnL>
+                    <a:lnR w="12700" cmpd="sng">
+                      <a:noFill/>
+                    </a:lnR>
+                    <a:lnT w="38100" cmpd="sng">
+                      <a:noFill/>
+                    </a:lnT>
+                    <a:lnB w="6350" cap="flat" cmpd="sng" algn="ctr">
+                      <a:solidFill>
+                        <a:srgbClr val="000000"/>
+                      </a:solidFill>
+                      <a:prstDash val="solid"/>
+                      <a:round/>
+                      <a:headEnd type="none" w="med" len="med"/>
+                      <a:tailEnd type="none" w="med" len="med"/>
+                    </a:lnB>
+                    <a:lnTlToBr w="12700" cmpd="sng">
+                      <a:noFill/>
+                      <a:prstDash val="solid"/>
+                    </a:lnTlToBr>
+                    <a:lnBlToTr w="12700" cmpd="sng">
+                      <a:noFill/>
+                      <a:prstDash val="solid"/>
+                    </a:lnBlToTr>
+                    <a:solidFill>
+                      <a:srgbClr val="FFFFFF"/>
+                    </a:solidFill>
+                  </a:tcPr>
+                </a:tc>
+                <a:tc>
+                  <a:txBody>
+                    <a:bodyPr/>
+                    <a:lstStyle>
+                      <a:lvl1pPr marL="0" algn="l" defTabSz="914400" rtl="0" eaLnBrk="1" latinLnBrk="0" hangingPunct="1">
+                        <a:defRPr sz="1800" kern="1200">
+                          <a:solidFill>
+                            <a:schemeClr val="dk1"/>
+                          </a:solidFill>
+                          <a:latin typeface="Arial" panose="020B0604020202020204"/>
+                        </a:defRPr>
+                      </a:lvl1pPr>
+                      <a:lvl2pPr marL="457200" algn="l" defTabSz="914400" rtl="0" eaLnBrk="1" latinLnBrk="0" hangingPunct="1">
+                        <a:defRPr sz="1800" kern="1200">
+                          <a:solidFill>
+                            <a:schemeClr val="dk1"/>
+                          </a:solidFill>
+                          <a:latin typeface="Arial" panose="020B0604020202020204"/>
+                        </a:defRPr>
+                      </a:lvl2pPr>
+                      <a:lvl3pPr marL="914400" algn="l" defTabSz="914400" rtl="0" eaLnBrk="1" latinLnBrk="0" hangingPunct="1">
+                        <a:defRPr sz="1800" kern="1200">
+                          <a:solidFill>
+                            <a:schemeClr val="dk1"/>
+                          </a:solidFill>
+                          <a:latin typeface="Arial" panose="020B0604020202020204"/>
+                        </a:defRPr>
+                      </a:lvl3pPr>
+                      <a:lvl4pPr marL="1371600" algn="l" defTabSz="914400" rtl="0" eaLnBrk="1" latinLnBrk="0" hangingPunct="1">
+                        <a:defRPr sz="1800" kern="1200">
+                          <a:solidFill>
+                            <a:schemeClr val="dk1"/>
+                          </a:solidFill>
+                          <a:latin typeface="Arial" panose="020B0604020202020204"/>
+                        </a:defRPr>
+                      </a:lvl4pPr>
+                      <a:lvl5pPr marL="1828800" algn="l" defTabSz="914400" rtl="0" eaLnBrk="1" latinLnBrk="0" hangingPunct="1">
+                        <a:defRPr sz="1800" kern="1200">
+                          <a:solidFill>
+                            <a:schemeClr val="dk1"/>
+                          </a:solidFill>
+                          <a:latin typeface="Arial" panose="020B0604020202020204"/>
+                        </a:defRPr>
+                      </a:lvl5pPr>
+                      <a:lvl6pPr marL="2286000" algn="l" defTabSz="914400" rtl="0" eaLnBrk="1" latinLnBrk="0" hangingPunct="1">
+                        <a:defRPr sz="1800" kern="1200">
+                          <a:solidFill>
+                            <a:schemeClr val="dk1"/>
+                          </a:solidFill>
+                          <a:latin typeface="Arial" panose="020B0604020202020204"/>
+                        </a:defRPr>
+                      </a:lvl6pPr>
+                      <a:lvl7pPr marL="2743200" algn="l" defTabSz="914400" rtl="0" eaLnBrk="1" latinLnBrk="0" hangingPunct="1">
+                        <a:defRPr sz="1800" kern="1200">
+                          <a:solidFill>
+                            <a:schemeClr val="dk1"/>
+                          </a:solidFill>
+                          <a:latin typeface="Arial" panose="020B0604020202020204"/>
+                        </a:defRPr>
+                      </a:lvl7pPr>
+                      <a:lvl8pPr marL="3200400" algn="l" defTabSz="914400" rtl="0" eaLnBrk="1" latinLnBrk="0" hangingPunct="1">
+                        <a:defRPr sz="1800" kern="1200">
+                          <a:solidFill>
+                            <a:schemeClr val="dk1"/>
+                          </a:solidFill>
+                          <a:latin typeface="Arial" panose="020B0604020202020204"/>
+                        </a:defRPr>
+                      </a:lvl8pPr>
+                      <a:lvl9pPr marL="3657600" algn="l" defTabSz="914400" rtl="0" eaLnBrk="1" latinLnBrk="0" hangingPunct="1">
+                        <a:defRPr sz="1800" kern="1200">
+                          <a:solidFill>
+                            <a:schemeClr val="dk1"/>
+                          </a:solidFill>
+                          <a:latin typeface="Arial" panose="020B0604020202020204"/>
+                        </a:defRPr>
+                      </a:lvl9pPr>
+                    </a:lstStyle>
+                    <a:p>
+                      <a:pPr algn="r"/>
+                      <a:endParaRPr lang="en-US" sz="3000" b="0"/>
+                    </a:p>
+                  </a:txBody>
+                  <a:tcPr marL="182880" marR="182880" marT="91440" marB="91440" anchor="ctr">
+                    <a:lnL w="12700" cmpd="sng">
+                      <a:noFill/>
+                    </a:lnL>
+                    <a:lnR w="12700" cmpd="sng">
+                      <a:noFill/>
+                    </a:lnR>
+                    <a:lnT w="38100" cmpd="sng">
+                      <a:noFill/>
+                    </a:lnT>
+                    <a:lnB w="6350" cap="flat" cmpd="sng" algn="ctr">
+                      <a:solidFill>
+                        <a:srgbClr val="000000"/>
+                      </a:solidFill>
+                      <a:prstDash val="solid"/>
+                      <a:round/>
+                      <a:headEnd type="none" w="med" len="med"/>
+                      <a:tailEnd type="none" w="med" len="med"/>
+                    </a:lnB>
+                    <a:lnTlToBr w="12700" cmpd="sng">
+                      <a:noFill/>
+                      <a:prstDash val="solid"/>
+                    </a:lnTlToBr>
+                    <a:lnBlToTr w="12700" cmpd="sng">
+                      <a:noFill/>
+                      <a:prstDash val="solid"/>
+                    </a:lnBlToTr>
+                    <a:solidFill>
+                      <a:srgbClr val="FFFFFF"/>
+                    </a:solidFill>
+                  </a:tcPr>
+                </a:tc>
+                <a:extLst>
+                  <a:ext uri="{0D108BD9-81ED-4DB2-BD59-A6C34878D82A}">
+                    <a16:rowId xmlns:a16="http://schemas.microsoft.com/office/drawing/2014/main" val="3391466926"/>
+                  </a:ext>
+                </a:extLst>
+              </a:tr>
+              <a:tr h="1180795">
+                <a:tc>
+                  <a:txBody>
+                    <a:bodyPr/>
+                    <a:lstStyle/>
+                    <a:p>
+                      <a:r>
+                        <a:rPr lang="en-US" sz="2500" b="1"/>
+                        <a:t>Quant Algorithms: </a:t>
+                      </a:r>
+                      <a:r>
+                        <a:rPr lang="en-US" sz="2500" b="0"/>
+                        <a:t>Measures the volatility of a stock versus the market index.</a:t>
+                      </a:r>
+                      <a:endParaRPr lang="en-US" sz="1500" b="0" i="0" u="none" strike="noStrike" noProof="0">
+                        <a:solidFill>
+                          <a:srgbClr val="040C28"/>
+                        </a:solidFill>
+                        <a:latin typeface="Aptos"/>
+                      </a:endParaRPr>
+                    </a:p>
+                  </a:txBody>
+                  <a:tcPr marL="182880" marR="182880" marT="91440" marB="91440" anchor="ctr">
+                    <a:lnL w="12700" cmpd="sng">
+                      <a:noFill/>
+                    </a:lnL>
+                    <a:lnR w="12700" cmpd="sng">
+                      <a:noFill/>
+                    </a:lnR>
+                    <a:lnT w="6350" cap="flat" cmpd="sng" algn="ctr">
+                      <a:solidFill>
+                        <a:srgbClr val="000000"/>
+                      </a:solidFill>
+                      <a:prstDash val="solid"/>
+                      <a:round/>
+                      <a:headEnd type="none" w="med" len="med"/>
+                      <a:tailEnd type="none" w="med" len="med"/>
+                    </a:lnT>
+                    <a:lnB w="6350" cap="flat" cmpd="sng" algn="ctr">
+                      <a:solidFill>
+                        <a:srgbClr val="000000"/>
+                      </a:solidFill>
+                      <a:prstDash val="solid"/>
+                      <a:round/>
+                      <a:headEnd type="none" w="med" len="med"/>
+                      <a:tailEnd type="none" w="med" len="med"/>
+                    </a:lnB>
+                    <a:lnTlToBr w="12700" cmpd="sng">
+                      <a:noFill/>
+                      <a:prstDash val="solid"/>
+                    </a:lnTlToBr>
+                    <a:lnBlToTr w="12700" cmpd="sng">
+                      <a:noFill/>
+                      <a:prstDash val="solid"/>
+                    </a:lnBlToTr>
+                    <a:solidFill>
+                      <a:srgbClr val="FFFFFF"/>
+                    </a:solidFill>
+                  </a:tcPr>
+                </a:tc>
+                <a:tc>
+                  <a:txBody>
+                    <a:bodyPr/>
+                    <a:lstStyle/>
+                    <a:p>
+                      <a:pPr algn="r"/>
+                      <a:endParaRPr lang="en-US" sz="3000" b="0"/>
+                    </a:p>
+                  </a:txBody>
+                  <a:tcPr marL="182880" marR="182880" marT="91440" marB="91440" anchor="ctr">
+                    <a:lnL w="12700" cmpd="sng">
+                      <a:noFill/>
+                    </a:lnL>
+                    <a:lnR w="12700" cmpd="sng">
+                      <a:noFill/>
+                    </a:lnR>
+                    <a:lnT w="6350" cap="flat" cmpd="sng" algn="ctr">
+                      <a:solidFill>
+                        <a:srgbClr val="000000"/>
+                      </a:solidFill>
+                      <a:prstDash val="solid"/>
+                      <a:round/>
+                      <a:headEnd type="none" w="med" len="med"/>
+                      <a:tailEnd type="none" w="med" len="med"/>
+                    </a:lnT>
+                    <a:lnB w="6350" cap="flat" cmpd="sng" algn="ctr">
+                      <a:solidFill>
+                        <a:srgbClr val="000000"/>
+                      </a:solidFill>
+                      <a:prstDash val="solid"/>
+                      <a:round/>
+                      <a:headEnd type="none" w="med" len="med"/>
+                      <a:tailEnd type="none" w="med" len="med"/>
+                    </a:lnB>
+                    <a:lnTlToBr w="12700" cmpd="sng">
+                      <a:noFill/>
+                      <a:prstDash val="solid"/>
+                    </a:lnTlToBr>
+                    <a:lnBlToTr w="12700" cmpd="sng">
+                      <a:noFill/>
+                      <a:prstDash val="solid"/>
+                    </a:lnBlToTr>
+                    <a:solidFill>
+                      <a:srgbClr val="FFFFFF"/>
+                    </a:solidFill>
+                  </a:tcPr>
+                </a:tc>
+                <a:extLst>
+                  <a:ext uri="{0D108BD9-81ED-4DB2-BD59-A6C34878D82A}">
+                    <a16:rowId xmlns:a16="http://schemas.microsoft.com/office/drawing/2014/main" val="1986563157"/>
+                  </a:ext>
+                </a:extLst>
+              </a:tr>
+              <a:tr h="1180795">
+                <a:tc>
+                  <a:txBody>
+                    <a:bodyPr/>
+                    <a:lstStyle>
+                      <a:lvl1pPr marL="0" algn="l" defTabSz="914400" rtl="0" eaLnBrk="1" latinLnBrk="0" hangingPunct="1">
+                        <a:defRPr sz="1800" kern="1200">
+                          <a:solidFill>
+                            <a:schemeClr val="dk1"/>
+                          </a:solidFill>
+                          <a:latin typeface="Arial" panose="020B0604020202020204"/>
+                        </a:defRPr>
+                      </a:lvl1pPr>
+                      <a:lvl2pPr marL="457200" algn="l" defTabSz="914400" rtl="0" eaLnBrk="1" latinLnBrk="0" hangingPunct="1">
+                        <a:defRPr sz="1800" kern="1200">
+                          <a:solidFill>
+                            <a:schemeClr val="dk1"/>
+                          </a:solidFill>
+                          <a:latin typeface="Arial" panose="020B0604020202020204"/>
+                        </a:defRPr>
+                      </a:lvl2pPr>
+                      <a:lvl3pPr marL="914400" algn="l" defTabSz="914400" rtl="0" eaLnBrk="1" latinLnBrk="0" hangingPunct="1">
+                        <a:defRPr sz="1800" kern="1200">
+                          <a:solidFill>
+                            <a:schemeClr val="dk1"/>
+                          </a:solidFill>
+                          <a:latin typeface="Arial" panose="020B0604020202020204"/>
+                        </a:defRPr>
+                      </a:lvl3pPr>
+                      <a:lvl4pPr marL="1371600" algn="l" defTabSz="914400" rtl="0" eaLnBrk="1" latinLnBrk="0" hangingPunct="1">
+                        <a:defRPr sz="1800" kern="1200">
+                          <a:solidFill>
+                            <a:schemeClr val="dk1"/>
+                          </a:solidFill>
+                          <a:latin typeface="Arial" panose="020B0604020202020204"/>
+                        </a:defRPr>
+                      </a:lvl4pPr>
+                      <a:lvl5pPr marL="1828800" algn="l" defTabSz="914400" rtl="0" eaLnBrk="1" latinLnBrk="0" hangingPunct="1">
+                        <a:defRPr sz="1800" kern="1200">
+                          <a:solidFill>
+                            <a:schemeClr val="dk1"/>
+                          </a:solidFill>
+                          <a:latin typeface="Arial" panose="020B0604020202020204"/>
+                        </a:defRPr>
+                      </a:lvl5pPr>
+                      <a:lvl6pPr marL="2286000" algn="l" defTabSz="914400" rtl="0" eaLnBrk="1" latinLnBrk="0" hangingPunct="1">
+                        <a:defRPr sz="1800" kern="1200">
+                          <a:solidFill>
+                            <a:schemeClr val="dk1"/>
+                          </a:solidFill>
+                          <a:latin typeface="Arial" panose="020B0604020202020204"/>
+                        </a:defRPr>
+                      </a:lvl6pPr>
+                      <a:lvl7pPr marL="2743200" algn="l" defTabSz="914400" rtl="0" eaLnBrk="1" latinLnBrk="0" hangingPunct="1">
+                        <a:defRPr sz="1800" kern="1200">
+                          <a:solidFill>
+                            <a:schemeClr val="dk1"/>
+                          </a:solidFill>
+                          <a:latin typeface="Arial" panose="020B0604020202020204"/>
+                        </a:defRPr>
+                      </a:lvl7pPr>
+                      <a:lvl8pPr marL="3200400" algn="l" defTabSz="914400" rtl="0" eaLnBrk="1" latinLnBrk="0" hangingPunct="1">
+                        <a:defRPr sz="1800" kern="1200">
+                          <a:solidFill>
+                            <a:schemeClr val="dk1"/>
+                          </a:solidFill>
+                          <a:latin typeface="Arial" panose="020B0604020202020204"/>
+                        </a:defRPr>
+                      </a:lvl8pPr>
+                      <a:lvl9pPr marL="3657600" algn="l" defTabSz="914400" rtl="0" eaLnBrk="1" latinLnBrk="0" hangingPunct="1">
+                        <a:defRPr sz="1800" kern="1200">
+                          <a:solidFill>
+                            <a:schemeClr val="dk1"/>
+                          </a:solidFill>
+                          <a:latin typeface="Arial" panose="020B0604020202020204"/>
+                        </a:defRPr>
+                      </a:lvl9pPr>
+                    </a:lstStyle>
+                    <a:p>
+                      <a:r>
+                        <a:rPr lang="en-US" sz="2500" b="1"/>
+                        <a:t>Beta Hedging: </a:t>
+                      </a:r>
+                      <a:r>
+                        <a:rPr lang="en-US" sz="2500" b="0"/>
+                        <a:t>Aim to be </a:t>
+                      </a:r>
+                      <a:r>
+                        <a:rPr lang="en-US" sz="2500" b="1" u="none"/>
+                        <a:t>beta neutral </a:t>
+                      </a:r>
+                      <a:r>
+                        <a:rPr lang="en-US" sz="2500" b="0"/>
+                        <a:t>by buying stocks with a beta inverse of </a:t>
+                      </a:r>
+                      <a:r>
+                        <a:rPr lang="en-US" sz="2500" b="1" i="0" u="none"/>
+                        <a:t>stock of comparison</a:t>
+                      </a:r>
+                    </a:p>
+                  </a:txBody>
+                  <a:tcPr marL="182880" marR="182880" marT="91440" marB="91440" anchor="ctr">
+                    <a:lnL w="12700" cmpd="sng">
+                      <a:noFill/>
+                    </a:lnL>
+                    <a:lnR w="12700" cmpd="sng">
+                      <a:noFill/>
+                    </a:lnR>
+                    <a:lnT w="6350" cap="flat" cmpd="sng" algn="ctr">
+                      <a:solidFill>
+                        <a:srgbClr val="000000"/>
+                      </a:solidFill>
+                      <a:prstDash val="solid"/>
+                      <a:round/>
+                      <a:headEnd type="none" w="med" len="med"/>
+                      <a:tailEnd type="none" w="med" len="med"/>
+                    </a:lnT>
+                    <a:lnB w="6350" cap="flat" cmpd="sng" algn="ctr">
+                      <a:solidFill>
+                        <a:srgbClr val="000000"/>
+                      </a:solidFill>
+                      <a:prstDash val="solid"/>
+                      <a:round/>
+                      <a:headEnd type="none" w="med" len="med"/>
+                      <a:tailEnd type="none" w="med" len="med"/>
+                    </a:lnB>
+                    <a:lnTlToBr w="12700" cmpd="sng">
+                      <a:noFill/>
+                      <a:prstDash val="solid"/>
+                    </a:lnTlToBr>
+                    <a:lnBlToTr w="12700" cmpd="sng">
+                      <a:noFill/>
+                      <a:prstDash val="solid"/>
+                    </a:lnBlToTr>
+                    <a:solidFill>
+                      <a:srgbClr val="FFFFFF"/>
+                    </a:solidFill>
+                  </a:tcPr>
+                </a:tc>
+                <a:tc>
+                  <a:txBody>
+                    <a:bodyPr/>
+                    <a:lstStyle>
+                      <a:lvl1pPr marL="0" algn="l" defTabSz="914400" rtl="0" eaLnBrk="1" latinLnBrk="0" hangingPunct="1">
+                        <a:defRPr sz="1800" kern="1200">
+                          <a:solidFill>
+                            <a:schemeClr val="dk1"/>
+                          </a:solidFill>
+                          <a:latin typeface="Arial" panose="020B0604020202020204"/>
+                        </a:defRPr>
+                      </a:lvl1pPr>
+                      <a:lvl2pPr marL="457200" algn="l" defTabSz="914400" rtl="0" eaLnBrk="1" latinLnBrk="0" hangingPunct="1">
+                        <a:defRPr sz="1800" kern="1200">
+                          <a:solidFill>
+                            <a:schemeClr val="dk1"/>
+                          </a:solidFill>
+                          <a:latin typeface="Arial" panose="020B0604020202020204"/>
+                        </a:defRPr>
+                      </a:lvl2pPr>
+                      <a:lvl3pPr marL="914400" algn="l" defTabSz="914400" rtl="0" eaLnBrk="1" latinLnBrk="0" hangingPunct="1">
+                        <a:defRPr sz="1800" kern="1200">
+                          <a:solidFill>
+                            <a:schemeClr val="dk1"/>
+                          </a:solidFill>
+                          <a:latin typeface="Arial" panose="020B0604020202020204"/>
+                        </a:defRPr>
+                      </a:lvl3pPr>
+                      <a:lvl4pPr marL="1371600" algn="l" defTabSz="914400" rtl="0" eaLnBrk="1" latinLnBrk="0" hangingPunct="1">
+                        <a:defRPr sz="1800" kern="1200">
+                          <a:solidFill>
+                            <a:schemeClr val="dk1"/>
+                          </a:solidFill>
+                          <a:latin typeface="Arial" panose="020B0604020202020204"/>
+                        </a:defRPr>
+                      </a:lvl4pPr>
+                      <a:lvl5pPr marL="1828800" algn="l" defTabSz="914400" rtl="0" eaLnBrk="1" latinLnBrk="0" hangingPunct="1">
+                        <a:defRPr sz="1800" kern="1200">
+                          <a:solidFill>
+                            <a:schemeClr val="dk1"/>
+                          </a:solidFill>
+                          <a:latin typeface="Arial" panose="020B0604020202020204"/>
+                        </a:defRPr>
+                      </a:lvl5pPr>
+                      <a:lvl6pPr marL="2286000" algn="l" defTabSz="914400" rtl="0" eaLnBrk="1" latinLnBrk="0" hangingPunct="1">
+                        <a:defRPr sz="1800" kern="1200">
+                          <a:solidFill>
+                            <a:schemeClr val="dk1"/>
+                          </a:solidFill>
+                          <a:latin typeface="Arial" panose="020B0604020202020204"/>
+                        </a:defRPr>
+                      </a:lvl6pPr>
+                      <a:lvl7pPr marL="2743200" algn="l" defTabSz="914400" rtl="0" eaLnBrk="1" latinLnBrk="0" hangingPunct="1">
+                        <a:defRPr sz="1800" kern="1200">
+                          <a:solidFill>
+                            <a:schemeClr val="dk1"/>
+                          </a:solidFill>
+                          <a:latin typeface="Arial" panose="020B0604020202020204"/>
+                        </a:defRPr>
+                      </a:lvl7pPr>
+                      <a:lvl8pPr marL="3200400" algn="l" defTabSz="914400" rtl="0" eaLnBrk="1" latinLnBrk="0" hangingPunct="1">
+                        <a:defRPr sz="1800" kern="1200">
+                          <a:solidFill>
+                            <a:schemeClr val="dk1"/>
+                          </a:solidFill>
+                          <a:latin typeface="Arial" panose="020B0604020202020204"/>
+                        </a:defRPr>
+                      </a:lvl8pPr>
+                      <a:lvl9pPr marL="3657600" algn="l" defTabSz="914400" rtl="0" eaLnBrk="1" latinLnBrk="0" hangingPunct="1">
+                        <a:defRPr sz="1800" kern="1200">
+                          <a:solidFill>
+                            <a:schemeClr val="dk1"/>
+                          </a:solidFill>
+                          <a:latin typeface="Arial" panose="020B0604020202020204"/>
+                        </a:defRPr>
+                      </a:lvl9pPr>
+                    </a:lstStyle>
+                    <a:p>
+                      <a:pPr algn="r"/>
+                      <a:endParaRPr lang="en-US" sz="3000" b="0"/>
+                    </a:p>
+                  </a:txBody>
+                  <a:tcPr marL="182880" marR="182880" marT="91440" marB="91440" anchor="ctr">
+                    <a:lnL w="12700" cmpd="sng">
+                      <a:noFill/>
+                    </a:lnL>
+                    <a:lnR w="12700" cmpd="sng">
+                      <a:noFill/>
+                    </a:lnR>
+                    <a:lnT w="6350" cap="flat" cmpd="sng" algn="ctr">
+                      <a:solidFill>
+                        <a:srgbClr val="000000"/>
+                      </a:solidFill>
+                      <a:prstDash val="solid"/>
+                      <a:round/>
+                      <a:headEnd type="none" w="med" len="med"/>
+                      <a:tailEnd type="none" w="med" len="med"/>
+                    </a:lnT>
+                    <a:lnB w="6350" cap="flat" cmpd="sng" algn="ctr">
+                      <a:solidFill>
+                        <a:srgbClr val="000000"/>
+                      </a:solidFill>
+                      <a:prstDash val="solid"/>
+                      <a:round/>
+                      <a:headEnd type="none" w="med" len="med"/>
+                      <a:tailEnd type="none" w="med" len="med"/>
+                    </a:lnB>
+                    <a:lnTlToBr w="12700" cmpd="sng">
+                      <a:noFill/>
+                      <a:prstDash val="solid"/>
+                    </a:lnTlToBr>
+                    <a:lnBlToTr w="12700" cmpd="sng">
+                      <a:noFill/>
+                      <a:prstDash val="solid"/>
+                    </a:lnBlToTr>
+                    <a:solidFill>
+                      <a:srgbClr val="FFFFFF"/>
+                    </a:solidFill>
+                  </a:tcPr>
+                </a:tc>
+                <a:extLst>
+                  <a:ext uri="{0D108BD9-81ED-4DB2-BD59-A6C34878D82A}">
+                    <a16:rowId xmlns:a16="http://schemas.microsoft.com/office/drawing/2014/main" val="2584865208"/>
+                  </a:ext>
+                </a:extLst>
+              </a:tr>
+              <a:tr h="1180795">
+                <a:tc>
+                  <a:txBody>
+                    <a:bodyPr/>
+                    <a:lstStyle/>
+                    <a:p>
+                      <a:r>
+                        <a:rPr lang="en-US" sz="2500" b="1"/>
+                        <a:t>With Alpha (</a:t>
+                      </a:r>
+                      <a:r>
+                        <a:rPr lang="el-GR" sz="2500" b="1"/>
+                        <a:t>α</a:t>
+                      </a:r>
+                      <a:r>
+                        <a:rPr lang="en-US" sz="2500" b="1"/>
+                        <a:t>): alpha</a:t>
+                      </a:r>
+                      <a:r>
+                        <a:rPr lang="en-US" sz="2500" b="0"/>
+                        <a:t> is the excess return of a stock or fund. Usually used with beta in </a:t>
+                      </a:r>
+                      <a:r>
+                        <a:rPr lang="en-US" sz="2500" b="1"/>
+                        <a:t>CAPM</a:t>
+                      </a:r>
+                    </a:p>
+                  </a:txBody>
+                  <a:tcPr marL="182880" marR="182880" marT="91440" marB="91440" anchor="ctr">
+                    <a:lnL w="12700" cmpd="sng">
+                      <a:noFill/>
+                    </a:lnL>
+                    <a:lnR w="12700" cmpd="sng">
+                      <a:noFill/>
+                    </a:lnR>
+                    <a:lnT w="6350" cap="flat" cmpd="sng" algn="ctr">
+                      <a:solidFill>
+                        <a:srgbClr val="000000"/>
+                      </a:solidFill>
+                      <a:prstDash val="solid"/>
+                      <a:round/>
+                      <a:headEnd type="none" w="med" len="med"/>
+                      <a:tailEnd type="none" w="med" len="med"/>
+                    </a:lnT>
+                    <a:lnB w="6350" cap="flat" cmpd="sng" algn="ctr">
+                      <a:solidFill>
+                        <a:srgbClr val="000000"/>
+                      </a:solidFill>
+                      <a:prstDash val="solid"/>
+                      <a:round/>
+                      <a:headEnd type="none" w="med" len="med"/>
+                      <a:tailEnd type="none" w="med" len="med"/>
+                    </a:lnB>
+                    <a:lnTlToBr w="12700" cmpd="sng">
+                      <a:noFill/>
+                      <a:prstDash val="solid"/>
+                    </a:lnTlToBr>
+                    <a:lnBlToTr w="12700" cmpd="sng">
+                      <a:noFill/>
+                      <a:prstDash val="solid"/>
+                    </a:lnBlToTr>
+                    <a:solidFill>
+                      <a:srgbClr val="FFFFFF"/>
+                    </a:solidFill>
+                  </a:tcPr>
+                </a:tc>
+                <a:tc>
+                  <a:txBody>
+                    <a:bodyPr/>
+                    <a:lstStyle/>
+                    <a:p>
+                      <a:pPr algn="r"/>
+                      <a:endParaRPr lang="en-US" sz="3000" b="0"/>
+                    </a:p>
+                  </a:txBody>
+                  <a:tcPr marL="182880" marR="182880" marT="91440" marB="91440" anchor="ctr">
+                    <a:lnL w="12700" cmpd="sng">
+                      <a:noFill/>
+                    </a:lnL>
+                    <a:lnR w="12700" cmpd="sng">
+                      <a:noFill/>
+                    </a:lnR>
+                    <a:lnT w="6350" cap="flat" cmpd="sng" algn="ctr">
+                      <a:solidFill>
+                        <a:srgbClr val="000000"/>
+                      </a:solidFill>
+                      <a:prstDash val="solid"/>
+                      <a:round/>
+                      <a:headEnd type="none" w="med" len="med"/>
+                      <a:tailEnd type="none" w="med" len="med"/>
+                    </a:lnT>
+                    <a:lnB w="6350" cap="flat" cmpd="sng" algn="ctr">
+                      <a:solidFill>
+                        <a:srgbClr val="000000"/>
+                      </a:solidFill>
+                      <a:prstDash val="solid"/>
+                      <a:round/>
+                      <a:headEnd type="none" w="med" len="med"/>
+                      <a:tailEnd type="none" w="med" len="med"/>
+                    </a:lnB>
+                    <a:lnTlToBr w="12700" cmpd="sng">
+                      <a:noFill/>
+                      <a:prstDash val="solid"/>
+                    </a:lnTlToBr>
+                    <a:lnBlToTr w="12700" cmpd="sng">
+                      <a:noFill/>
+                      <a:prstDash val="solid"/>
+                    </a:lnBlToTr>
+                    <a:solidFill>
+                      <a:srgbClr val="FFFFFF"/>
+                    </a:solidFill>
+                  </a:tcPr>
+                </a:tc>
+                <a:extLst>
+                  <a:ext uri="{0D108BD9-81ED-4DB2-BD59-A6C34878D82A}">
+                    <a16:rowId xmlns:a16="http://schemas.microsoft.com/office/drawing/2014/main" val="346671938"/>
+                  </a:ext>
+                </a:extLst>
+              </a:tr>
+            </a:tbl>
+          </a:graphicData>
+        </a:graphic>
+      </p:graphicFrame>
+      <p:grpSp>
+        <p:nvGrpSpPr>
+          <p:cNvPr id="25" name="Group 24">
+            <a:extLst>
+              <a:ext uri="{FF2B5EF4-FFF2-40B4-BE49-F238E27FC236}">
+                <a16:creationId xmlns:a16="http://schemas.microsoft.com/office/drawing/2014/main" id="{4672122A-E6D2-DB1A-6179-E3C1E3935A8B}"/>
+              </a:ext>
+            </a:extLst>
+          </p:cNvPr>
+          <p:cNvGrpSpPr/>
+          <p:nvPr/>
+        </p:nvGrpSpPr>
+        <p:grpSpPr>
+          <a:xfrm>
+            <a:off x="1422634" y="2749717"/>
+            <a:ext cx="10007363" cy="4372858"/>
+            <a:chOff x="1882153" y="4135605"/>
+            <a:chExt cx="9378029" cy="4104362"/>
+          </a:xfrm>
+        </p:grpSpPr>
+        <p:pic>
+          <p:nvPicPr>
+            <p:cNvPr id="19" name="Picture 18" descr="A line of text with black text&#10;&#10;AI-generated content may be incorrect.">
+              <a:extLst>
+                <a:ext uri="{FF2B5EF4-FFF2-40B4-BE49-F238E27FC236}">
+                  <a16:creationId xmlns:a16="http://schemas.microsoft.com/office/drawing/2014/main" id="{57DF24D9-69D9-BC5C-E212-FE0AB86ACC52}"/>
+                </a:ext>
+              </a:extLst>
+            </p:cNvPr>
+            <p:cNvPicPr>
+              <a:picLocks noChangeAspect="1"/>
+            </p:cNvPicPr>
+            <p:nvPr/>
+          </p:nvPicPr>
+          <p:blipFill>
+            <a:blip r:embed="rId3"/>
+            <a:srcRect t="25762" b="30472"/>
+            <a:stretch/>
+          </p:blipFill>
+          <p:spPr>
+            <a:xfrm>
+              <a:off x="1882153" y="4135605"/>
+              <a:ext cx="9378029" cy="4104362"/>
+            </a:xfrm>
+            <a:prstGeom prst="rect">
+              <a:avLst/>
+            </a:prstGeom>
+          </p:spPr>
+        </p:pic>
+        <p:sp>
+          <p:nvSpPr>
+            <p:cNvPr id="21" name="Rounded Rectangle 20">
+              <a:extLst>
+                <a:ext uri="{FF2B5EF4-FFF2-40B4-BE49-F238E27FC236}">
+                  <a16:creationId xmlns:a16="http://schemas.microsoft.com/office/drawing/2014/main" id="{BFABE7F3-BD06-7C87-A1FA-DACC646826DE}"/>
+                </a:ext>
+              </a:extLst>
+            </p:cNvPr>
+            <p:cNvSpPr/>
+            <p:nvPr/>
+          </p:nvSpPr>
+          <p:spPr>
+            <a:xfrm>
+              <a:off x="9490577" y="4135605"/>
+              <a:ext cx="984918" cy="872723"/>
+            </a:xfrm>
+            <a:prstGeom prst="roundRect">
+              <a:avLst/>
+            </a:prstGeom>
+            <a:solidFill>
+              <a:schemeClr val="bg1"/>
+            </a:solidFill>
+            <a:ln>
+              <a:noFill/>
+            </a:ln>
+          </p:spPr>
+          <p:style>
+            <a:lnRef idx="0">
+              <a:scrgbClr r="0" g="0" b="0"/>
+            </a:lnRef>
+            <a:fillRef idx="0">
+              <a:scrgbClr r="0" g="0" b="0"/>
+            </a:fillRef>
+            <a:effectRef idx="0">
+              <a:scrgbClr r="0" g="0" b="0"/>
+            </a:effectRef>
+            <a:fontRef idx="minor">
+              <a:schemeClr val="lt1"/>
+            </a:fontRef>
+          </p:style>
+          <p:txBody>
+            <a:bodyPr rtlCol="0" anchor="ctr"/>
+            <a:lstStyle/>
+            <a:p>
+              <a:pPr algn="ctr"/>
+              <a:endParaRPr lang="en-US"/>
+            </a:p>
+          </p:txBody>
+        </p:sp>
+        <p:sp>
+          <p:nvSpPr>
+            <p:cNvPr id="20" name="TextBox 19">
+              <a:extLst>
+                <a:ext uri="{FF2B5EF4-FFF2-40B4-BE49-F238E27FC236}">
+                  <a16:creationId xmlns:a16="http://schemas.microsoft.com/office/drawing/2014/main" id="{5086E2B1-0037-98ED-87FA-5F398DB8A4C6}"/>
+                </a:ext>
+              </a:extLst>
+            </p:cNvPr>
+            <p:cNvSpPr txBox="1"/>
+            <p:nvPr/>
+          </p:nvSpPr>
+          <p:spPr>
+            <a:xfrm>
+              <a:off x="9284811" y="4268128"/>
+              <a:ext cx="1685730" cy="845598"/>
+            </a:xfrm>
+            <a:prstGeom prst="rect">
+              <a:avLst/>
+            </a:prstGeom>
+            <a:noFill/>
+          </p:spPr>
+          <p:txBody>
+            <a:bodyPr wrap="square" rtlCol="0">
+              <a:spAutoFit/>
+            </a:bodyPr>
+            <a:lstStyle/>
+            <a:p>
+              <a:r>
+                <a:rPr lang="en-US" sz="4500">
+                  <a:solidFill>
+                    <a:schemeClr val="tx1"/>
+                  </a:solidFill>
+                  <a:latin typeface="+mj-lt"/>
+                </a:rPr>
+                <a:t>&lt; -1</a:t>
+              </a:r>
+            </a:p>
+          </p:txBody>
+        </p:sp>
+        <p:sp>
+          <p:nvSpPr>
+            <p:cNvPr id="22" name="Rounded Rectangle 21">
+              <a:extLst>
+                <a:ext uri="{FF2B5EF4-FFF2-40B4-BE49-F238E27FC236}">
+                  <a16:creationId xmlns:a16="http://schemas.microsoft.com/office/drawing/2014/main" id="{27AF84D3-9F1C-7DA0-EC4F-8AFA2DE93145}"/>
+                </a:ext>
+              </a:extLst>
+            </p:cNvPr>
+            <p:cNvSpPr/>
+            <p:nvPr/>
+          </p:nvSpPr>
+          <p:spPr>
+            <a:xfrm>
+              <a:off x="3792669" y="4247979"/>
+              <a:ext cx="984918" cy="872723"/>
+            </a:xfrm>
+            <a:prstGeom prst="roundRect">
+              <a:avLst/>
+            </a:prstGeom>
+            <a:solidFill>
+              <a:schemeClr val="bg1"/>
+            </a:solidFill>
+            <a:ln>
+              <a:noFill/>
+            </a:ln>
+          </p:spPr>
+          <p:style>
+            <a:lnRef idx="0">
+              <a:scrgbClr r="0" g="0" b="0"/>
+            </a:lnRef>
+            <a:fillRef idx="0">
+              <a:scrgbClr r="0" g="0" b="0"/>
+            </a:fillRef>
+            <a:effectRef idx="0">
+              <a:scrgbClr r="0" g="0" b="0"/>
+            </a:effectRef>
+            <a:fontRef idx="minor">
+              <a:schemeClr val="lt1"/>
+            </a:fontRef>
+          </p:style>
+          <p:txBody>
+            <a:bodyPr rtlCol="0" anchor="ctr"/>
+            <a:lstStyle/>
+            <a:p>
+              <a:pPr algn="ctr"/>
+              <a:endParaRPr lang="en-US"/>
+            </a:p>
+          </p:txBody>
+        </p:sp>
+        <p:sp>
+          <p:nvSpPr>
+            <p:cNvPr id="23" name="TextBox 22">
+              <a:extLst>
+                <a:ext uri="{FF2B5EF4-FFF2-40B4-BE49-F238E27FC236}">
+                  <a16:creationId xmlns:a16="http://schemas.microsoft.com/office/drawing/2014/main" id="{7F11D751-2C8B-3AF6-B996-B812E1DB62ED}"/>
+                </a:ext>
+              </a:extLst>
+            </p:cNvPr>
+            <p:cNvSpPr txBox="1"/>
+            <p:nvPr/>
+          </p:nvSpPr>
+          <p:spPr>
+            <a:xfrm>
+              <a:off x="3902003" y="4247979"/>
+              <a:ext cx="1139757" cy="784830"/>
+            </a:xfrm>
+            <a:prstGeom prst="rect">
+              <a:avLst/>
+            </a:prstGeom>
+            <a:noFill/>
+          </p:spPr>
+          <p:txBody>
+            <a:bodyPr wrap="square" rtlCol="0">
+              <a:spAutoFit/>
+            </a:bodyPr>
+            <a:lstStyle/>
+            <a:p>
+              <a:r>
+                <a:rPr lang="en-US" sz="4500">
+                  <a:solidFill>
+                    <a:schemeClr val="tx1"/>
+                  </a:solidFill>
+                  <a:latin typeface="+mj-lt"/>
+                </a:rPr>
+                <a:t>1</a:t>
+              </a:r>
+            </a:p>
+          </p:txBody>
+        </p:sp>
+        <p:sp>
+          <p:nvSpPr>
+            <p:cNvPr id="24" name="TextBox 23">
+              <a:extLst>
+                <a:ext uri="{FF2B5EF4-FFF2-40B4-BE49-F238E27FC236}">
+                  <a16:creationId xmlns:a16="http://schemas.microsoft.com/office/drawing/2014/main" id="{02C6651B-28BD-B947-C989-FD75966D8659}"/>
+                </a:ext>
+              </a:extLst>
+            </p:cNvPr>
+            <p:cNvSpPr txBox="1"/>
+            <p:nvPr/>
+          </p:nvSpPr>
+          <p:spPr>
+            <a:xfrm>
+              <a:off x="2267533" y="4236361"/>
+              <a:ext cx="1139757" cy="784830"/>
+            </a:xfrm>
+            <a:prstGeom prst="rect">
+              <a:avLst/>
+            </a:prstGeom>
+            <a:noFill/>
+          </p:spPr>
+          <p:txBody>
+            <a:bodyPr wrap="square" rtlCol="0">
+              <a:spAutoFit/>
+            </a:bodyPr>
+            <a:lstStyle/>
+            <a:p>
+              <a:r>
+                <a:rPr lang="en-US" sz="4500">
+                  <a:solidFill>
+                    <a:schemeClr val="tx1"/>
+                  </a:solidFill>
+                  <a:latin typeface="+mj-lt"/>
+                </a:rPr>
+                <a:t>&gt; 1</a:t>
+              </a:r>
+            </a:p>
+          </p:txBody>
+        </p:sp>
+      </p:grpSp>
+      <p:sp>
+        <p:nvSpPr>
+          <p:cNvPr id="3" name="Content Placeholder 1">
+            <a:extLst>
+              <a:ext uri="{FF2B5EF4-FFF2-40B4-BE49-F238E27FC236}">
+                <a16:creationId xmlns:a16="http://schemas.microsoft.com/office/drawing/2014/main" id="{B62CDD79-84A4-3C5E-10B4-EC48939503B9}"/>
+              </a:ext>
+            </a:extLst>
+          </p:cNvPr>
+          <p:cNvSpPr>
+            <a:spLocks noGrp="1"/>
+          </p:cNvSpPr>
+          <p:nvPr>
+            <p:ph idx="1"/>
+          </p:nvPr>
+        </p:nvSpPr>
+        <p:spPr>
+          <a:xfrm>
+            <a:off x="13246422" y="8142691"/>
+            <a:ext cx="10250502" cy="2666771"/>
+          </a:xfrm>
+        </p:spPr>
+        <p:txBody>
+          <a:bodyPr vert="horz" lIns="91440" tIns="45720" rIns="91440" bIns="45720" rtlCol="0" anchor="t">
+            <a:normAutofit/>
+          </a:bodyPr>
+          <a:lstStyle/>
+          <a:p>
+            <a:pPr marL="0" indent="0">
+              <a:buNone/>
+            </a:pPr>
+            <a:r>
+              <a:rPr lang="en-US">
+                <a:latin typeface="Inter"/>
+                <a:cs typeface="Poppins"/>
+              </a:rPr>
+              <a:t>Confidence intervals can also help us better utilize the beta model as we can use these intervals to create more conservative models for beta hedging and quant algorithms.</a:t>
+            </a:r>
+          </a:p>
+        </p:txBody>
+      </p:sp>
+      <p:sp>
+        <p:nvSpPr>
+          <p:cNvPr id="10" name="Content Placeholder 1">
+            <a:extLst>
+              <a:ext uri="{FF2B5EF4-FFF2-40B4-BE49-F238E27FC236}">
+                <a16:creationId xmlns:a16="http://schemas.microsoft.com/office/drawing/2014/main" id="{22056BB8-CA6F-3B6F-F08C-5B55E1BA437C}"/>
+              </a:ext>
+            </a:extLst>
+          </p:cNvPr>
+          <p:cNvSpPr txBox="1">
+            <a:spLocks/>
+          </p:cNvSpPr>
+          <p:nvPr/>
+        </p:nvSpPr>
+        <p:spPr>
+          <a:xfrm>
+            <a:off x="13245860" y="4163644"/>
+            <a:ext cx="10237696" cy="3447981"/>
+          </a:xfrm>
+          <a:prstGeom prst="rect">
+            <a:avLst/>
+          </a:prstGeom>
+        </p:spPr>
+        <p:txBody>
+          <a:bodyPr vert="horz" lIns="91440" tIns="45720" rIns="91440" bIns="45720" rtlCol="0" anchor="t">
+            <a:normAutofit/>
+          </a:bodyPr>
+          <a:lstStyle>
+            <a:lvl1pPr marL="228600" indent="-228600" algn="l" defTabSz="914400" rtl="0" eaLnBrk="1" latinLnBrk="0" hangingPunct="1">
+              <a:lnSpc>
+                <a:spcPct val="150000"/>
+              </a:lnSpc>
+              <a:spcBef>
+                <a:spcPts val="1000"/>
+              </a:spcBef>
+              <a:buFont typeface="Arial" panose="020B0604020202020204" pitchFamily="34" charset="0"/>
+              <a:buChar char="•"/>
+              <a:defRPr sz="2800" b="0" i="0" kern="1200">
+                <a:solidFill>
+                  <a:srgbClr val="667085"/>
+                </a:solidFill>
+                <a:latin typeface="Inter" panose="02000503000000020004" pitchFamily="2" charset="0"/>
+                <a:ea typeface="Inter" panose="02000503000000020004" pitchFamily="2" charset="0"/>
+                <a:cs typeface="Poppins" pitchFamily="2" charset="77"/>
+              </a:defRPr>
+            </a:lvl1pPr>
+            <a:lvl2pPr marL="685800" indent="-228600" algn="l" defTabSz="914400" rtl="0" eaLnBrk="1" latinLnBrk="0" hangingPunct="1">
+              <a:lnSpc>
+                <a:spcPct val="150000"/>
+              </a:lnSpc>
+              <a:spcBef>
+                <a:spcPts val="500"/>
+              </a:spcBef>
+              <a:buFont typeface="Arial" panose="020B0604020202020204" pitchFamily="34" charset="0"/>
+              <a:buChar char="•"/>
+              <a:defRPr sz="2400" b="0" i="0" kern="1200">
+                <a:solidFill>
+                  <a:srgbClr val="667085"/>
+                </a:solidFill>
+                <a:latin typeface="Inter" panose="02000503000000020004" pitchFamily="2" charset="0"/>
+                <a:ea typeface="Inter" panose="02000503000000020004" pitchFamily="2" charset="0"/>
+                <a:cs typeface="Poppins" pitchFamily="2" charset="77"/>
+              </a:defRPr>
+            </a:lvl2pPr>
+            <a:lvl3pPr marL="1143000" indent="-228600" algn="l" defTabSz="914400" rtl="0" eaLnBrk="1" latinLnBrk="0" hangingPunct="1">
+              <a:lnSpc>
+                <a:spcPct val="150000"/>
+              </a:lnSpc>
+              <a:spcBef>
+                <a:spcPts val="500"/>
+              </a:spcBef>
+              <a:buFont typeface="Arial" panose="020B0604020202020204" pitchFamily="34" charset="0"/>
+              <a:buChar char="•"/>
+              <a:defRPr sz="2000" b="0" i="0" kern="1200">
+                <a:solidFill>
+                  <a:srgbClr val="667085"/>
+                </a:solidFill>
+                <a:latin typeface="Inter" panose="02000503000000020004" pitchFamily="2" charset="0"/>
+                <a:ea typeface="Inter" panose="02000503000000020004" pitchFamily="2" charset="0"/>
+                <a:cs typeface="Poppins" pitchFamily="2" charset="77"/>
+              </a:defRPr>
+            </a:lvl3pPr>
+            <a:lvl4pPr marL="1600200" indent="-228600" algn="l" defTabSz="914400" rtl="0" eaLnBrk="1" latinLnBrk="0" hangingPunct="1">
+              <a:lnSpc>
+                <a:spcPct val="150000"/>
+              </a:lnSpc>
+              <a:spcBef>
+                <a:spcPts val="500"/>
+              </a:spcBef>
+              <a:buFont typeface="Arial" panose="020B0604020202020204" pitchFamily="34" charset="0"/>
+              <a:buChar char="•"/>
+              <a:defRPr sz="1800" b="0" i="0" kern="1200">
+                <a:solidFill>
+                  <a:srgbClr val="667085"/>
+                </a:solidFill>
+                <a:latin typeface="Inter" panose="02000503000000020004" pitchFamily="2" charset="0"/>
+                <a:ea typeface="Inter" panose="02000503000000020004" pitchFamily="2" charset="0"/>
+                <a:cs typeface="Poppins" pitchFamily="2" charset="77"/>
+              </a:defRPr>
+            </a:lvl4pPr>
+            <a:lvl5pPr marL="2057400" indent="-228600" algn="l" defTabSz="914400" rtl="0" eaLnBrk="1" latinLnBrk="0" hangingPunct="1">
+              <a:lnSpc>
+                <a:spcPct val="150000"/>
+              </a:lnSpc>
+              <a:spcBef>
+                <a:spcPts val="500"/>
+              </a:spcBef>
+              <a:buFont typeface="Arial" panose="020B0604020202020204" pitchFamily="34" charset="0"/>
+              <a:buChar char="•"/>
+              <a:defRPr sz="1800" b="0" i="0" kern="1200">
+                <a:solidFill>
+                  <a:srgbClr val="667085"/>
+                </a:solidFill>
+                <a:latin typeface="Inter" panose="02000503000000020004" pitchFamily="2" charset="0"/>
+                <a:ea typeface="Inter" panose="02000503000000020004" pitchFamily="2" charset="0"/>
+                <a:cs typeface="Poppins" pitchFamily="2" charset="77"/>
+              </a:defRPr>
+            </a:lvl5pPr>
+            <a:lvl6pPr marL="2514600" indent="-228600" algn="l" defTabSz="914400" rtl="0" eaLnBrk="1" latinLnBrk="0" hangingPunct="1">
+              <a:lnSpc>
+                <a:spcPct val="90000"/>
+              </a:lnSpc>
+              <a:spcBef>
+                <a:spcPts val="500"/>
+              </a:spcBef>
+              <a:buFont typeface="Arial" panose="020B0604020202020204" pitchFamily="34" charset="0"/>
+              <a:buChar char="•"/>
+              <a:defRPr sz="1800" kern="1200">
+                <a:solidFill>
+                  <a:schemeClr val="tx1"/>
+                </a:solidFill>
+                <a:latin typeface="+mn-lt"/>
+                <a:ea typeface="+mn-ea"/>
+                <a:cs typeface="+mn-cs"/>
+              </a:defRPr>
+            </a:lvl6pPr>
+            <a:lvl7pPr marL="2971800" indent="-228600" algn="l" defTabSz="914400" rtl="0" eaLnBrk="1" latinLnBrk="0" hangingPunct="1">
+              <a:lnSpc>
+                <a:spcPct val="90000"/>
+              </a:lnSpc>
+              <a:spcBef>
+                <a:spcPts val="500"/>
+              </a:spcBef>
+              <a:buFont typeface="Arial" panose="020B0604020202020204" pitchFamily="34" charset="0"/>
+              <a:buChar char="•"/>
+              <a:defRPr sz="1800" kern="1200">
+                <a:solidFill>
+                  <a:schemeClr val="tx1"/>
+                </a:solidFill>
+                <a:latin typeface="+mn-lt"/>
+                <a:ea typeface="+mn-ea"/>
+                <a:cs typeface="+mn-cs"/>
+              </a:defRPr>
+            </a:lvl7pPr>
+            <a:lvl8pPr marL="3429000" indent="-228600" algn="l" defTabSz="914400" rtl="0" eaLnBrk="1" latinLnBrk="0" hangingPunct="1">
+              <a:lnSpc>
+                <a:spcPct val="90000"/>
+              </a:lnSpc>
+              <a:spcBef>
+                <a:spcPts val="500"/>
+              </a:spcBef>
+              <a:buFont typeface="Arial" panose="020B0604020202020204" pitchFamily="34" charset="0"/>
+              <a:buChar char="•"/>
+              <a:defRPr sz="1800" kern="1200">
+                <a:solidFill>
+                  <a:schemeClr val="tx1"/>
+                </a:solidFill>
+                <a:latin typeface="+mn-lt"/>
+                <a:ea typeface="+mn-ea"/>
+                <a:cs typeface="+mn-cs"/>
+              </a:defRPr>
+            </a:lvl8pPr>
+            <a:lvl9pPr marL="3886200" indent="-228600" algn="l" defTabSz="914400" rtl="0" eaLnBrk="1" latinLnBrk="0" hangingPunct="1">
+              <a:lnSpc>
+                <a:spcPct val="90000"/>
+              </a:lnSpc>
+              <a:spcBef>
+                <a:spcPts val="500"/>
+              </a:spcBef>
+              <a:buFont typeface="Arial" panose="020B0604020202020204" pitchFamily="34" charset="0"/>
+              <a:buChar char="•"/>
+              <a:defRPr sz="1800" kern="1200">
+                <a:solidFill>
+                  <a:schemeClr val="tx1"/>
+                </a:solidFill>
+                <a:latin typeface="+mn-lt"/>
+                <a:ea typeface="+mn-ea"/>
+                <a:cs typeface="+mn-cs"/>
+              </a:defRPr>
+            </a:lvl9pPr>
+          </a:lstStyle>
+          <a:p>
+            <a:r>
+              <a:rPr lang="en-US">
+                <a:latin typeface="Inter"/>
+                <a:cs typeface="Poppins"/>
+              </a:rPr>
+              <a:t>Another way we can utilize the beta is by pairing the beta with the correlation of the function, as this will allow us to better understand how effective the beta, and with it our forcast, will be, as well as telling us the direction of the stocks and index relationship.</a:t>
+            </a:r>
+            <a:endParaRPr lang="en-US"/>
+          </a:p>
+        </p:txBody>
+      </p:sp>
+      <p:pic>
+        <p:nvPicPr>
+          <p:cNvPr id="11" name="Picture 10" descr="Beta Formula (Top 3 Methods) | Step by Step Examples to Calculate Beta">
+            <a:extLst>
+              <a:ext uri="{FF2B5EF4-FFF2-40B4-BE49-F238E27FC236}">
+                <a16:creationId xmlns:a16="http://schemas.microsoft.com/office/drawing/2014/main" id="{10E02E43-2EA5-9D91-F3E1-D105493A5139}"/>
+              </a:ext>
+            </a:extLst>
+          </p:cNvPr>
+          <p:cNvPicPr>
+            <a:picLocks noChangeAspect="1"/>
+          </p:cNvPicPr>
+          <p:nvPr/>
+        </p:nvPicPr>
+        <p:blipFill>
+          <a:blip r:embed="rId4"/>
+          <a:srcRect l="3643" t="75731" r="5519" b="5848"/>
+          <a:stretch/>
+        </p:blipFill>
+        <p:spPr>
+          <a:xfrm>
+            <a:off x="14625448" y="11965073"/>
+            <a:ext cx="8843688" cy="805506"/>
+          </a:xfrm>
+          <a:prstGeom prst="rect">
+            <a:avLst/>
+          </a:prstGeom>
+        </p:spPr>
+      </p:pic>
+      <p:sp>
+        <p:nvSpPr>
+          <p:cNvPr id="2" name="Oval 1">
+            <a:extLst>
+              <a:ext uri="{FF2B5EF4-FFF2-40B4-BE49-F238E27FC236}">
+                <a16:creationId xmlns:a16="http://schemas.microsoft.com/office/drawing/2014/main" id="{39D6B2D9-2BBC-6155-DE22-FE5A4A890736}"/>
+              </a:ext>
+            </a:extLst>
+          </p:cNvPr>
+          <p:cNvSpPr/>
+          <p:nvPr/>
+        </p:nvSpPr>
+        <p:spPr>
+          <a:xfrm>
+            <a:off x="1134494" y="2642951"/>
+            <a:ext cx="2797426" cy="4590892"/>
+          </a:xfrm>
+          <a:prstGeom prst="ellipse">
+            <a:avLst/>
+          </a:prstGeom>
+          <a:noFill/>
+          <a:ln w="47625">
+            <a:solidFill>
+              <a:schemeClr val="tx1"/>
+            </a:solidFill>
+          </a:ln>
+        </p:spPr>
+        <p:style>
+          <a:lnRef idx="2">
+            <a:schemeClr val="accent1">
+              <a:shade val="15000"/>
+            </a:schemeClr>
+          </a:lnRef>
+          <a:fillRef idx="1">
+            <a:schemeClr val="accent1"/>
+          </a:fillRef>
+          <a:effectRef idx="0">
+            <a:schemeClr val="accent1"/>
+          </a:effectRef>
+          <a:fontRef idx="minor">
+            <a:schemeClr val="lt1"/>
+          </a:fontRef>
+        </p:style>
+        <p:txBody>
+          <a:bodyPr rtlCol="0" anchor="ctr"/>
+          <a:lstStyle/>
+          <a:p>
+            <a:pPr algn="ctr"/>
+            <a:endParaRPr lang="en-US"/>
+          </a:p>
+        </p:txBody>
+      </p:sp>
+    </p:spTree>
+    <p:extLst>
+      <p:ext uri="{BB962C8B-B14F-4D97-AF65-F5344CB8AC3E}">
+        <p14:creationId xmlns:p14="http://schemas.microsoft.com/office/powerpoint/2010/main" val="1858521055"/>
+      </p:ext>
+    </p:extLst>
+  </p:cSld>
+  <p:clrMapOvr>
+    <a:masterClrMapping/>
+  </p:clrMapOvr>
+</p:sld>
+</file>
+
+<file path=ppt/slides/slide11.xml><?xml version="1.0" encoding="utf-8"?>
+<p:sld xmlns:a="http://schemas.openxmlformats.org/drawingml/2006/main" xmlns:r="http://schemas.openxmlformats.org/officeDocument/2006/relationships" xmlns:p="http://schemas.openxmlformats.org/presentationml/2006/main">
+  <p:cSld>
+    <p:spTree>
+      <p:nvGrpSpPr>
         <p:cNvPr id="1" name="">
           <a:extLst>
             <a:ext uri="{FF2B5EF4-FFF2-40B4-BE49-F238E27FC236}">
@@ -8762,8 +11008,8 @@
         </p:nvSpPr>
         <p:spPr>
           <a:xfrm>
-            <a:off x="12739165" y="3426028"/>
-            <a:ext cx="10327342" cy="9146972"/>
+            <a:off x="12456797" y="3405976"/>
+            <a:ext cx="10888815" cy="9207129"/>
           </a:xfrm>
         </p:spPr>
         <p:txBody>
@@ -8776,19 +11022,19 @@
               <a:buNone/>
             </a:pPr>
             <a:r>
-              <a:rPr lang="en-US" sz="2400">
+              <a:rPr lang="en-US" sz="3000">
                 <a:latin typeface="Inter"/>
                 <a:cs typeface="Poppins"/>
               </a:rPr>
               <a:t>One challenge we faced was that, as the AI tech stock field is relatively new, it is harder to define what the market for AI is, as this market is not as well established as other markets, such as the oil industry for example.</a:t>
             </a:r>
-            <a:endParaRPr lang="en-US" sz="2400"/>
+            <a:endParaRPr lang="en-US" sz="3000"/>
           </a:p>
           <a:p>
             <a:pPr marL="0" indent="0">
               <a:buNone/>
             </a:pPr>
-            <a:endParaRPr lang="en-US" sz="2400">
+            <a:endParaRPr lang="en-US" sz="3000">
               <a:latin typeface="Inter"/>
               <a:cs typeface="Poppins"/>
             </a:endParaRPr>
@@ -8798,13 +11044,13 @@
               <a:buNone/>
             </a:pPr>
             <a:r>
-              <a:rPr lang="en-US" sz="2400">
+              <a:rPr lang="en-US" sz="3000">
                 <a:latin typeface="Inter"/>
                 <a:cs typeface="Poppins"/>
               </a:rPr>
               <a:t>One challenge we faced was, when I was working on excel, was to compare the volatilities to each other to find the beta however, as I attempted to do this, I found that this was over complicating the problem, and would be harder and less precise as using the covariance over the variance to find the beta, resulting in me using the covariance and variance to find the data and not the volatility comparison system. </a:t>
             </a:r>
-            <a:endParaRPr lang="en-US" sz="2400"/>
+            <a:endParaRPr lang="en-US" sz="3000"/>
           </a:p>
         </p:txBody>
       </p:sp>
@@ -8860,7 +11106,7 @@
             <a:fld id="{86CB4B4D-7CA3-9044-876B-883B54F8677D}" type="slidenum">
               <a:rPr lang="en-US" smtClean="0"/>
               <a:pPr/>
-              <a:t>10</a:t>
+              <a:t>11</a:t>
             </a:fld>
             <a:endParaRPr lang="en-US"/>
           </a:p>
@@ -9080,7 +11326,7 @@
 </p:sld>
 </file>
 
-<file path=ppt/slides/slide11.xml><?xml version="1.0" encoding="utf-8"?>
+<file path=ppt/slides/slide12.xml><?xml version="1.0" encoding="utf-8"?>
 <p:sld xmlns:a="http://schemas.openxmlformats.org/drawingml/2006/main" xmlns:r="http://schemas.openxmlformats.org/officeDocument/2006/relationships" xmlns:p="http://schemas.openxmlformats.org/presentationml/2006/main">
   <p:cSld>
     <p:spTree>
@@ -9132,7 +11378,7 @@
           <a:lstStyle/>
           <a:p>
             <a:r>
-              <a:rPr lang="en-US" sz="3000">
+              <a:rPr lang="en-US" sz="3000" dirty="0">
                 <a:latin typeface="Inter"/>
                 <a:cs typeface="Poppins"/>
               </a:rPr>
@@ -9143,14 +11389,14 @@
             <a:pPr marL="0" indent="0">
               <a:buNone/>
             </a:pPr>
-            <a:endParaRPr lang="en-US" sz="3000">
+            <a:endParaRPr lang="en-US" sz="3000" dirty="0">
               <a:latin typeface="Inter"/>
               <a:cs typeface="Poppins"/>
             </a:endParaRPr>
           </a:p>
           <a:p>
             <a:r>
-              <a:rPr lang="en-US" sz="3000">
+              <a:rPr lang="en-US" sz="3000" dirty="0">
                 <a:latin typeface="Inter"/>
                 <a:cs typeface="Poppins"/>
               </a:rPr>
@@ -9158,7 +11404,7 @@
             </a:r>
           </a:p>
           <a:p>
-            <a:endParaRPr lang="en-US" sz="3000">
+            <a:endParaRPr lang="en-US" sz="3000" dirty="0">
               <a:latin typeface="Inter"/>
               <a:cs typeface="Poppins"/>
             </a:endParaRPr>
@@ -9217,7 +11463,7 @@
             <a:fld id="{86CB4B4D-7CA3-9044-876B-883B54F8677D}" type="slidenum">
               <a:rPr lang="en-US" smtClean="0"/>
               <a:pPr/>
-              <a:t>11</a:t>
+              <a:t>12</a:t>
             </a:fld>
             <a:endParaRPr lang="en-US"/>
           </a:p>
@@ -9268,7 +11514,7 @@
 </p:sld>
 </file>
 
-<file path=ppt/slides/slide12.xml><?xml version="1.0" encoding="utf-8"?>
+<file path=ppt/slides/slide13.xml><?xml version="1.0" encoding="utf-8"?>
 <p:sld xmlns:a="http://schemas.openxmlformats.org/drawingml/2006/main" xmlns:r="http://schemas.openxmlformats.org/officeDocument/2006/relationships" xmlns:p="http://schemas.openxmlformats.org/presentationml/2006/main">
   <p:cSld>
     <p:spTree>
@@ -9313,8 +11559,11 @@
           <a:lstStyle/>
           <a:p>
             <a:r>
-              <a:rPr lang="en-US"/>
-              <a:t>Sources – Quick Links</a:t>
+              <a:rPr lang="en-US">
+                <a:latin typeface="Inter"/>
+                <a:cs typeface="Poppins SemiBold"/>
+              </a:rPr>
+              <a:t>References – Quick Links</a:t>
             </a:r>
           </a:p>
         </p:txBody>
@@ -9471,7 +11720,7 @@
             <a:fld id="{86CB4B4D-7CA3-9044-876B-883B54F8677D}" type="slidenum">
               <a:rPr lang="en-US" smtClean="0"/>
               <a:pPr/>
-              <a:t>12</a:t>
+              <a:t>13</a:t>
             </a:fld>
             <a:endParaRPr lang="en-US"/>
           </a:p>
@@ -9490,7 +11739,7 @@
 </p:sld>
 </file>
 
-<file path=ppt/slides/slide13.xml><?xml version="1.0" encoding="utf-8"?>
+<file path=ppt/slides/slide14.xml><?xml version="1.0" encoding="utf-8"?>
 <p:sld xmlns:a="http://schemas.openxmlformats.org/drawingml/2006/main" xmlns:r="http://schemas.openxmlformats.org/officeDocument/2006/relationships" xmlns:p="http://schemas.openxmlformats.org/presentationml/2006/main">
   <p:cSld>
     <p:spTree>
@@ -9555,8 +11804,8 @@
         </p:nvSpPr>
         <p:spPr>
           <a:xfrm>
-            <a:off x="914398" y="1306287"/>
-            <a:ext cx="10381129" cy="2286000"/>
+            <a:off x="818149" y="1306287"/>
+            <a:ext cx="11952646" cy="2286000"/>
           </a:xfrm>
         </p:spPr>
         <p:txBody>
@@ -9588,8 +11837,8 @@
         </p:nvSpPr>
         <p:spPr>
           <a:xfrm>
-            <a:off x="914399" y="849087"/>
-            <a:ext cx="10381129" cy="457200"/>
+            <a:off x="818150" y="849086"/>
+            <a:ext cx="11952646" cy="457200"/>
           </a:xfrm>
         </p:spPr>
         <p:txBody>
@@ -9628,13 +11877,13 @@
         </p:nvSpPr>
         <p:spPr>
           <a:xfrm>
-            <a:off x="914865" y="2865475"/>
-            <a:ext cx="10380663" cy="8490857"/>
+            <a:off x="818148" y="2865475"/>
+            <a:ext cx="8944754" cy="8490857"/>
           </a:xfrm>
         </p:spPr>
         <p:txBody>
-          <a:bodyPr>
-            <a:normAutofit/>
+          <a:bodyPr vert="horz" lIns="91440" tIns="45720" rIns="91440" bIns="45720" rtlCol="0" anchor="t">
+            <a:noAutofit/>
           </a:bodyPr>
           <a:lstStyle/>
           <a:p>
@@ -9643,7 +11892,10 @@
               <a:buChar char="§"/>
             </a:pPr>
             <a:r>
-              <a:rPr lang="en-US"/>
+              <a:rPr lang="en-US" sz="3200" dirty="0">
+                <a:latin typeface="Inter"/>
+                <a:cs typeface="Poppins"/>
+              </a:rPr>
               <a:t>Research Hypothesis</a:t>
             </a:r>
           </a:p>
@@ -9653,7 +11905,10 @@
               <a:buChar char="§"/>
             </a:pPr>
             <a:r>
-              <a:rPr lang="en-US"/>
+              <a:rPr lang="en-US" sz="3200" dirty="0">
+                <a:latin typeface="Inter"/>
+                <a:cs typeface="Poppins"/>
+              </a:rPr>
               <a:t>Overview of Beta</a:t>
             </a:r>
           </a:p>
@@ -9663,7 +11918,10 @@
               <a:buChar char="§"/>
             </a:pPr>
             <a:r>
-              <a:rPr lang="en-US"/>
+              <a:rPr lang="en-US" sz="3200" dirty="0">
+                <a:latin typeface="Inter"/>
+                <a:cs typeface="Poppins"/>
+              </a:rPr>
               <a:t>Methodology</a:t>
             </a:r>
           </a:p>
@@ -9673,7 +11931,10 @@
               <a:buChar char="§"/>
             </a:pPr>
             <a:r>
-              <a:rPr lang="en-US"/>
+              <a:rPr lang="en-US" sz="3200" dirty="0">
+                <a:latin typeface="Inter"/>
+                <a:cs typeface="Poppins"/>
+              </a:rPr>
               <a:t>Gathering data</a:t>
             </a:r>
           </a:p>
@@ -9683,7 +11944,10 @@
               <a:buChar char="§"/>
             </a:pPr>
             <a:r>
-              <a:rPr lang="en-US"/>
+              <a:rPr lang="en-US" sz="3200" dirty="0">
+                <a:latin typeface="Inter"/>
+                <a:cs typeface="Poppins"/>
+              </a:rPr>
               <a:t>Calculating Beta</a:t>
             </a:r>
           </a:p>
@@ -9693,17 +11957,10 @@
               <a:buChar char="§"/>
             </a:pPr>
             <a:r>
-              <a:rPr lang="en-US"/>
-              <a:t>Comparing with Nasdaq100</a:t>
-            </a:r>
-          </a:p>
-          <a:p>
-            <a:pPr lvl="1">
-              <a:buFont typeface="Wingdings" pitchFamily="2" charset="2"/>
-              <a:buChar char="§"/>
-            </a:pPr>
-            <a:r>
-              <a:rPr lang="en-US"/>
+              <a:rPr lang="en-US" sz="3200" dirty="0">
+                <a:latin typeface="Inter"/>
+                <a:cs typeface="Poppins"/>
+              </a:rPr>
               <a:t>Risk Insights</a:t>
             </a:r>
           </a:p>
@@ -9713,7 +11970,10 @@
               <a:buChar char="§"/>
             </a:pPr>
             <a:r>
-              <a:rPr lang="en-US"/>
+              <a:rPr lang="en-US" sz="3200" dirty="0">
+                <a:latin typeface="Inter"/>
+                <a:cs typeface="Poppins"/>
+              </a:rPr>
               <a:t>Conclusions</a:t>
             </a:r>
           </a:p>
@@ -9723,7 +11983,10 @@
               <a:buChar char="§"/>
             </a:pPr>
             <a:r>
-              <a:rPr lang="en-US"/>
+              <a:rPr lang="en-US" sz="3200" dirty="0">
+                <a:latin typeface="Inter"/>
+                <a:cs typeface="Poppins"/>
+              </a:rPr>
               <a:t>Limitations and Challenges</a:t>
             </a:r>
           </a:p>
@@ -9733,7 +11996,10 @@
               <a:buChar char="§"/>
             </a:pPr>
             <a:r>
-              <a:rPr lang="en-US"/>
+              <a:rPr lang="en-US" sz="3200" dirty="0">
+                <a:latin typeface="Inter"/>
+                <a:cs typeface="Poppins"/>
+              </a:rPr>
               <a:t>References</a:t>
             </a:r>
           </a:p>
@@ -9741,7 +12007,7 @@
             <a:pPr marL="0" indent="0">
               <a:buNone/>
             </a:pPr>
-            <a:endParaRPr lang="en-US"/>
+            <a:endParaRPr lang="en-US" dirty="0"/>
           </a:p>
         </p:txBody>
       </p:sp>
@@ -9813,8 +12079,8 @@
         </p:nvSpPr>
         <p:spPr>
           <a:xfrm>
-            <a:off x="1459027" y="3881236"/>
-            <a:ext cx="23542724" cy="636979"/>
+            <a:off x="1738132" y="3402771"/>
+            <a:ext cx="21356988" cy="636979"/>
           </a:xfrm>
         </p:spPr>
         <p:txBody>
@@ -9848,8 +12114,8 @@
         </p:nvSpPr>
         <p:spPr>
           <a:xfrm>
-            <a:off x="1459027" y="6031451"/>
-            <a:ext cx="21687029" cy="4701684"/>
+            <a:off x="1738132" y="5611545"/>
+            <a:ext cx="18959872" cy="4701684"/>
           </a:xfrm>
         </p:spPr>
         <p:txBody>
@@ -9859,7 +12125,7 @@
           <a:lstStyle/>
           <a:p>
             <a:r>
-              <a:rPr lang="en-US">
+              <a:rPr lang="en-US" dirty="0">
                 <a:solidFill>
                   <a:schemeClr val="bg1"/>
                 </a:solidFill>
@@ -9935,7 +12201,7 @@
           <a:lstStyle/>
           <a:p>
             <a:r>
-              <a:rPr lang="en-US" sz="6000">
+              <a:rPr lang="en-US" sz="6000" dirty="0">
                 <a:latin typeface="Inter"/>
                 <a:cs typeface="Poppins"/>
               </a:rPr>
@@ -9962,7 +12228,7 @@
         </p:nvSpPr>
         <p:spPr>
           <a:xfrm>
-            <a:off x="933475" y="335997"/>
+            <a:off x="933475" y="196445"/>
             <a:ext cx="6729267" cy="847344"/>
           </a:xfrm>
         </p:spPr>
@@ -10443,7 +12709,7 @@
                     <a:lstStyle/>
                     <a:p>
                       <a:r>
-                        <a:rPr lang="en-US" sz="2500" b="0"/>
+                        <a:rPr lang="en-US" sz="2500" b="0" dirty="0"/>
                         <a:t>Sample Size = Number of trading days</a:t>
                       </a:r>
                     </a:p>
@@ -10619,30 +12885,30 @@
                     </a:lstStyle>
                     <a:p>
                       <a:r>
-                        <a:rPr lang="en-US" sz="2500"/>
+                        <a:rPr lang="en-US" sz="2500" dirty="0"/>
                         <a:t>R</a:t>
                       </a:r>
                       <a:r>
-                        <a:rPr lang="en-US" sz="2500" baseline="-25000"/>
+                        <a:rPr lang="en-US" sz="2500" baseline="-25000" dirty="0"/>
                         <a:t>ABC</a:t>
                       </a:r>
                       <a:r>
-                        <a:rPr lang="en-US" sz="2500" baseline="0"/>
+                        <a:rPr lang="en-US" sz="2500" baseline="0" dirty="0"/>
                         <a:t>/A</a:t>
                       </a:r>
                       <a:r>
-                        <a:rPr lang="en-US" sz="2500" baseline="-25000"/>
+                        <a:rPr lang="en-US" sz="2500" baseline="-25000" dirty="0"/>
                         <a:t>ABC</a:t>
                       </a:r>
                       <a:r>
-                        <a:rPr lang="el-GR" sz="2500"/>
+                        <a:rPr lang="el-GR" sz="2500" dirty="0"/>
                         <a:t> = </a:t>
                       </a:r>
                       <a:r>
-                        <a:rPr lang="en-US" sz="2500"/>
+                        <a:rPr lang="en-US" sz="2500" dirty="0"/>
                         <a:t>Return on an individual stock/Average return on individual stock</a:t>
                       </a:r>
-                      <a:endParaRPr lang="en-US" sz="2500" b="1"/>
+                      <a:endParaRPr lang="en-US" sz="2500" b="1" dirty="0"/>
                     </a:p>
                   </a:txBody>
                   <a:tcPr marL="182880" marR="182880" marT="91440" marB="91440" anchor="ctr">
@@ -10906,30 +13172,30 @@
                         <a:defRPr/>
                       </a:pPr>
                       <a:r>
-                        <a:rPr lang="en-US" sz="2500"/>
+                        <a:rPr lang="en-US" sz="2500" dirty="0"/>
                         <a:t>R</a:t>
                       </a:r>
                       <a:r>
-                        <a:rPr lang="en-US" sz="2500" baseline="-25000"/>
+                        <a:rPr lang="en-US" sz="2500" baseline="-25000" dirty="0"/>
                         <a:t>XYZ</a:t>
                       </a:r>
                       <a:r>
-                        <a:rPr lang="en-US" sz="2500" baseline="0"/>
+                        <a:rPr lang="en-US" sz="2500" baseline="0" dirty="0"/>
                         <a:t>/A</a:t>
                       </a:r>
                       <a:r>
-                        <a:rPr lang="en-US" sz="2500" baseline="-25000"/>
+                        <a:rPr lang="en-US" sz="2500" baseline="-25000" dirty="0"/>
                         <a:t>XYZ</a:t>
                       </a:r>
                       <a:r>
-                        <a:rPr lang="el-GR" sz="2500"/>
+                        <a:rPr lang="el-GR" sz="2500" dirty="0"/>
                         <a:t> = </a:t>
                       </a:r>
                       <a:r>
-                        <a:rPr lang="en-US" sz="2500"/>
+                        <a:rPr lang="en-US" sz="2500" dirty="0"/>
                         <a:t>Return on overall market/Average return on overall market (Nasdaq100)</a:t>
                       </a:r>
-                      <a:endParaRPr lang="en-US" sz="2500" b="1"/>
+                      <a:endParaRPr lang="en-US" sz="2500" b="1" dirty="0"/>
                     </a:p>
                   </a:txBody>
                   <a:tcPr marL="182880" marR="182880" marT="91440" marB="91440" anchor="ctr">
@@ -11106,15 +13372,15 @@
                         <a:buNone/>
                       </a:pPr>
                       <a:r>
-                        <a:rPr lang="en-US" sz="2500" baseline="0"/>
+                        <a:rPr lang="en-US" sz="2500" baseline="0" dirty="0"/>
                         <a:t>Covariance</a:t>
                       </a:r>
                       <a:r>
-                        <a:rPr lang="en-US" sz="2500" baseline="-25000"/>
+                        <a:rPr lang="en-US" sz="2500" baseline="-25000" dirty="0"/>
                         <a:t> </a:t>
                       </a:r>
                       <a:r>
-                        <a:rPr lang="en-US" sz="2500"/>
+                        <a:rPr lang="en-US" sz="2500" dirty="0"/>
                         <a:t>= relationship between changes in stock and market returns looks at how the two variables are intertwined</a:t>
                       </a:r>
                     </a:p>
@@ -11216,7 +13482,7 @@
                         <a:buNone/>
                       </a:pPr>
                       <a:r>
-                        <a:rPr lang="en-US" sz="2500"/>
+                        <a:rPr lang="en-US" sz="2500" dirty="0"/>
                         <a:t>Variance = distance of spread of market’s data points on average</a:t>
                       </a:r>
                     </a:p>
@@ -11267,7 +13533,7 @@
                       <a:pPr lvl="0" algn="r">
                         <a:buNone/>
                       </a:pPr>
-                      <a:endParaRPr lang="en-US" sz="3000" b="0"/>
+                      <a:endParaRPr lang="en-US" sz="3000" b="0" dirty="0"/>
                     </a:p>
                   </a:txBody>
                   <a:tcPr marL="182880" marR="182880" marT="91440" marB="91440" anchor="ctr">
@@ -11308,8 +13574,8 @@
           </a:graphicData>
         </a:graphic>
       </p:graphicFrame>
-      <mc:AlternateContent xmlns:mc="http://schemas.openxmlformats.org/markup-compatibility/2006">
-        <mc:Choice xmlns:p14="http://schemas.microsoft.com/office/powerpoint/2010/main" Requires="p14">
+      <mc:AlternateContent xmlns:mc="http://schemas.openxmlformats.org/markup-compatibility/2006" xmlns:p14="http://schemas.microsoft.com/office/powerpoint/2010/main">
+        <mc:Choice Requires="p14">
           <p:contentPart p14:bwMode="auto" r:id="rId4">
             <p14:nvContentPartPr>
               <p14:cNvPr id="6" name="Ink 5">
@@ -11328,7 +13594,7 @@
             </p14:xfrm>
           </p:contentPart>
         </mc:Choice>
-        <mc:Fallback>
+        <mc:Fallback xmlns="">
           <p:pic>
             <p:nvPicPr>
               <p:cNvPr id="6" name="Ink 5">
@@ -14511,7 +16777,7 @@
           <a:p>
             <a:pPr defTabSz="1828800" hangingPunct="1"/>
             <a:r>
-              <a:rPr lang="en-US" sz="3500">
+              <a:rPr lang="en-US" sz="3500" dirty="0">
                 <a:solidFill>
                   <a:srgbClr val="0E0E0E"/>
                 </a:solidFill>
@@ -14523,7 +16789,7 @@
           <a:p>
             <a:pPr defTabSz="1828800" hangingPunct="1"/>
             <a:r>
-              <a:rPr lang="en-US" sz="2800" b="1">
+              <a:rPr lang="en-US" sz="2800" b="1" dirty="0">
                 <a:solidFill>
                   <a:srgbClr val="0E0E0E"/>
                 </a:solidFill>
@@ -14532,7 +16798,7 @@
               <a:t>Variance</a:t>
             </a:r>
             <a:r>
-              <a:rPr lang="en-US" sz="2800">
+              <a:rPr lang="en-US" sz="2800" dirty="0">
                 <a:solidFill>
                   <a:srgbClr val="0E0E0E"/>
                 </a:solidFill>
@@ -14541,7 +16807,7 @@
               <a:t> = the </a:t>
             </a:r>
             <a:r>
-              <a:rPr lang="en-US" sz="2800" b="1">
+              <a:rPr lang="en-US" sz="2800" b="1" dirty="0">
                 <a:solidFill>
                   <a:srgbClr val="0E0E0E"/>
                 </a:solidFill>
@@ -14550,7 +16816,7 @@
               <a:t>sum</a:t>
             </a:r>
             <a:r>
-              <a:rPr lang="en-US" sz="2800">
+              <a:rPr lang="en-US" sz="2800" dirty="0">
                 <a:solidFill>
                   <a:srgbClr val="0E0E0E"/>
                 </a:solidFill>
@@ -14559,7 +16825,7 @@
               <a:t> of the </a:t>
             </a:r>
             <a:r>
-              <a:rPr lang="en-US" sz="2800" b="1">
+              <a:rPr lang="en-US" sz="2800" b="1" dirty="0">
                 <a:solidFill>
                   <a:srgbClr val="0E0E0E"/>
                 </a:solidFill>
@@ -14568,7 +16834,7 @@
               <a:t>difference</a:t>
             </a:r>
             <a:r>
-              <a:rPr lang="en-US" sz="2800">
+              <a:rPr lang="en-US" sz="2800" dirty="0">
                 <a:solidFill>
                   <a:srgbClr val="0E0E0E"/>
                 </a:solidFill>
@@ -14577,7 +16843,7 @@
               <a:t> between</a:t>
             </a:r>
             <a:r>
-              <a:rPr lang="en-US" sz="2800" b="1">
+              <a:rPr lang="en-US" sz="2800" b="1" dirty="0">
                 <a:solidFill>
                   <a:srgbClr val="0E0E0E"/>
                 </a:solidFill>
@@ -14586,7 +16852,7 @@
               <a:t> market return</a:t>
             </a:r>
             <a:r>
-              <a:rPr lang="en-US" sz="2800">
+              <a:rPr lang="en-US" sz="2800" dirty="0">
                 <a:solidFill>
                   <a:srgbClr val="0E0E0E"/>
                 </a:solidFill>
@@ -14595,7 +16861,7 @@
               <a:t> and </a:t>
             </a:r>
             <a:r>
-              <a:rPr lang="en-US" sz="2800" b="1">
+              <a:rPr lang="en-US" sz="2800" b="1" dirty="0">
                 <a:solidFill>
                   <a:srgbClr val="0E0E0E"/>
                 </a:solidFill>
@@ -14604,7 +16870,7 @@
               <a:t>mean market return squared </a:t>
             </a:r>
             <a:r>
-              <a:rPr lang="en-US" sz="2800">
+              <a:rPr lang="en-US" sz="2800" dirty="0">
                 <a:solidFill>
                   <a:srgbClr val="0E0E0E"/>
                 </a:solidFill>
@@ -14613,7 +16879,7 @@
               <a:t>and </a:t>
             </a:r>
             <a:r>
-              <a:rPr lang="en-US" sz="2800" b="1">
+              <a:rPr lang="en-US" sz="2800" b="1" dirty="0">
                 <a:solidFill>
                   <a:srgbClr val="0E0E0E"/>
                 </a:solidFill>
@@ -14622,7 +16888,7 @@
               <a:t>averaged</a:t>
             </a:r>
             <a:r>
-              <a:rPr lang="en-US" sz="2800">
+              <a:rPr lang="en-US" sz="2800" dirty="0">
                 <a:solidFill>
                   <a:srgbClr val="0E0E0E"/>
                 </a:solidFill>
@@ -14634,7 +16900,7 @@
           <a:p>
             <a:pPr defTabSz="1828800" hangingPunct="1"/>
             <a:r>
-              <a:rPr lang="en-US" sz="2800" b="1">
+              <a:rPr lang="en-US" sz="2800" b="1" dirty="0">
                 <a:solidFill>
                   <a:srgbClr val="0E0E0E"/>
                 </a:solidFill>
@@ -14643,7 +16909,7 @@
               <a:t>Covariance </a:t>
             </a:r>
             <a:r>
-              <a:rPr lang="en-US" sz="2800">
+              <a:rPr lang="en-US" sz="2800" dirty="0">
                 <a:solidFill>
                   <a:srgbClr val="0E0E0E"/>
                 </a:solidFill>
@@ -14652,7 +16918,7 @@
               <a:t>= the </a:t>
             </a:r>
             <a:r>
-              <a:rPr lang="en-US" sz="2800" b="1">
+              <a:rPr lang="en-US" sz="2800" b="1" dirty="0">
                 <a:solidFill>
                   <a:srgbClr val="0E0E0E"/>
                 </a:solidFill>
@@ -14661,7 +16927,7 @@
               <a:t>sum </a:t>
             </a:r>
             <a:r>
-              <a:rPr lang="en-US" sz="2800">
+              <a:rPr lang="en-US" sz="2800" dirty="0">
                 <a:solidFill>
                   <a:srgbClr val="0E0E0E"/>
                 </a:solidFill>
@@ -14670,7 +16936,7 @@
               <a:t>of the </a:t>
             </a:r>
             <a:r>
-              <a:rPr lang="en-US" sz="2800" b="1">
+              <a:rPr lang="en-US" sz="2800" b="1" dirty="0">
                 <a:solidFill>
                   <a:srgbClr val="0E0E0E"/>
                 </a:solidFill>
@@ -14679,7 +16945,7 @@
               <a:t>product</a:t>
             </a:r>
             <a:r>
-              <a:rPr lang="en-US" sz="2800">
+              <a:rPr lang="en-US" sz="2800" dirty="0">
                 <a:solidFill>
                   <a:srgbClr val="0E0E0E"/>
                 </a:solidFill>
@@ -14688,7 +16954,7 @@
               <a:t> between </a:t>
             </a:r>
             <a:r>
-              <a:rPr lang="en-US" sz="2800" b="1">
+              <a:rPr lang="en-US" sz="2800" b="1" dirty="0">
                 <a:solidFill>
                   <a:srgbClr val="0E0E0E"/>
                 </a:solidFill>
@@ -14697,7 +16963,7 @@
               <a:t>stock movement</a:t>
             </a:r>
             <a:r>
-              <a:rPr lang="en-US" sz="2800">
+              <a:rPr lang="en-US" sz="2800" dirty="0">
                 <a:solidFill>
                   <a:srgbClr val="0E0E0E"/>
                 </a:solidFill>
@@ -14706,7 +16972,7 @@
               <a:t> and </a:t>
             </a:r>
             <a:r>
-              <a:rPr lang="en-US" sz="2800" b="1">
+              <a:rPr lang="en-US" sz="2800" b="1" dirty="0">
                 <a:solidFill>
                   <a:srgbClr val="0E0E0E"/>
                 </a:solidFill>
@@ -14715,7 +16981,7 @@
               <a:t>market movement</a:t>
             </a:r>
             <a:r>
-              <a:rPr lang="en-US" sz="2800">
+              <a:rPr lang="en-US" sz="2800" dirty="0">
                 <a:solidFill>
                   <a:srgbClr val="0E0E0E"/>
                 </a:solidFill>
@@ -14724,7 +16990,7 @@
               <a:t> </a:t>
             </a:r>
             <a:r>
-              <a:rPr lang="en-US" sz="2800" b="1">
+              <a:rPr lang="en-US" sz="2800" b="1" dirty="0">
                 <a:solidFill>
                   <a:srgbClr val="0E0E0E"/>
                 </a:solidFill>
@@ -14765,7 +17031,7 @@
           <a:p>
             <a:pPr defTabSz="1828800" hangingPunct="1"/>
             <a:r>
-              <a:rPr lang="en-US" sz="3500">
+              <a:rPr lang="en-US" sz="3500" dirty="0">
                 <a:solidFill>
                   <a:srgbClr val="0E0E0E"/>
                 </a:solidFill>
@@ -14777,7 +17043,7 @@
           <a:p>
             <a:pPr defTabSz="1828800" hangingPunct="1"/>
             <a:r>
-              <a:rPr lang="en-US" sz="2800">
+              <a:rPr lang="en-US" sz="2800" dirty="0">
                 <a:solidFill>
                   <a:srgbClr val="0E0E0E"/>
                 </a:solidFill>
@@ -14934,6 +17200,383 @@
         <p:cNvPr id="1" name="">
           <a:extLst>
             <a:ext uri="{FF2B5EF4-FFF2-40B4-BE49-F238E27FC236}">
+              <a16:creationId xmlns:a16="http://schemas.microsoft.com/office/drawing/2014/main" id="{39F804F5-B4CB-F401-1811-1D0892385129}"/>
+            </a:ext>
+          </a:extLst>
+        </p:cNvPr>
+        <p:cNvGrpSpPr/>
+        <p:nvPr/>
+      </p:nvGrpSpPr>
+      <p:grpSpPr>
+        <a:xfrm>
+          <a:off x="0" y="0"/>
+          <a:ext cx="0" cy="0"/>
+          <a:chOff x="0" y="0"/>
+          <a:chExt cx="0" cy="0"/>
+        </a:xfrm>
+      </p:grpSpPr>
+      <p:sp>
+        <p:nvSpPr>
+          <p:cNvPr id="4" name="Text Placeholder 3">
+            <a:extLst>
+              <a:ext uri="{FF2B5EF4-FFF2-40B4-BE49-F238E27FC236}">
+                <a16:creationId xmlns:a16="http://schemas.microsoft.com/office/drawing/2014/main" id="{81E0E457-ECAD-2DEE-BA6A-ECE217E12B74}"/>
+              </a:ext>
+            </a:extLst>
+          </p:cNvPr>
+          <p:cNvSpPr>
+            <a:spLocks noGrp="1"/>
+          </p:cNvSpPr>
+          <p:nvPr>
+            <p:ph type="body" sz="quarter" idx="13"/>
+          </p:nvPr>
+        </p:nvSpPr>
+        <p:spPr>
+          <a:xfrm>
+            <a:off x="914397" y="425751"/>
+            <a:ext cx="6741459" cy="457200"/>
+          </a:xfrm>
+        </p:spPr>
+        <p:txBody>
+          <a:bodyPr/>
+          <a:lstStyle/>
+          <a:p>
+            <a:r>
+              <a:rPr lang="en-US"/>
+              <a:t>BETA OF AI TECH STOCKS</a:t>
+            </a:r>
+          </a:p>
+        </p:txBody>
+      </p:sp>
+      <p:sp>
+        <p:nvSpPr>
+          <p:cNvPr id="6" name="Title 1">
+            <a:extLst>
+              <a:ext uri="{FF2B5EF4-FFF2-40B4-BE49-F238E27FC236}">
+                <a16:creationId xmlns:a16="http://schemas.microsoft.com/office/drawing/2014/main" id="{04A06671-EEF6-AA0D-49FA-D482DCCA146E}"/>
+              </a:ext>
+            </a:extLst>
+          </p:cNvPr>
+          <p:cNvSpPr>
+            <a:spLocks noGrp="1"/>
+          </p:cNvSpPr>
+          <p:nvPr>
+            <p:ph type="title"/>
+          </p:nvPr>
+        </p:nvSpPr>
+        <p:spPr>
+          <a:xfrm>
+            <a:off x="914397" y="516599"/>
+            <a:ext cx="21031201" cy="1371600"/>
+          </a:xfrm>
+        </p:spPr>
+        <p:txBody>
+          <a:bodyPr>
+            <a:normAutofit/>
+          </a:bodyPr>
+          <a:lstStyle/>
+          <a:p>
+            <a:r>
+              <a:rPr lang="en-US" sz="6000" dirty="0">
+                <a:latin typeface="Inter"/>
+                <a:cs typeface="Poppins"/>
+              </a:rPr>
+              <a:t>BETA – How to Read</a:t>
+            </a:r>
+          </a:p>
+        </p:txBody>
+      </p:sp>
+      <p:grpSp>
+        <p:nvGrpSpPr>
+          <p:cNvPr id="2" name="Group 1">
+            <a:extLst>
+              <a:ext uri="{FF2B5EF4-FFF2-40B4-BE49-F238E27FC236}">
+                <a16:creationId xmlns:a16="http://schemas.microsoft.com/office/drawing/2014/main" id="{24F6B54A-C9F6-9BC9-45DB-4A8CDD8A803E}"/>
+              </a:ext>
+            </a:extLst>
+          </p:cNvPr>
+          <p:cNvGrpSpPr/>
+          <p:nvPr/>
+        </p:nvGrpSpPr>
+        <p:grpSpPr>
+          <a:xfrm>
+            <a:off x="1823837" y="1979047"/>
+            <a:ext cx="20736326" cy="10730521"/>
+            <a:chOff x="1882153" y="4135605"/>
+            <a:chExt cx="9378029" cy="4104362"/>
+          </a:xfrm>
+        </p:grpSpPr>
+        <p:pic>
+          <p:nvPicPr>
+            <p:cNvPr id="11" name="Picture 10" descr="A line of text with black text&#10;&#10;AI-generated content may be incorrect.">
+              <a:extLst>
+                <a:ext uri="{FF2B5EF4-FFF2-40B4-BE49-F238E27FC236}">
+                  <a16:creationId xmlns:a16="http://schemas.microsoft.com/office/drawing/2014/main" id="{C0999A8D-2288-0896-B121-801376B87ECB}"/>
+                </a:ext>
+              </a:extLst>
+            </p:cNvPr>
+            <p:cNvPicPr>
+              <a:picLocks noChangeAspect="1"/>
+            </p:cNvPicPr>
+            <p:nvPr/>
+          </p:nvPicPr>
+          <p:blipFill>
+            <a:blip r:embed="rId2"/>
+            <a:srcRect t="25762" b="30472"/>
+            <a:stretch/>
+          </p:blipFill>
+          <p:spPr>
+            <a:xfrm>
+              <a:off x="1882153" y="4135605"/>
+              <a:ext cx="9378029" cy="4104362"/>
+            </a:xfrm>
+            <a:prstGeom prst="rect">
+              <a:avLst/>
+            </a:prstGeom>
+          </p:spPr>
+        </p:pic>
+        <p:sp>
+          <p:nvSpPr>
+            <p:cNvPr id="20" name="Rounded Rectangle 19">
+              <a:extLst>
+                <a:ext uri="{FF2B5EF4-FFF2-40B4-BE49-F238E27FC236}">
+                  <a16:creationId xmlns:a16="http://schemas.microsoft.com/office/drawing/2014/main" id="{69ABF5C8-86BC-9D13-425B-66A9D4CBDEEE}"/>
+                </a:ext>
+              </a:extLst>
+            </p:cNvPr>
+            <p:cNvSpPr/>
+            <p:nvPr/>
+          </p:nvSpPr>
+          <p:spPr>
+            <a:xfrm>
+              <a:off x="9490577" y="4135605"/>
+              <a:ext cx="984918" cy="872723"/>
+            </a:xfrm>
+            <a:prstGeom prst="roundRect">
+              <a:avLst/>
+            </a:prstGeom>
+            <a:solidFill>
+              <a:schemeClr val="bg1"/>
+            </a:solidFill>
+            <a:ln>
+              <a:noFill/>
+            </a:ln>
+          </p:spPr>
+          <p:style>
+            <a:lnRef idx="0">
+              <a:scrgbClr r="0" g="0" b="0"/>
+            </a:lnRef>
+            <a:fillRef idx="0">
+              <a:scrgbClr r="0" g="0" b="0"/>
+            </a:fillRef>
+            <a:effectRef idx="0">
+              <a:scrgbClr r="0" g="0" b="0"/>
+            </a:effectRef>
+            <a:fontRef idx="minor">
+              <a:schemeClr val="lt1"/>
+            </a:fontRef>
+          </p:style>
+          <p:txBody>
+            <a:bodyPr rtlCol="0" anchor="ctr"/>
+            <a:lstStyle/>
+            <a:p>
+              <a:pPr algn="ctr"/>
+              <a:endParaRPr lang="en-US"/>
+            </a:p>
+          </p:txBody>
+        </p:sp>
+        <p:sp>
+          <p:nvSpPr>
+            <p:cNvPr id="22" name="TextBox 21">
+              <a:extLst>
+                <a:ext uri="{FF2B5EF4-FFF2-40B4-BE49-F238E27FC236}">
+                  <a16:creationId xmlns:a16="http://schemas.microsoft.com/office/drawing/2014/main" id="{90552561-B453-F46F-0909-5A20388D17AF}"/>
+                </a:ext>
+              </a:extLst>
+            </p:cNvPr>
+            <p:cNvSpPr txBox="1"/>
+            <p:nvPr/>
+          </p:nvSpPr>
+          <p:spPr>
+            <a:xfrm>
+              <a:off x="9296514" y="4345592"/>
+              <a:ext cx="1685730" cy="623931"/>
+            </a:xfrm>
+            <a:prstGeom prst="rect">
+              <a:avLst/>
+            </a:prstGeom>
+            <a:noFill/>
+          </p:spPr>
+          <p:txBody>
+            <a:bodyPr wrap="square" rtlCol="0">
+              <a:spAutoFit/>
+            </a:bodyPr>
+            <a:lstStyle/>
+            <a:p>
+              <a:r>
+                <a:rPr lang="en-US" sz="10000" dirty="0">
+                  <a:solidFill>
+                    <a:schemeClr val="tx1"/>
+                  </a:solidFill>
+                  <a:latin typeface="+mj-lt"/>
+                </a:rPr>
+                <a:t>&lt; -1</a:t>
+              </a:r>
+            </a:p>
+          </p:txBody>
+        </p:sp>
+        <p:sp>
+          <p:nvSpPr>
+            <p:cNvPr id="23" name="Rounded Rectangle 22">
+              <a:extLst>
+                <a:ext uri="{FF2B5EF4-FFF2-40B4-BE49-F238E27FC236}">
+                  <a16:creationId xmlns:a16="http://schemas.microsoft.com/office/drawing/2014/main" id="{20C1CFE3-5DD1-CC51-0205-4169E8B53487}"/>
+                </a:ext>
+              </a:extLst>
+            </p:cNvPr>
+            <p:cNvSpPr/>
+            <p:nvPr/>
+          </p:nvSpPr>
+          <p:spPr>
+            <a:xfrm>
+              <a:off x="3792669" y="4247979"/>
+              <a:ext cx="984918" cy="872723"/>
+            </a:xfrm>
+            <a:prstGeom prst="roundRect">
+              <a:avLst/>
+            </a:prstGeom>
+            <a:solidFill>
+              <a:schemeClr val="bg1"/>
+            </a:solidFill>
+            <a:ln>
+              <a:noFill/>
+            </a:ln>
+          </p:spPr>
+          <p:style>
+            <a:lnRef idx="0">
+              <a:scrgbClr r="0" g="0" b="0"/>
+            </a:lnRef>
+            <a:fillRef idx="0">
+              <a:scrgbClr r="0" g="0" b="0"/>
+            </a:fillRef>
+            <a:effectRef idx="0">
+              <a:scrgbClr r="0" g="0" b="0"/>
+            </a:effectRef>
+            <a:fontRef idx="minor">
+              <a:schemeClr val="lt1"/>
+            </a:fontRef>
+          </p:style>
+          <p:txBody>
+            <a:bodyPr rtlCol="0" anchor="ctr"/>
+            <a:lstStyle/>
+            <a:p>
+              <a:pPr algn="ctr"/>
+              <a:endParaRPr lang="en-US"/>
+            </a:p>
+          </p:txBody>
+        </p:sp>
+        <p:sp>
+          <p:nvSpPr>
+            <p:cNvPr id="26" name="TextBox 25">
+              <a:extLst>
+                <a:ext uri="{FF2B5EF4-FFF2-40B4-BE49-F238E27FC236}">
+                  <a16:creationId xmlns:a16="http://schemas.microsoft.com/office/drawing/2014/main" id="{8C83B5CD-90A8-24FB-C2F2-8D003E04F25D}"/>
+                </a:ext>
+              </a:extLst>
+            </p:cNvPr>
+            <p:cNvSpPr txBox="1"/>
+            <p:nvPr/>
+          </p:nvSpPr>
+          <p:spPr>
+            <a:xfrm>
+              <a:off x="3902003" y="4247979"/>
+              <a:ext cx="1139757" cy="741653"/>
+            </a:xfrm>
+            <a:prstGeom prst="rect">
+              <a:avLst/>
+            </a:prstGeom>
+            <a:noFill/>
+          </p:spPr>
+          <p:txBody>
+            <a:bodyPr wrap="square" rtlCol="0">
+              <a:spAutoFit/>
+            </a:bodyPr>
+            <a:lstStyle/>
+            <a:p>
+              <a:r>
+                <a:rPr lang="en-US" sz="12000" dirty="0">
+                  <a:solidFill>
+                    <a:schemeClr val="tx1"/>
+                  </a:solidFill>
+                  <a:latin typeface="+mj-lt"/>
+                </a:rPr>
+                <a:t>1</a:t>
+              </a:r>
+            </a:p>
+          </p:txBody>
+        </p:sp>
+        <p:sp>
+          <p:nvSpPr>
+            <p:cNvPr id="27" name="TextBox 26">
+              <a:extLst>
+                <a:ext uri="{FF2B5EF4-FFF2-40B4-BE49-F238E27FC236}">
+                  <a16:creationId xmlns:a16="http://schemas.microsoft.com/office/drawing/2014/main" id="{F1029899-7AD5-0B1F-B019-CC9307509A56}"/>
+                </a:ext>
+              </a:extLst>
+            </p:cNvPr>
+            <p:cNvSpPr txBox="1"/>
+            <p:nvPr/>
+          </p:nvSpPr>
+          <p:spPr>
+            <a:xfrm>
+              <a:off x="2267533" y="4236361"/>
+              <a:ext cx="1139757" cy="741653"/>
+            </a:xfrm>
+            <a:prstGeom prst="rect">
+              <a:avLst/>
+            </a:prstGeom>
+            <a:noFill/>
+          </p:spPr>
+          <p:txBody>
+            <a:bodyPr wrap="square" rtlCol="0">
+              <a:spAutoFit/>
+            </a:bodyPr>
+            <a:lstStyle/>
+            <a:p>
+              <a:r>
+                <a:rPr lang="en-US" sz="12000">
+                  <a:solidFill>
+                    <a:schemeClr val="tx1"/>
+                  </a:solidFill>
+                  <a:latin typeface="+mj-lt"/>
+                </a:rPr>
+                <a:t>&gt; 1</a:t>
+              </a:r>
+            </a:p>
+          </p:txBody>
+        </p:sp>
+      </p:grpSp>
+    </p:spTree>
+    <p:extLst>
+      <p:ext uri="{BB962C8B-B14F-4D97-AF65-F5344CB8AC3E}">
+        <p14:creationId xmlns:p14="http://schemas.microsoft.com/office/powerpoint/2010/main" val="2791662657"/>
+      </p:ext>
+    </p:extLst>
+  </p:cSld>
+  <p:clrMapOvr>
+    <a:masterClrMapping/>
+  </p:clrMapOvr>
+</p:sld>
+</file>
+
+<file path=ppt/slides/slide6.xml><?xml version="1.0" encoding="utf-8"?>
+<p:sld xmlns:a="http://schemas.openxmlformats.org/drawingml/2006/main" xmlns:r="http://schemas.openxmlformats.org/officeDocument/2006/relationships" xmlns:p="http://schemas.openxmlformats.org/presentationml/2006/main">
+  <p:cSld>
+    <p:spTree>
+      <p:nvGrpSpPr>
+        <p:cNvPr id="1" name="">
+          <a:extLst>
+            <a:ext uri="{FF2B5EF4-FFF2-40B4-BE49-F238E27FC236}">
               <a16:creationId xmlns:a16="http://schemas.microsoft.com/office/drawing/2014/main" id="{612D390E-79BF-93B9-A2F1-4B8C6B368F2F}"/>
             </a:ext>
           </a:extLst>
@@ -15011,7 +17654,7 @@
             <a:fld id="{86CB4B4D-7CA3-9044-876B-883B54F8677D}" type="slidenum">
               <a:rPr lang="en-US" smtClean="0"/>
               <a:pPr/>
-              <a:t>5</a:t>
+              <a:t>6</a:t>
             </a:fld>
             <a:endParaRPr lang="en-US"/>
           </a:p>
@@ -15353,36 +17996,36 @@
                     </a:lstStyle>
                     <a:p>
                       <a:r>
-                        <a:rPr lang="en-US" sz="2500">
+                        <a:rPr lang="en-US" sz="2500" dirty="0">
                           <a:latin typeface="Aptos" panose="020B0004020202020204" pitchFamily="34" charset="0"/>
                         </a:rPr>
                         <a:t>Most AI tech stock betas exhibit a value between </a:t>
                       </a:r>
                       <a:r>
-                        <a:rPr lang="en-US" sz="2500" b="1">
+                        <a:rPr lang="en-US" sz="2500" b="1" dirty="0">
                           <a:latin typeface="Aptos" panose="020B0004020202020204" pitchFamily="34" charset="0"/>
                         </a:rPr>
                         <a:t>1.5 to 2.5 </a:t>
                       </a:r>
                       <a:r>
-                        <a:rPr lang="en-US" sz="2500">
+                        <a:rPr lang="en-US" sz="2500" dirty="0">
                           <a:latin typeface="Aptos" panose="020B0004020202020204" pitchFamily="34" charset="0"/>
                         </a:rPr>
                         <a:t>(smaller firms may exhibit around </a:t>
                       </a:r>
                       <a:r>
-                        <a:rPr lang="en-US" sz="2500" b="1">
+                        <a:rPr lang="en-US" sz="2500" b="1" dirty="0">
                           <a:latin typeface="Aptos" panose="020B0004020202020204" pitchFamily="34" charset="0"/>
                         </a:rPr>
                         <a:t>3</a:t>
                       </a:r>
                       <a:r>
-                        <a:rPr lang="en-US" sz="2500">
+                        <a:rPr lang="en-US" sz="2500" dirty="0">
                           <a:latin typeface="Aptos" panose="020B0004020202020204" pitchFamily="34" charset="0"/>
                         </a:rPr>
                         <a:t> which are much higher price swings than the market average</a:t>
                       </a:r>
-                      <a:endParaRPr lang="en-US" sz="2500" b="1">
+                      <a:endParaRPr lang="en-US" sz="2500" b="1" dirty="0">
                         <a:latin typeface="Aptos" panose="020B0004020202020204" pitchFamily="34" charset="0"/>
                       </a:endParaRPr>
                     </a:p>
@@ -15546,7 +18189,7 @@
                     <a:lstStyle/>
                     <a:p>
                       <a:r>
-                        <a:rPr lang="en-US" sz="2500" b="0"/>
+                        <a:rPr lang="en-US" sz="2500" b="0" dirty="0"/>
                         <a:t>Normally balanced out with other stocks within a portfolio with lower beta</a:t>
                       </a:r>
                     </a:p>
@@ -15703,7 +18346,7 @@
                       <a:pPr lvl="0" algn="r">
                         <a:buNone/>
                       </a:pPr>
-                      <a:endParaRPr lang="en-US" sz="3000" b="0"/>
+                      <a:endParaRPr lang="en-US" sz="3000" b="0" dirty="0"/>
                     </a:p>
                   </a:txBody>
                   <a:tcPr marL="182880" marR="182880" marT="91440" marB="91440" anchor="ctr">
@@ -15875,121 +18518,121 @@
                     </a:lstStyle>
                     <a:p>
                       <a:r>
-                        <a:rPr lang="en-US" sz="2500" b="0">
+                        <a:rPr lang="en-US" sz="2500" b="0" dirty="0">
                           <a:latin typeface="Aptos" panose="020B0004020202020204" pitchFamily="34" charset="0"/>
                         </a:rPr>
                         <a:t>Utilized in </a:t>
                       </a:r>
                       <a:r>
-                        <a:rPr lang="en-US" sz="2500" b="1">
+                        <a:rPr lang="en-US" sz="2500" b="1" dirty="0">
                           <a:latin typeface="Aptos" panose="020B0004020202020204" pitchFamily="34" charset="0"/>
                         </a:rPr>
                         <a:t>CAPM</a:t>
                       </a:r>
                       <a:r>
-                        <a:rPr lang="en-US" sz="2500" b="0">
+                        <a:rPr lang="en-US" sz="2500" b="0" dirty="0">
                           <a:latin typeface="Aptos" panose="020B0004020202020204" pitchFamily="34" charset="0"/>
                         </a:rPr>
                         <a:t> (</a:t>
                       </a:r>
                       <a:r>
-                        <a:rPr lang="en-US" sz="2500" b="1">
+                        <a:rPr lang="en-US" sz="2500" b="1" dirty="0">
                           <a:latin typeface="Aptos" panose="020B0004020202020204" pitchFamily="34" charset="0"/>
                         </a:rPr>
                         <a:t>C</a:t>
                       </a:r>
                       <a:r>
-                        <a:rPr lang="en-US" sz="2500" b="0">
+                        <a:rPr lang="en-US" sz="2500" b="0" dirty="0">
                           <a:latin typeface="Aptos" panose="020B0004020202020204" pitchFamily="34" charset="0"/>
                         </a:rPr>
                         <a:t>apital </a:t>
                       </a:r>
                       <a:r>
-                        <a:rPr lang="en-US" sz="2500" b="1">
+                        <a:rPr lang="en-US" sz="2500" b="1" dirty="0">
                           <a:latin typeface="Aptos" panose="020B0004020202020204" pitchFamily="34" charset="0"/>
                         </a:rPr>
                         <a:t>A</a:t>
                       </a:r>
                       <a:r>
-                        <a:rPr lang="en-US" sz="2500" b="0">
+                        <a:rPr lang="en-US" sz="2500" b="0" dirty="0">
                           <a:latin typeface="Aptos" panose="020B0004020202020204" pitchFamily="34" charset="0"/>
                         </a:rPr>
                         <a:t>sset </a:t>
                       </a:r>
                       <a:r>
-                        <a:rPr lang="en-US" sz="2500" b="1">
+                        <a:rPr lang="en-US" sz="2500" b="1" dirty="0">
                           <a:latin typeface="Aptos" panose="020B0004020202020204" pitchFamily="34" charset="0"/>
                         </a:rPr>
                         <a:t>P</a:t>
                       </a:r>
                       <a:r>
-                        <a:rPr lang="en-US" sz="2500" b="0">
+                        <a:rPr lang="en-US" sz="2500" b="0" dirty="0">
                           <a:latin typeface="Aptos" panose="020B0004020202020204" pitchFamily="34" charset="0"/>
                         </a:rPr>
                         <a:t>ricing </a:t>
                       </a:r>
                       <a:r>
-                        <a:rPr lang="en-US" sz="2500" b="1">
+                        <a:rPr lang="en-US" sz="2500" b="1" dirty="0">
                           <a:latin typeface="Aptos" panose="020B0004020202020204" pitchFamily="34" charset="0"/>
                         </a:rPr>
                         <a:t>M</a:t>
                       </a:r>
                       <a:r>
-                        <a:rPr lang="en-US" sz="2500" b="0">
+                        <a:rPr lang="en-US" sz="2500" b="0" dirty="0">
                           <a:latin typeface="Aptos" panose="020B0004020202020204" pitchFamily="34" charset="0"/>
                         </a:rPr>
                         <a:t>odel) to estimate expected returns on a stock which compares stock </a:t>
                       </a:r>
                       <a:r>
-                        <a:rPr lang="en-US" sz="2500" b="1">
+                        <a:rPr lang="en-US" sz="2500" b="1" dirty="0">
                           <a:latin typeface="Aptos" panose="020B0004020202020204" pitchFamily="34" charset="0"/>
                         </a:rPr>
                         <a:t>beta</a:t>
                       </a:r>
                       <a:r>
-                        <a:rPr lang="en-US" sz="2500" b="0">
+                        <a:rPr lang="en-US" sz="2500" b="0" dirty="0">
                           <a:latin typeface="Aptos" panose="020B0004020202020204" pitchFamily="34" charset="0"/>
                         </a:rPr>
                         <a:t> to a return on risk-free (</a:t>
                       </a:r>
                       <a:r>
-                        <a:rPr lang="en-US" sz="2500" b="1">
+                        <a:rPr lang="en-US" sz="2500" b="1" dirty="0">
                           <a:latin typeface="Aptos" panose="020B0004020202020204" pitchFamily="34" charset="0"/>
                         </a:rPr>
                         <a:t>zero beta</a:t>
                       </a:r>
                       <a:r>
-                        <a:rPr lang="en-US" sz="2500" b="0">
+                        <a:rPr lang="en-US" sz="2500" b="0" dirty="0">
                           <a:latin typeface="Aptos" panose="020B0004020202020204" pitchFamily="34" charset="0"/>
                         </a:rPr>
                         <a:t>) asset, </a:t>
                       </a:r>
                       <a:r>
-                        <a:rPr lang="en-US" sz="2500" b="1">
+                        <a:rPr lang="en-US" sz="2500" b="1" dirty="0">
                           <a:latin typeface="Aptos" panose="020B0004020202020204" pitchFamily="34" charset="0"/>
                         </a:rPr>
                         <a:t>expected return</a:t>
                       </a:r>
                       <a:r>
-                        <a:rPr lang="en-US" sz="2500" b="0">
+                        <a:rPr lang="en-US" sz="2500" b="0" dirty="0">
                           <a:latin typeface="Aptos" panose="020B0004020202020204" pitchFamily="34" charset="0"/>
                         </a:rPr>
                         <a:t> on the market, and </a:t>
                       </a:r>
                       <a:r>
-                        <a:rPr lang="en-US" sz="2500" b="1">
+                        <a:rPr lang="en-US" sz="2500" b="1" dirty="0">
                           <a:latin typeface="Aptos" panose="020B0004020202020204" pitchFamily="34" charset="0"/>
                         </a:rPr>
                         <a:t>additional return</a:t>
                       </a:r>
                       <a:r>
-                        <a:rPr lang="en-US" sz="2500" b="0">
+                        <a:rPr lang="en-US" sz="2500" b="0" dirty="0">
                           <a:latin typeface="Aptos" panose="020B0004020202020204" pitchFamily="34" charset="0"/>
                         </a:rPr>
                         <a:t> from the market over the risk-free rate. Assuming </a:t>
                       </a:r>
                       <a:r>
-                        <a:rPr lang="en-US" sz="2500" b="1">
+                        <a:rPr lang="en-US" sz="2500" b="1" dirty="0">
                           <a:latin typeface="Aptos" panose="020B0004020202020204" pitchFamily="34" charset="0"/>
                         </a:rPr>
                         <a:t>alpha = 0</a:t>
@@ -16524,7 +19167,7 @@
                       <a:pPr lvl="0" algn="r">
                         <a:buNone/>
                       </a:pPr>
-                      <a:endParaRPr lang="en-US" sz="3000" b="0"/>
+                      <a:endParaRPr lang="en-US" sz="3000" b="0" dirty="0"/>
                     </a:p>
                   </a:txBody>
                   <a:tcPr marL="182880" marR="182880" marT="91440" marB="91440" anchor="ctr">
@@ -16731,12 +19374,12 @@
                     </a:lstStyle>
                     <a:p>
                       <a:r>
-                        <a:rPr lang="en-US" sz="2500">
+                        <a:rPr lang="en-US" sz="2500" dirty="0">
                           <a:latin typeface="Aptos" panose="020B0004020202020204" pitchFamily="34" charset="0"/>
                         </a:rPr>
                         <a:t>Beta is a historic measurement and assumes that past relationships between a stock and the market will persist</a:t>
                       </a:r>
-                      <a:endParaRPr lang="en-US" sz="2500" b="1">
+                      <a:endParaRPr lang="en-US" sz="2500" b="1" dirty="0">
                         <a:latin typeface="Aptos" panose="020B0004020202020204" pitchFamily="34" charset="0"/>
                       </a:endParaRPr>
                     </a:p>
@@ -16900,7 +19543,7 @@
                     <a:lstStyle/>
                     <a:p>
                       <a:r>
-                        <a:rPr lang="en-US" sz="2500" b="0"/>
+                        <a:rPr lang="en-US" sz="2500" b="0" dirty="0"/>
                         <a:t>Often change over time and are sensitive to the time frame (1 year vs 1 hour) especially for tech stocks</a:t>
                       </a:r>
                     </a:p>
@@ -17057,7 +19700,7 @@
                       <a:pPr lvl="0" algn="r">
                         <a:buNone/>
                       </a:pPr>
-                      <a:endParaRPr lang="en-US" sz="3000" b="0"/>
+                      <a:endParaRPr lang="en-US" sz="3000" b="0" dirty="0"/>
                     </a:p>
                   </a:txBody>
                   <a:tcPr marL="182880" marR="182880" marT="91440" marB="91440" anchor="ctr">
@@ -17480,7 +20123,7 @@
 </p:sld>
 </file>
 
-<file path=ppt/slides/slide6.xml><?xml version="1.0" encoding="utf-8"?>
+<file path=ppt/slides/slide7.xml><?xml version="1.0" encoding="utf-8"?>
 <p:sld xmlns:a="http://schemas.openxmlformats.org/drawingml/2006/main" xmlns:r="http://schemas.openxmlformats.org/officeDocument/2006/relationships" xmlns:p="http://schemas.openxmlformats.org/presentationml/2006/main">
   <p:cSld>
     <p:spTree>
@@ -17515,7 +20158,7 @@
         </p:nvSpPr>
         <p:spPr>
           <a:xfrm>
-            <a:off x="914399" y="1143000"/>
+            <a:off x="755151" y="1442041"/>
             <a:ext cx="21936075" cy="1371600"/>
           </a:xfrm>
         </p:spPr>
@@ -17552,7 +20195,7 @@
         </p:nvSpPr>
         <p:spPr>
           <a:xfrm>
-            <a:off x="908074" y="3090503"/>
+            <a:off x="748826" y="3389544"/>
             <a:ext cx="22481241" cy="9133014"/>
           </a:xfrm>
         </p:spPr>
@@ -17573,7 +20216,7 @@
                 <a:latin typeface="Inter"/>
                 <a:cs typeface="Poppins"/>
               </a:rPr>
-              <a:t>Nvidia ($NVDA): </a:t>
+              <a:t>Nvidia (NVDA): </a:t>
             </a:r>
             <a:r>
               <a:rPr lang="en-US">
@@ -17598,7 +20241,7 @@
                 <a:latin typeface="Inter"/>
                 <a:cs typeface="Poppins"/>
               </a:rPr>
-              <a:t>Palantir ($PLTR): </a:t>
+              <a:t>Palantir (PLTR): </a:t>
             </a:r>
             <a:r>
               <a:rPr lang="en-US">
@@ -17623,7 +20266,7 @@
                 <a:latin typeface="Inter"/>
                 <a:cs typeface="Poppins"/>
               </a:rPr>
-              <a:t>Taiwan Semiconductor Manufacturing ($TSM): </a:t>
+              <a:t>Taiwan Semiconductor Manufacturing (TSM): </a:t>
             </a:r>
             <a:r>
               <a:rPr lang="en-US">
@@ -17648,7 +20291,7 @@
                 <a:latin typeface="Inter"/>
                 <a:cs typeface="Poppins"/>
               </a:rPr>
-              <a:t>Google ($GOOG): </a:t>
+              <a:t>Google (GOOG): </a:t>
             </a:r>
             <a:r>
               <a:rPr lang="en-US">
@@ -17673,7 +20316,7 @@
                 <a:latin typeface="Inter"/>
                 <a:cs typeface="Poppins"/>
               </a:rPr>
-              <a:t>Microsoft ($MSFT): </a:t>
+              <a:t>Microsoft (MSFT): </a:t>
             </a:r>
             <a:r>
               <a:rPr lang="en-US">
@@ -17707,7 +20350,12 @@
             <p:ph type="body" sz="quarter" idx="13"/>
           </p:nvPr>
         </p:nvSpPr>
-        <p:spPr/>
+        <p:spPr>
+          <a:xfrm>
+            <a:off x="755151" y="984840"/>
+            <a:ext cx="6741459" cy="457200"/>
+          </a:xfrm>
+        </p:spPr>
         <p:txBody>
           <a:bodyPr/>
           <a:lstStyle/>
@@ -17743,7 +20391,7 @@
             <a:fld id="{86CB4B4D-7CA3-9044-876B-883B54F8677D}" type="slidenum">
               <a:rPr lang="en-US" smtClean="0"/>
               <a:pPr/>
-              <a:t>6</a:t>
+              <a:t>7</a:t>
             </a:fld>
             <a:endParaRPr lang="en-US"/>
           </a:p>
@@ -17763,7 +20411,7 @@
         </p:nvSpPr>
         <p:spPr>
           <a:xfrm>
-            <a:off x="13747180" y="6344331"/>
+            <a:off x="13352063" y="7367555"/>
             <a:ext cx="9801426" cy="5632311"/>
           </a:xfrm>
           <a:prstGeom prst="rect">
@@ -17941,8 +20589,8 @@
         </p:blipFill>
         <p:spPr>
           <a:xfrm>
-            <a:off x="15020104" y="687610"/>
-            <a:ext cx="8130988" cy="4670178"/>
+            <a:off x="12501480" y="82938"/>
+            <a:ext cx="12111476" cy="6996665"/>
           </a:xfrm>
           <a:prstGeom prst="rect">
             <a:avLst/>
@@ -17972,7 +20620,7 @@
         </p:blipFill>
         <p:spPr>
           <a:xfrm>
-            <a:off x="908074" y="7113044"/>
+            <a:off x="748826" y="7777179"/>
             <a:ext cx="11399423" cy="5240430"/>
           </a:xfrm>
           <a:prstGeom prst="rect">
@@ -17994,7 +20642,7 @@
         </p:nvSpPr>
         <p:spPr>
           <a:xfrm>
-            <a:off x="908074" y="2514493"/>
+            <a:off x="748826" y="2813534"/>
             <a:ext cx="11399423" cy="522358"/>
           </a:xfrm>
           <a:prstGeom prst="rect">
@@ -18051,7 +20699,7 @@
         </p:nvSpPr>
         <p:spPr>
           <a:xfrm>
-            <a:off x="12876395" y="5967607"/>
+            <a:off x="12698892" y="7120295"/>
             <a:ext cx="11133533" cy="522358"/>
           </a:xfrm>
           <a:prstGeom prst="rect">
@@ -18107,7 +20755,7 @@
 </p:sld>
 </file>
 
-<file path=ppt/slides/slide7.xml><?xml version="1.0" encoding="utf-8"?>
+<file path=ppt/slides/slide8.xml><?xml version="1.0" encoding="utf-8"?>
 <p:sld xmlns:a="http://schemas.openxmlformats.org/drawingml/2006/main" xmlns:r="http://schemas.openxmlformats.org/officeDocument/2006/relationships" xmlns:p="http://schemas.openxmlformats.org/presentationml/2006/main">
   <p:cSld>
     <p:spTree>
@@ -18176,7 +20824,7 @@
             <a:fld id="{86CB4B4D-7CA3-9044-876B-883B54F8677D}" type="slidenum">
               <a:rPr lang="en-US" smtClean="0"/>
               <a:pPr/>
-              <a:t>7</a:t>
+              <a:t>8</a:t>
             </a:fld>
             <a:endParaRPr lang="en-US"/>
           </a:p>
@@ -18247,8 +20895,8 @@
         </p:blipFill>
         <p:spPr>
           <a:xfrm>
-            <a:off x="914399" y="3805231"/>
-            <a:ext cx="10869560" cy="7609012"/>
+            <a:off x="533400" y="3596295"/>
+            <a:ext cx="11766751" cy="8186657"/>
           </a:xfrm>
           <a:prstGeom prst="rect">
             <a:avLst/>
@@ -18286,8 +20934,8 @@
         </p:blipFill>
         <p:spPr>
           <a:xfrm>
-            <a:off x="12190150" y="3673357"/>
-            <a:ext cx="11279451" cy="7953729"/>
+            <a:off x="11907473" y="3611906"/>
+            <a:ext cx="11549838" cy="8199534"/>
           </a:xfrm>
         </p:spPr>
       </p:pic>
@@ -18361,7 +21009,7 @@
 </p:sld>
 </file>
 
-<file path=ppt/slides/slide8.xml><?xml version="1.0" encoding="utf-8"?>
+<file path=ppt/slides/slide9.xml><?xml version="1.0" encoding="utf-8"?>
 <p:sld xmlns:a="http://schemas.openxmlformats.org/drawingml/2006/main" xmlns:r="http://schemas.openxmlformats.org/officeDocument/2006/relationships" xmlns:p="http://schemas.openxmlformats.org/presentationml/2006/main">
   <p:cSld>
     <p:spTree>
@@ -18407,7 +21055,7 @@
           <a:p>
             <a:r>
               <a:rPr lang="en-US"/>
-              <a:t>Beta of AI Tech Stocks</a:t>
+              <a:t>BETA OF AI TECH STOCKS</a:t>
             </a:r>
           </a:p>
         </p:txBody>
@@ -18436,7 +21084,7 @@
             <a:fld id="{86CB4B4D-7CA3-9044-876B-883B54F8677D}" type="slidenum">
               <a:rPr lang="en-US" smtClean="0"/>
               <a:pPr/>
-              <a:t>8</a:t>
+              <a:t>9</a:t>
             </a:fld>
             <a:endParaRPr lang="en-US"/>
           </a:p>
@@ -18569,1652 +21217,6 @@
     <p:extLst>
       <p:ext uri="{BB962C8B-B14F-4D97-AF65-F5344CB8AC3E}">
         <p14:creationId xmlns:p14="http://schemas.microsoft.com/office/powerpoint/2010/main" val="1129092985"/>
-      </p:ext>
-    </p:extLst>
-  </p:cSld>
-  <p:clrMapOvr>
-    <a:masterClrMapping/>
-  </p:clrMapOvr>
-</p:sld>
-</file>
-
-<file path=ppt/slides/slide9.xml><?xml version="1.0" encoding="utf-8"?>
-<p:sld xmlns:a="http://schemas.openxmlformats.org/drawingml/2006/main" xmlns:r="http://schemas.openxmlformats.org/officeDocument/2006/relationships" xmlns:p="http://schemas.openxmlformats.org/presentationml/2006/main">
-  <p:cSld>
-    <p:spTree>
-      <p:nvGrpSpPr>
-        <p:cNvPr id="1" name=""/>
-        <p:cNvGrpSpPr/>
-        <p:nvPr/>
-      </p:nvGrpSpPr>
-      <p:grpSpPr>
-        <a:xfrm>
-          <a:off x="0" y="0"/>
-          <a:ext cx="0" cy="0"/>
-          <a:chOff x="0" y="0"/>
-          <a:chExt cx="0" cy="0"/>
-        </a:xfrm>
-      </p:grpSpPr>
-      <p:sp>
-        <p:nvSpPr>
-          <p:cNvPr id="4" name="Text Placeholder 3">
-            <a:extLst>
-              <a:ext uri="{FF2B5EF4-FFF2-40B4-BE49-F238E27FC236}">
-                <a16:creationId xmlns:a16="http://schemas.microsoft.com/office/drawing/2014/main" id="{D60A0B70-A009-7213-459A-4ECAD848FCDA}"/>
-              </a:ext>
-            </a:extLst>
-          </p:cNvPr>
-          <p:cNvSpPr>
-            <a:spLocks noGrp="1"/>
-          </p:cNvSpPr>
-          <p:nvPr>
-            <p:ph type="body" sz="quarter" idx="13"/>
-          </p:nvPr>
-        </p:nvSpPr>
-        <p:spPr/>
-        <p:txBody>
-          <a:bodyPr/>
-          <a:lstStyle/>
-          <a:p>
-            <a:r>
-              <a:rPr lang="en-US"/>
-              <a:t>BETA OF AI TECH STOCKS</a:t>
-            </a:r>
-          </a:p>
-        </p:txBody>
-      </p:sp>
-      <p:sp>
-        <p:nvSpPr>
-          <p:cNvPr id="5" name="Slide Number Placeholder 4">
-            <a:extLst>
-              <a:ext uri="{FF2B5EF4-FFF2-40B4-BE49-F238E27FC236}">
-                <a16:creationId xmlns:a16="http://schemas.microsoft.com/office/drawing/2014/main" id="{96F5D29B-FAF8-6446-6738-4CAD6B23007F}"/>
-              </a:ext>
-            </a:extLst>
-          </p:cNvPr>
-          <p:cNvSpPr>
-            <a:spLocks noGrp="1"/>
-          </p:cNvSpPr>
-          <p:nvPr>
-            <p:ph type="sldNum" sz="quarter" idx="2"/>
-          </p:nvPr>
-        </p:nvSpPr>
-        <p:spPr>
-          <a:xfrm>
-            <a:off x="11869819" y="12864743"/>
-            <a:ext cx="631660" cy="409277"/>
-          </a:xfrm>
-        </p:spPr>
-        <p:txBody>
-          <a:bodyPr/>
-          <a:lstStyle/>
-          <a:p>
-            <a:fld id="{86CB4B4D-7CA3-9044-876B-883B54F8677D}" type="slidenum">
-              <a:rPr lang="en-US" smtClean="0"/>
-              <a:pPr/>
-              <a:t>9</a:t>
-            </a:fld>
-            <a:endParaRPr lang="en-US"/>
-          </a:p>
-        </p:txBody>
-      </p:sp>
-      <p:sp>
-        <p:nvSpPr>
-          <p:cNvPr id="6" name="Title 1">
-            <a:extLst>
-              <a:ext uri="{FF2B5EF4-FFF2-40B4-BE49-F238E27FC236}">
-                <a16:creationId xmlns:a16="http://schemas.microsoft.com/office/drawing/2014/main" id="{D2DED2EA-030F-CF86-2952-62E7B98E279D}"/>
-              </a:ext>
-            </a:extLst>
-          </p:cNvPr>
-          <p:cNvSpPr>
-            <a:spLocks noGrp="1"/>
-          </p:cNvSpPr>
-          <p:nvPr>
-            <p:ph type="title"/>
-          </p:nvPr>
-        </p:nvSpPr>
-        <p:spPr>
-          <a:xfrm>
-            <a:off x="914397" y="855759"/>
-            <a:ext cx="21031201" cy="1371600"/>
-          </a:xfrm>
-        </p:spPr>
-        <p:txBody>
-          <a:bodyPr>
-            <a:normAutofit/>
-          </a:bodyPr>
-          <a:lstStyle/>
-          <a:p>
-            <a:r>
-              <a:rPr lang="en-US">
-                <a:latin typeface="Inter"/>
-                <a:cs typeface="Poppins"/>
-              </a:rPr>
-              <a:t>Beta – In Action</a:t>
-            </a:r>
-          </a:p>
-        </p:txBody>
-      </p:sp>
-      <p:sp>
-        <p:nvSpPr>
-          <p:cNvPr id="7" name="Rectangle 6">
-            <a:extLst>
-              <a:ext uri="{FF2B5EF4-FFF2-40B4-BE49-F238E27FC236}">
-                <a16:creationId xmlns:a16="http://schemas.microsoft.com/office/drawing/2014/main" id="{9FE67CC8-5C5C-29CB-92D2-25499864A2E1}"/>
-              </a:ext>
-            </a:extLst>
-          </p:cNvPr>
-          <p:cNvSpPr/>
-          <p:nvPr/>
-        </p:nvSpPr>
-        <p:spPr>
-          <a:xfrm>
-            <a:off x="914397" y="2120592"/>
-            <a:ext cx="11133533" cy="522358"/>
-          </a:xfrm>
-          <a:prstGeom prst="rect">
-            <a:avLst/>
-          </a:prstGeom>
-          <a:solidFill>
-            <a:srgbClr val="0C1543"/>
-          </a:solidFill>
-          <a:ln>
-            <a:noFill/>
-          </a:ln>
-        </p:spPr>
-        <p:style>
-          <a:lnRef idx="2">
-            <a:schemeClr val="accent1">
-              <a:shade val="15000"/>
-            </a:schemeClr>
-          </a:lnRef>
-          <a:fillRef idx="1">
-            <a:schemeClr val="accent1"/>
-          </a:fillRef>
-          <a:effectRef idx="0">
-            <a:schemeClr val="accent1"/>
-          </a:effectRef>
-          <a:fontRef idx="minor">
-            <a:schemeClr val="lt1"/>
-          </a:fontRef>
-        </p:style>
-        <p:txBody>
-          <a:bodyPr rtlCol="0" anchor="ctr"/>
-          <a:lstStyle/>
-          <a:p>
-            <a:pPr algn="ctr"/>
-            <a:r>
-              <a:rPr lang="en-US" sz="3000">
-                <a:latin typeface="Inter" panose="02000503000000020004"/>
-              </a:rPr>
-              <a:t>How its Used</a:t>
-            </a:r>
-          </a:p>
-        </p:txBody>
-      </p:sp>
-      <p:sp>
-        <p:nvSpPr>
-          <p:cNvPr id="8" name="Rectangle 7">
-            <a:extLst>
-              <a:ext uri="{FF2B5EF4-FFF2-40B4-BE49-F238E27FC236}">
-                <a16:creationId xmlns:a16="http://schemas.microsoft.com/office/drawing/2014/main" id="{6F09893A-7594-0A42-D135-446A889A36D2}"/>
-              </a:ext>
-            </a:extLst>
-          </p:cNvPr>
-          <p:cNvSpPr/>
-          <p:nvPr/>
-        </p:nvSpPr>
-        <p:spPr>
-          <a:xfrm>
-            <a:off x="914397" y="7127075"/>
-            <a:ext cx="11133533" cy="522358"/>
-          </a:xfrm>
-          <a:prstGeom prst="rect">
-            <a:avLst/>
-          </a:prstGeom>
-          <a:solidFill>
-            <a:srgbClr val="0C1543"/>
-          </a:solidFill>
-          <a:ln>
-            <a:noFill/>
-          </a:ln>
-        </p:spPr>
-        <p:style>
-          <a:lnRef idx="2">
-            <a:schemeClr val="accent1">
-              <a:shade val="15000"/>
-            </a:schemeClr>
-          </a:lnRef>
-          <a:fillRef idx="1">
-            <a:schemeClr val="accent1"/>
-          </a:fillRef>
-          <a:effectRef idx="0">
-            <a:schemeClr val="accent1"/>
-          </a:effectRef>
-          <a:fontRef idx="minor">
-            <a:schemeClr val="lt1"/>
-          </a:fontRef>
-        </p:style>
-        <p:txBody>
-          <a:bodyPr rtlCol="0" anchor="ctr"/>
-          <a:lstStyle/>
-          <a:p>
-            <a:pPr algn="ctr"/>
-            <a:r>
-              <a:rPr lang="en-US" sz="3000">
-                <a:latin typeface="Inter" panose="02000503000000020004"/>
-              </a:rPr>
-              <a:t>What its Useful For</a:t>
-            </a:r>
-          </a:p>
-        </p:txBody>
-      </p:sp>
-      <p:sp>
-        <p:nvSpPr>
-          <p:cNvPr id="9" name="Rectangle 8">
-            <a:extLst>
-              <a:ext uri="{FF2B5EF4-FFF2-40B4-BE49-F238E27FC236}">
-                <a16:creationId xmlns:a16="http://schemas.microsoft.com/office/drawing/2014/main" id="{0864766B-22EC-C515-157F-4DD1EFAD3C1F}"/>
-              </a:ext>
-            </a:extLst>
-          </p:cNvPr>
-          <p:cNvSpPr/>
-          <p:nvPr/>
-        </p:nvSpPr>
-        <p:spPr>
-          <a:xfrm>
-            <a:off x="12336070" y="2120592"/>
-            <a:ext cx="11133533" cy="522358"/>
-          </a:xfrm>
-          <a:prstGeom prst="rect">
-            <a:avLst/>
-          </a:prstGeom>
-          <a:solidFill>
-            <a:srgbClr val="0C1543"/>
-          </a:solidFill>
-          <a:ln>
-            <a:noFill/>
-          </a:ln>
-        </p:spPr>
-        <p:style>
-          <a:lnRef idx="2">
-            <a:schemeClr val="accent1">
-              <a:shade val="15000"/>
-            </a:schemeClr>
-          </a:lnRef>
-          <a:fillRef idx="1">
-            <a:schemeClr val="accent1"/>
-          </a:fillRef>
-          <a:effectRef idx="0">
-            <a:schemeClr val="accent1"/>
-          </a:effectRef>
-          <a:fontRef idx="minor">
-            <a:schemeClr val="lt1"/>
-          </a:fontRef>
-        </p:style>
-        <p:txBody>
-          <a:bodyPr rtlCol="0" anchor="ctr"/>
-          <a:lstStyle/>
-          <a:p>
-            <a:pPr algn="ctr"/>
-            <a:r>
-              <a:rPr lang="en-US" sz="3000">
-                <a:latin typeface="Inter" panose="02000503000000020004"/>
-              </a:rPr>
-              <a:t>Other Risk-Predictor Indicators</a:t>
-            </a:r>
-          </a:p>
-        </p:txBody>
-      </p:sp>
-      <p:graphicFrame>
-        <p:nvGraphicFramePr>
-          <p:cNvPr id="15" name="Table 14">
-            <a:extLst>
-              <a:ext uri="{FF2B5EF4-FFF2-40B4-BE49-F238E27FC236}">
-                <a16:creationId xmlns:a16="http://schemas.microsoft.com/office/drawing/2014/main" id="{03738B03-90B0-3D94-9233-EE14278C0C29}"/>
-              </a:ext>
-            </a:extLst>
-          </p:cNvPr>
-          <p:cNvGraphicFramePr>
-            <a:graphicFrameLocks noGrp="1"/>
-          </p:cNvGraphicFramePr>
-          <p:nvPr>
-            <p:custDataLst>
-              <p:tags r:id="rId1"/>
-            </p:custDataLst>
-            <p:extLst>
-              <p:ext uri="{D42A27DB-BD31-4B8C-83A1-F6EECF244321}">
-                <p14:modId xmlns:p14="http://schemas.microsoft.com/office/powerpoint/2010/main" val="1486132197"/>
-              </p:ext>
-            </p:extLst>
-          </p:nvPr>
-        </p:nvGraphicFramePr>
-        <p:xfrm>
-          <a:off x="911110" y="7649433"/>
-          <a:ext cx="11136820" cy="5210810"/>
-        </p:xfrm>
-        <a:graphic>
-          <a:graphicData uri="http://schemas.openxmlformats.org/drawingml/2006/table">
-            <a:tbl>
-              <a:tblPr/>
-              <a:tblGrid>
-                <a:gridCol w="10737633">
-                  <a:extLst>
-                    <a:ext uri="{9D8B030D-6E8A-4147-A177-3AD203B41FA5}">
-                      <a16:colId xmlns:a16="http://schemas.microsoft.com/office/drawing/2014/main" val="296525212"/>
-                    </a:ext>
-                  </a:extLst>
-                </a:gridCol>
-                <a:gridCol w="399187">
-                  <a:extLst>
-                    <a:ext uri="{9D8B030D-6E8A-4147-A177-3AD203B41FA5}">
-                      <a16:colId xmlns:a16="http://schemas.microsoft.com/office/drawing/2014/main" val="386091632"/>
-                    </a:ext>
-                  </a:extLst>
-                </a:gridCol>
-              </a:tblGrid>
-              <a:tr h="1668425">
-                <a:tc>
-                  <a:txBody>
-                    <a:bodyPr/>
-                    <a:lstStyle>
-                      <a:lvl1pPr marL="0" algn="l" defTabSz="914400" rtl="0" eaLnBrk="1" latinLnBrk="0" hangingPunct="1">
-                        <a:defRPr sz="1800" kern="1200">
-                          <a:solidFill>
-                            <a:schemeClr val="dk1"/>
-                          </a:solidFill>
-                          <a:latin typeface="Arial" panose="020B0604020202020204"/>
-                        </a:defRPr>
-                      </a:lvl1pPr>
-                      <a:lvl2pPr marL="457200" algn="l" defTabSz="914400" rtl="0" eaLnBrk="1" latinLnBrk="0" hangingPunct="1">
-                        <a:defRPr sz="1800" kern="1200">
-                          <a:solidFill>
-                            <a:schemeClr val="dk1"/>
-                          </a:solidFill>
-                          <a:latin typeface="Arial" panose="020B0604020202020204"/>
-                        </a:defRPr>
-                      </a:lvl2pPr>
-                      <a:lvl3pPr marL="914400" algn="l" defTabSz="914400" rtl="0" eaLnBrk="1" latinLnBrk="0" hangingPunct="1">
-                        <a:defRPr sz="1800" kern="1200">
-                          <a:solidFill>
-                            <a:schemeClr val="dk1"/>
-                          </a:solidFill>
-                          <a:latin typeface="Arial" panose="020B0604020202020204"/>
-                        </a:defRPr>
-                      </a:lvl3pPr>
-                      <a:lvl4pPr marL="1371600" algn="l" defTabSz="914400" rtl="0" eaLnBrk="1" latinLnBrk="0" hangingPunct="1">
-                        <a:defRPr sz="1800" kern="1200">
-                          <a:solidFill>
-                            <a:schemeClr val="dk1"/>
-                          </a:solidFill>
-                          <a:latin typeface="Arial" panose="020B0604020202020204"/>
-                        </a:defRPr>
-                      </a:lvl4pPr>
-                      <a:lvl5pPr marL="1828800" algn="l" defTabSz="914400" rtl="0" eaLnBrk="1" latinLnBrk="0" hangingPunct="1">
-                        <a:defRPr sz="1800" kern="1200">
-                          <a:solidFill>
-                            <a:schemeClr val="dk1"/>
-                          </a:solidFill>
-                          <a:latin typeface="Arial" panose="020B0604020202020204"/>
-                        </a:defRPr>
-                      </a:lvl5pPr>
-                      <a:lvl6pPr marL="2286000" algn="l" defTabSz="914400" rtl="0" eaLnBrk="1" latinLnBrk="0" hangingPunct="1">
-                        <a:defRPr sz="1800" kern="1200">
-                          <a:solidFill>
-                            <a:schemeClr val="dk1"/>
-                          </a:solidFill>
-                          <a:latin typeface="Arial" panose="020B0604020202020204"/>
-                        </a:defRPr>
-                      </a:lvl6pPr>
-                      <a:lvl7pPr marL="2743200" algn="l" defTabSz="914400" rtl="0" eaLnBrk="1" latinLnBrk="0" hangingPunct="1">
-                        <a:defRPr sz="1800" kern="1200">
-                          <a:solidFill>
-                            <a:schemeClr val="dk1"/>
-                          </a:solidFill>
-                          <a:latin typeface="Arial" panose="020B0604020202020204"/>
-                        </a:defRPr>
-                      </a:lvl7pPr>
-                      <a:lvl8pPr marL="3200400" algn="l" defTabSz="914400" rtl="0" eaLnBrk="1" latinLnBrk="0" hangingPunct="1">
-                        <a:defRPr sz="1800" kern="1200">
-                          <a:solidFill>
-                            <a:schemeClr val="dk1"/>
-                          </a:solidFill>
-                          <a:latin typeface="Arial" panose="020B0604020202020204"/>
-                        </a:defRPr>
-                      </a:lvl8pPr>
-                      <a:lvl9pPr marL="3657600" algn="l" defTabSz="914400" rtl="0" eaLnBrk="1" latinLnBrk="0" hangingPunct="1">
-                        <a:defRPr sz="1800" kern="1200">
-                          <a:solidFill>
-                            <a:schemeClr val="dk1"/>
-                          </a:solidFill>
-                          <a:latin typeface="Arial" panose="020B0604020202020204"/>
-                        </a:defRPr>
-                      </a:lvl9pPr>
-                    </a:lstStyle>
-                    <a:p>
-                      <a:r>
-                        <a:rPr lang="en-US" sz="2500" b="1"/>
-                        <a:t>Everyday Use:</a:t>
-                      </a:r>
-                      <a:r>
-                        <a:rPr lang="en-US" sz="2500" b="0"/>
-                        <a:t> Measurement of how volatile a stock is going to be in relation to the market. </a:t>
-                      </a:r>
-                      <a:r>
-                        <a:rPr lang="en-US" sz="2500" b="1" u="none"/>
-                        <a:t>Every 1% move in the market = </a:t>
-                      </a:r>
-                      <a:r>
-                        <a:rPr lang="el-GR" sz="2500" b="1" u="none"/>
-                        <a:t>β</a:t>
-                      </a:r>
-                      <a:r>
-                        <a:rPr lang="en-US" sz="2500" b="1" u="none"/>
-                        <a:t>% move in the market</a:t>
-                      </a:r>
-                    </a:p>
-                  </a:txBody>
-                  <a:tcPr marL="182880" marR="182880" marT="91440" marB="91440" anchor="ctr">
-                    <a:lnL w="12700" cmpd="sng">
-                      <a:noFill/>
-                    </a:lnL>
-                    <a:lnR w="12700" cmpd="sng">
-                      <a:noFill/>
-                    </a:lnR>
-                    <a:lnT w="38100" cmpd="sng">
-                      <a:noFill/>
-                    </a:lnT>
-                    <a:lnB w="6350" cap="flat" cmpd="sng" algn="ctr">
-                      <a:solidFill>
-                        <a:srgbClr val="000000"/>
-                      </a:solidFill>
-                      <a:prstDash val="solid"/>
-                      <a:round/>
-                      <a:headEnd type="none" w="med" len="med"/>
-                      <a:tailEnd type="none" w="med" len="med"/>
-                    </a:lnB>
-                    <a:lnTlToBr w="12700" cmpd="sng">
-                      <a:noFill/>
-                      <a:prstDash val="solid"/>
-                    </a:lnTlToBr>
-                    <a:lnBlToTr w="12700" cmpd="sng">
-                      <a:noFill/>
-                      <a:prstDash val="solid"/>
-                    </a:lnBlToTr>
-                    <a:solidFill>
-                      <a:srgbClr val="FFFFFF"/>
-                    </a:solidFill>
-                  </a:tcPr>
-                </a:tc>
-                <a:tc>
-                  <a:txBody>
-                    <a:bodyPr/>
-                    <a:lstStyle>
-                      <a:lvl1pPr marL="0" algn="l" defTabSz="914400" rtl="0" eaLnBrk="1" latinLnBrk="0" hangingPunct="1">
-                        <a:defRPr sz="1800" kern="1200">
-                          <a:solidFill>
-                            <a:schemeClr val="dk1"/>
-                          </a:solidFill>
-                          <a:latin typeface="Arial" panose="020B0604020202020204"/>
-                        </a:defRPr>
-                      </a:lvl1pPr>
-                      <a:lvl2pPr marL="457200" algn="l" defTabSz="914400" rtl="0" eaLnBrk="1" latinLnBrk="0" hangingPunct="1">
-                        <a:defRPr sz="1800" kern="1200">
-                          <a:solidFill>
-                            <a:schemeClr val="dk1"/>
-                          </a:solidFill>
-                          <a:latin typeface="Arial" panose="020B0604020202020204"/>
-                        </a:defRPr>
-                      </a:lvl2pPr>
-                      <a:lvl3pPr marL="914400" algn="l" defTabSz="914400" rtl="0" eaLnBrk="1" latinLnBrk="0" hangingPunct="1">
-                        <a:defRPr sz="1800" kern="1200">
-                          <a:solidFill>
-                            <a:schemeClr val="dk1"/>
-                          </a:solidFill>
-                          <a:latin typeface="Arial" panose="020B0604020202020204"/>
-                        </a:defRPr>
-                      </a:lvl3pPr>
-                      <a:lvl4pPr marL="1371600" algn="l" defTabSz="914400" rtl="0" eaLnBrk="1" latinLnBrk="0" hangingPunct="1">
-                        <a:defRPr sz="1800" kern="1200">
-                          <a:solidFill>
-                            <a:schemeClr val="dk1"/>
-                          </a:solidFill>
-                          <a:latin typeface="Arial" panose="020B0604020202020204"/>
-                        </a:defRPr>
-                      </a:lvl4pPr>
-                      <a:lvl5pPr marL="1828800" algn="l" defTabSz="914400" rtl="0" eaLnBrk="1" latinLnBrk="0" hangingPunct="1">
-                        <a:defRPr sz="1800" kern="1200">
-                          <a:solidFill>
-                            <a:schemeClr val="dk1"/>
-                          </a:solidFill>
-                          <a:latin typeface="Arial" panose="020B0604020202020204"/>
-                        </a:defRPr>
-                      </a:lvl5pPr>
-                      <a:lvl6pPr marL="2286000" algn="l" defTabSz="914400" rtl="0" eaLnBrk="1" latinLnBrk="0" hangingPunct="1">
-                        <a:defRPr sz="1800" kern="1200">
-                          <a:solidFill>
-                            <a:schemeClr val="dk1"/>
-                          </a:solidFill>
-                          <a:latin typeface="Arial" panose="020B0604020202020204"/>
-                        </a:defRPr>
-                      </a:lvl6pPr>
-                      <a:lvl7pPr marL="2743200" algn="l" defTabSz="914400" rtl="0" eaLnBrk="1" latinLnBrk="0" hangingPunct="1">
-                        <a:defRPr sz="1800" kern="1200">
-                          <a:solidFill>
-                            <a:schemeClr val="dk1"/>
-                          </a:solidFill>
-                          <a:latin typeface="Arial" panose="020B0604020202020204"/>
-                        </a:defRPr>
-                      </a:lvl7pPr>
-                      <a:lvl8pPr marL="3200400" algn="l" defTabSz="914400" rtl="0" eaLnBrk="1" latinLnBrk="0" hangingPunct="1">
-                        <a:defRPr sz="1800" kern="1200">
-                          <a:solidFill>
-                            <a:schemeClr val="dk1"/>
-                          </a:solidFill>
-                          <a:latin typeface="Arial" panose="020B0604020202020204"/>
-                        </a:defRPr>
-                      </a:lvl8pPr>
-                      <a:lvl9pPr marL="3657600" algn="l" defTabSz="914400" rtl="0" eaLnBrk="1" latinLnBrk="0" hangingPunct="1">
-                        <a:defRPr sz="1800" kern="1200">
-                          <a:solidFill>
-                            <a:schemeClr val="dk1"/>
-                          </a:solidFill>
-                          <a:latin typeface="Arial" panose="020B0604020202020204"/>
-                        </a:defRPr>
-                      </a:lvl9pPr>
-                    </a:lstStyle>
-                    <a:p>
-                      <a:pPr algn="r"/>
-                      <a:endParaRPr lang="en-US" sz="3000" b="0"/>
-                    </a:p>
-                  </a:txBody>
-                  <a:tcPr marL="182880" marR="182880" marT="91440" marB="91440" anchor="ctr">
-                    <a:lnL w="12700" cmpd="sng">
-                      <a:noFill/>
-                    </a:lnL>
-                    <a:lnR w="12700" cmpd="sng">
-                      <a:noFill/>
-                    </a:lnR>
-                    <a:lnT w="38100" cmpd="sng">
-                      <a:noFill/>
-                    </a:lnT>
-                    <a:lnB w="6350" cap="flat" cmpd="sng" algn="ctr">
-                      <a:solidFill>
-                        <a:srgbClr val="000000"/>
-                      </a:solidFill>
-                      <a:prstDash val="solid"/>
-                      <a:round/>
-                      <a:headEnd type="none" w="med" len="med"/>
-                      <a:tailEnd type="none" w="med" len="med"/>
-                    </a:lnB>
-                    <a:lnTlToBr w="12700" cmpd="sng">
-                      <a:noFill/>
-                      <a:prstDash val="solid"/>
-                    </a:lnTlToBr>
-                    <a:lnBlToTr w="12700" cmpd="sng">
-                      <a:noFill/>
-                      <a:prstDash val="solid"/>
-                    </a:lnBlToTr>
-                    <a:solidFill>
-                      <a:srgbClr val="FFFFFF"/>
-                    </a:solidFill>
-                  </a:tcPr>
-                </a:tc>
-                <a:extLst>
-                  <a:ext uri="{0D108BD9-81ED-4DB2-BD59-A6C34878D82A}">
-                    <a16:rowId xmlns:a16="http://schemas.microsoft.com/office/drawing/2014/main" val="3391466926"/>
-                  </a:ext>
-                </a:extLst>
-              </a:tr>
-              <a:tr h="1180795">
-                <a:tc>
-                  <a:txBody>
-                    <a:bodyPr/>
-                    <a:lstStyle/>
-                    <a:p>
-                      <a:r>
-                        <a:rPr lang="en-US" sz="2500" b="1"/>
-                        <a:t>Quant Algorithms: </a:t>
-                      </a:r>
-                      <a:r>
-                        <a:rPr lang="en-US" sz="2500" b="0"/>
-                        <a:t>Measures the volatility of a stock versus the market index.</a:t>
-                      </a:r>
-                      <a:endParaRPr lang="en-US" sz="1500" b="0" i="0" u="none" strike="noStrike" noProof="0">
-                        <a:solidFill>
-                          <a:srgbClr val="040C28"/>
-                        </a:solidFill>
-                        <a:latin typeface="Aptos"/>
-                      </a:endParaRPr>
-                    </a:p>
-                  </a:txBody>
-                  <a:tcPr marL="182880" marR="182880" marT="91440" marB="91440" anchor="ctr">
-                    <a:lnL w="12700" cmpd="sng">
-                      <a:noFill/>
-                    </a:lnL>
-                    <a:lnR w="12700" cmpd="sng">
-                      <a:noFill/>
-                    </a:lnR>
-                    <a:lnT w="6350" cap="flat" cmpd="sng" algn="ctr">
-                      <a:solidFill>
-                        <a:srgbClr val="000000"/>
-                      </a:solidFill>
-                      <a:prstDash val="solid"/>
-                      <a:round/>
-                      <a:headEnd type="none" w="med" len="med"/>
-                      <a:tailEnd type="none" w="med" len="med"/>
-                    </a:lnT>
-                    <a:lnB w="6350" cap="flat" cmpd="sng" algn="ctr">
-                      <a:solidFill>
-                        <a:srgbClr val="000000"/>
-                      </a:solidFill>
-                      <a:prstDash val="solid"/>
-                      <a:round/>
-                      <a:headEnd type="none" w="med" len="med"/>
-                      <a:tailEnd type="none" w="med" len="med"/>
-                    </a:lnB>
-                    <a:lnTlToBr w="12700" cmpd="sng">
-                      <a:noFill/>
-                      <a:prstDash val="solid"/>
-                    </a:lnTlToBr>
-                    <a:lnBlToTr w="12700" cmpd="sng">
-                      <a:noFill/>
-                      <a:prstDash val="solid"/>
-                    </a:lnBlToTr>
-                    <a:solidFill>
-                      <a:srgbClr val="FFFFFF"/>
-                    </a:solidFill>
-                  </a:tcPr>
-                </a:tc>
-                <a:tc>
-                  <a:txBody>
-                    <a:bodyPr/>
-                    <a:lstStyle/>
-                    <a:p>
-                      <a:pPr algn="r"/>
-                      <a:endParaRPr lang="en-US" sz="3000" b="0"/>
-                    </a:p>
-                  </a:txBody>
-                  <a:tcPr marL="182880" marR="182880" marT="91440" marB="91440" anchor="ctr">
-                    <a:lnL w="12700" cmpd="sng">
-                      <a:noFill/>
-                    </a:lnL>
-                    <a:lnR w="12700" cmpd="sng">
-                      <a:noFill/>
-                    </a:lnR>
-                    <a:lnT w="6350" cap="flat" cmpd="sng" algn="ctr">
-                      <a:solidFill>
-                        <a:srgbClr val="000000"/>
-                      </a:solidFill>
-                      <a:prstDash val="solid"/>
-                      <a:round/>
-                      <a:headEnd type="none" w="med" len="med"/>
-                      <a:tailEnd type="none" w="med" len="med"/>
-                    </a:lnT>
-                    <a:lnB w="6350" cap="flat" cmpd="sng" algn="ctr">
-                      <a:solidFill>
-                        <a:srgbClr val="000000"/>
-                      </a:solidFill>
-                      <a:prstDash val="solid"/>
-                      <a:round/>
-                      <a:headEnd type="none" w="med" len="med"/>
-                      <a:tailEnd type="none" w="med" len="med"/>
-                    </a:lnB>
-                    <a:lnTlToBr w="12700" cmpd="sng">
-                      <a:noFill/>
-                      <a:prstDash val="solid"/>
-                    </a:lnTlToBr>
-                    <a:lnBlToTr w="12700" cmpd="sng">
-                      <a:noFill/>
-                      <a:prstDash val="solid"/>
-                    </a:lnBlToTr>
-                    <a:solidFill>
-                      <a:srgbClr val="FFFFFF"/>
-                    </a:solidFill>
-                  </a:tcPr>
-                </a:tc>
-                <a:extLst>
-                  <a:ext uri="{0D108BD9-81ED-4DB2-BD59-A6C34878D82A}">
-                    <a16:rowId xmlns:a16="http://schemas.microsoft.com/office/drawing/2014/main" val="1986563157"/>
-                  </a:ext>
-                </a:extLst>
-              </a:tr>
-              <a:tr h="1180795">
-                <a:tc>
-                  <a:txBody>
-                    <a:bodyPr/>
-                    <a:lstStyle>
-                      <a:lvl1pPr marL="0" algn="l" defTabSz="914400" rtl="0" eaLnBrk="1" latinLnBrk="0" hangingPunct="1">
-                        <a:defRPr sz="1800" kern="1200">
-                          <a:solidFill>
-                            <a:schemeClr val="dk1"/>
-                          </a:solidFill>
-                          <a:latin typeface="Arial" panose="020B0604020202020204"/>
-                        </a:defRPr>
-                      </a:lvl1pPr>
-                      <a:lvl2pPr marL="457200" algn="l" defTabSz="914400" rtl="0" eaLnBrk="1" latinLnBrk="0" hangingPunct="1">
-                        <a:defRPr sz="1800" kern="1200">
-                          <a:solidFill>
-                            <a:schemeClr val="dk1"/>
-                          </a:solidFill>
-                          <a:latin typeface="Arial" panose="020B0604020202020204"/>
-                        </a:defRPr>
-                      </a:lvl2pPr>
-                      <a:lvl3pPr marL="914400" algn="l" defTabSz="914400" rtl="0" eaLnBrk="1" latinLnBrk="0" hangingPunct="1">
-                        <a:defRPr sz="1800" kern="1200">
-                          <a:solidFill>
-                            <a:schemeClr val="dk1"/>
-                          </a:solidFill>
-                          <a:latin typeface="Arial" panose="020B0604020202020204"/>
-                        </a:defRPr>
-                      </a:lvl3pPr>
-                      <a:lvl4pPr marL="1371600" algn="l" defTabSz="914400" rtl="0" eaLnBrk="1" latinLnBrk="0" hangingPunct="1">
-                        <a:defRPr sz="1800" kern="1200">
-                          <a:solidFill>
-                            <a:schemeClr val="dk1"/>
-                          </a:solidFill>
-                          <a:latin typeface="Arial" panose="020B0604020202020204"/>
-                        </a:defRPr>
-                      </a:lvl4pPr>
-                      <a:lvl5pPr marL="1828800" algn="l" defTabSz="914400" rtl="0" eaLnBrk="1" latinLnBrk="0" hangingPunct="1">
-                        <a:defRPr sz="1800" kern="1200">
-                          <a:solidFill>
-                            <a:schemeClr val="dk1"/>
-                          </a:solidFill>
-                          <a:latin typeface="Arial" panose="020B0604020202020204"/>
-                        </a:defRPr>
-                      </a:lvl5pPr>
-                      <a:lvl6pPr marL="2286000" algn="l" defTabSz="914400" rtl="0" eaLnBrk="1" latinLnBrk="0" hangingPunct="1">
-                        <a:defRPr sz="1800" kern="1200">
-                          <a:solidFill>
-                            <a:schemeClr val="dk1"/>
-                          </a:solidFill>
-                          <a:latin typeface="Arial" panose="020B0604020202020204"/>
-                        </a:defRPr>
-                      </a:lvl6pPr>
-                      <a:lvl7pPr marL="2743200" algn="l" defTabSz="914400" rtl="0" eaLnBrk="1" latinLnBrk="0" hangingPunct="1">
-                        <a:defRPr sz="1800" kern="1200">
-                          <a:solidFill>
-                            <a:schemeClr val="dk1"/>
-                          </a:solidFill>
-                          <a:latin typeface="Arial" panose="020B0604020202020204"/>
-                        </a:defRPr>
-                      </a:lvl7pPr>
-                      <a:lvl8pPr marL="3200400" algn="l" defTabSz="914400" rtl="0" eaLnBrk="1" latinLnBrk="0" hangingPunct="1">
-                        <a:defRPr sz="1800" kern="1200">
-                          <a:solidFill>
-                            <a:schemeClr val="dk1"/>
-                          </a:solidFill>
-                          <a:latin typeface="Arial" panose="020B0604020202020204"/>
-                        </a:defRPr>
-                      </a:lvl8pPr>
-                      <a:lvl9pPr marL="3657600" algn="l" defTabSz="914400" rtl="0" eaLnBrk="1" latinLnBrk="0" hangingPunct="1">
-                        <a:defRPr sz="1800" kern="1200">
-                          <a:solidFill>
-                            <a:schemeClr val="dk1"/>
-                          </a:solidFill>
-                          <a:latin typeface="Arial" panose="020B0604020202020204"/>
-                        </a:defRPr>
-                      </a:lvl9pPr>
-                    </a:lstStyle>
-                    <a:p>
-                      <a:r>
-                        <a:rPr lang="en-US" sz="2500" b="1"/>
-                        <a:t>Beta Hedging: </a:t>
-                      </a:r>
-                      <a:r>
-                        <a:rPr lang="en-US" sz="2500" b="0"/>
-                        <a:t>Aim to be </a:t>
-                      </a:r>
-                      <a:r>
-                        <a:rPr lang="en-US" sz="2500" b="1" u="none"/>
-                        <a:t>beta neutral </a:t>
-                      </a:r>
-                      <a:r>
-                        <a:rPr lang="en-US" sz="2500" b="0"/>
-                        <a:t>by buying stocks with a beta inverse of </a:t>
-                      </a:r>
-                      <a:r>
-                        <a:rPr lang="en-US" sz="2500" b="1" i="0" u="none"/>
-                        <a:t>stock of comparison</a:t>
-                      </a:r>
-                    </a:p>
-                  </a:txBody>
-                  <a:tcPr marL="182880" marR="182880" marT="91440" marB="91440" anchor="ctr">
-                    <a:lnL w="12700" cmpd="sng">
-                      <a:noFill/>
-                    </a:lnL>
-                    <a:lnR w="12700" cmpd="sng">
-                      <a:noFill/>
-                    </a:lnR>
-                    <a:lnT w="6350" cap="flat" cmpd="sng" algn="ctr">
-                      <a:solidFill>
-                        <a:srgbClr val="000000"/>
-                      </a:solidFill>
-                      <a:prstDash val="solid"/>
-                      <a:round/>
-                      <a:headEnd type="none" w="med" len="med"/>
-                      <a:tailEnd type="none" w="med" len="med"/>
-                    </a:lnT>
-                    <a:lnB w="6350" cap="flat" cmpd="sng" algn="ctr">
-                      <a:solidFill>
-                        <a:srgbClr val="000000"/>
-                      </a:solidFill>
-                      <a:prstDash val="solid"/>
-                      <a:round/>
-                      <a:headEnd type="none" w="med" len="med"/>
-                      <a:tailEnd type="none" w="med" len="med"/>
-                    </a:lnB>
-                    <a:lnTlToBr w="12700" cmpd="sng">
-                      <a:noFill/>
-                      <a:prstDash val="solid"/>
-                    </a:lnTlToBr>
-                    <a:lnBlToTr w="12700" cmpd="sng">
-                      <a:noFill/>
-                      <a:prstDash val="solid"/>
-                    </a:lnBlToTr>
-                    <a:solidFill>
-                      <a:srgbClr val="FFFFFF"/>
-                    </a:solidFill>
-                  </a:tcPr>
-                </a:tc>
-                <a:tc>
-                  <a:txBody>
-                    <a:bodyPr/>
-                    <a:lstStyle>
-                      <a:lvl1pPr marL="0" algn="l" defTabSz="914400" rtl="0" eaLnBrk="1" latinLnBrk="0" hangingPunct="1">
-                        <a:defRPr sz="1800" kern="1200">
-                          <a:solidFill>
-                            <a:schemeClr val="dk1"/>
-                          </a:solidFill>
-                          <a:latin typeface="Arial" panose="020B0604020202020204"/>
-                        </a:defRPr>
-                      </a:lvl1pPr>
-                      <a:lvl2pPr marL="457200" algn="l" defTabSz="914400" rtl="0" eaLnBrk="1" latinLnBrk="0" hangingPunct="1">
-                        <a:defRPr sz="1800" kern="1200">
-                          <a:solidFill>
-                            <a:schemeClr val="dk1"/>
-                          </a:solidFill>
-                          <a:latin typeface="Arial" panose="020B0604020202020204"/>
-                        </a:defRPr>
-                      </a:lvl2pPr>
-                      <a:lvl3pPr marL="914400" algn="l" defTabSz="914400" rtl="0" eaLnBrk="1" latinLnBrk="0" hangingPunct="1">
-                        <a:defRPr sz="1800" kern="1200">
-                          <a:solidFill>
-                            <a:schemeClr val="dk1"/>
-                          </a:solidFill>
-                          <a:latin typeface="Arial" panose="020B0604020202020204"/>
-                        </a:defRPr>
-                      </a:lvl3pPr>
-                      <a:lvl4pPr marL="1371600" algn="l" defTabSz="914400" rtl="0" eaLnBrk="1" latinLnBrk="0" hangingPunct="1">
-                        <a:defRPr sz="1800" kern="1200">
-                          <a:solidFill>
-                            <a:schemeClr val="dk1"/>
-                          </a:solidFill>
-                          <a:latin typeface="Arial" panose="020B0604020202020204"/>
-                        </a:defRPr>
-                      </a:lvl4pPr>
-                      <a:lvl5pPr marL="1828800" algn="l" defTabSz="914400" rtl="0" eaLnBrk="1" latinLnBrk="0" hangingPunct="1">
-                        <a:defRPr sz="1800" kern="1200">
-                          <a:solidFill>
-                            <a:schemeClr val="dk1"/>
-                          </a:solidFill>
-                          <a:latin typeface="Arial" panose="020B0604020202020204"/>
-                        </a:defRPr>
-                      </a:lvl5pPr>
-                      <a:lvl6pPr marL="2286000" algn="l" defTabSz="914400" rtl="0" eaLnBrk="1" latinLnBrk="0" hangingPunct="1">
-                        <a:defRPr sz="1800" kern="1200">
-                          <a:solidFill>
-                            <a:schemeClr val="dk1"/>
-                          </a:solidFill>
-                          <a:latin typeface="Arial" panose="020B0604020202020204"/>
-                        </a:defRPr>
-                      </a:lvl6pPr>
-                      <a:lvl7pPr marL="2743200" algn="l" defTabSz="914400" rtl="0" eaLnBrk="1" latinLnBrk="0" hangingPunct="1">
-                        <a:defRPr sz="1800" kern="1200">
-                          <a:solidFill>
-                            <a:schemeClr val="dk1"/>
-                          </a:solidFill>
-                          <a:latin typeface="Arial" panose="020B0604020202020204"/>
-                        </a:defRPr>
-                      </a:lvl7pPr>
-                      <a:lvl8pPr marL="3200400" algn="l" defTabSz="914400" rtl="0" eaLnBrk="1" latinLnBrk="0" hangingPunct="1">
-                        <a:defRPr sz="1800" kern="1200">
-                          <a:solidFill>
-                            <a:schemeClr val="dk1"/>
-                          </a:solidFill>
-                          <a:latin typeface="Arial" panose="020B0604020202020204"/>
-                        </a:defRPr>
-                      </a:lvl8pPr>
-                      <a:lvl9pPr marL="3657600" algn="l" defTabSz="914400" rtl="0" eaLnBrk="1" latinLnBrk="0" hangingPunct="1">
-                        <a:defRPr sz="1800" kern="1200">
-                          <a:solidFill>
-                            <a:schemeClr val="dk1"/>
-                          </a:solidFill>
-                          <a:latin typeface="Arial" panose="020B0604020202020204"/>
-                        </a:defRPr>
-                      </a:lvl9pPr>
-                    </a:lstStyle>
-                    <a:p>
-                      <a:pPr algn="r"/>
-                      <a:endParaRPr lang="en-US" sz="3000" b="0"/>
-                    </a:p>
-                  </a:txBody>
-                  <a:tcPr marL="182880" marR="182880" marT="91440" marB="91440" anchor="ctr">
-                    <a:lnL w="12700" cmpd="sng">
-                      <a:noFill/>
-                    </a:lnL>
-                    <a:lnR w="12700" cmpd="sng">
-                      <a:noFill/>
-                    </a:lnR>
-                    <a:lnT w="6350" cap="flat" cmpd="sng" algn="ctr">
-                      <a:solidFill>
-                        <a:srgbClr val="000000"/>
-                      </a:solidFill>
-                      <a:prstDash val="solid"/>
-                      <a:round/>
-                      <a:headEnd type="none" w="med" len="med"/>
-                      <a:tailEnd type="none" w="med" len="med"/>
-                    </a:lnT>
-                    <a:lnB w="6350" cap="flat" cmpd="sng" algn="ctr">
-                      <a:solidFill>
-                        <a:srgbClr val="000000"/>
-                      </a:solidFill>
-                      <a:prstDash val="solid"/>
-                      <a:round/>
-                      <a:headEnd type="none" w="med" len="med"/>
-                      <a:tailEnd type="none" w="med" len="med"/>
-                    </a:lnB>
-                    <a:lnTlToBr w="12700" cmpd="sng">
-                      <a:noFill/>
-                      <a:prstDash val="solid"/>
-                    </a:lnTlToBr>
-                    <a:lnBlToTr w="12700" cmpd="sng">
-                      <a:noFill/>
-                      <a:prstDash val="solid"/>
-                    </a:lnBlToTr>
-                    <a:solidFill>
-                      <a:srgbClr val="FFFFFF"/>
-                    </a:solidFill>
-                  </a:tcPr>
-                </a:tc>
-                <a:extLst>
-                  <a:ext uri="{0D108BD9-81ED-4DB2-BD59-A6C34878D82A}">
-                    <a16:rowId xmlns:a16="http://schemas.microsoft.com/office/drawing/2014/main" val="2584865208"/>
-                  </a:ext>
-                </a:extLst>
-              </a:tr>
-              <a:tr h="1180795">
-                <a:tc>
-                  <a:txBody>
-                    <a:bodyPr/>
-                    <a:lstStyle/>
-                    <a:p>
-                      <a:r>
-                        <a:rPr lang="en-US" sz="2500" b="1"/>
-                        <a:t>With Alpha (</a:t>
-                      </a:r>
-                      <a:r>
-                        <a:rPr lang="el-GR" sz="2500" b="1"/>
-                        <a:t>α</a:t>
-                      </a:r>
-                      <a:r>
-                        <a:rPr lang="en-US" sz="2500" b="1"/>
-                        <a:t>): alpha</a:t>
-                      </a:r>
-                      <a:r>
-                        <a:rPr lang="en-US" sz="2500" b="0"/>
-                        <a:t> is the excess return of a stock or fund. Usually used with beta in </a:t>
-                      </a:r>
-                      <a:r>
-                        <a:rPr lang="en-US" sz="2500" b="1"/>
-                        <a:t>CAPM</a:t>
-                      </a:r>
-                    </a:p>
-                  </a:txBody>
-                  <a:tcPr marL="182880" marR="182880" marT="91440" marB="91440" anchor="ctr">
-                    <a:lnL w="12700" cmpd="sng">
-                      <a:noFill/>
-                    </a:lnL>
-                    <a:lnR w="12700" cmpd="sng">
-                      <a:noFill/>
-                    </a:lnR>
-                    <a:lnT w="6350" cap="flat" cmpd="sng" algn="ctr">
-                      <a:solidFill>
-                        <a:srgbClr val="000000"/>
-                      </a:solidFill>
-                      <a:prstDash val="solid"/>
-                      <a:round/>
-                      <a:headEnd type="none" w="med" len="med"/>
-                      <a:tailEnd type="none" w="med" len="med"/>
-                    </a:lnT>
-                    <a:lnB w="6350" cap="flat" cmpd="sng" algn="ctr">
-                      <a:solidFill>
-                        <a:srgbClr val="000000"/>
-                      </a:solidFill>
-                      <a:prstDash val="solid"/>
-                      <a:round/>
-                      <a:headEnd type="none" w="med" len="med"/>
-                      <a:tailEnd type="none" w="med" len="med"/>
-                    </a:lnB>
-                    <a:lnTlToBr w="12700" cmpd="sng">
-                      <a:noFill/>
-                      <a:prstDash val="solid"/>
-                    </a:lnTlToBr>
-                    <a:lnBlToTr w="12700" cmpd="sng">
-                      <a:noFill/>
-                      <a:prstDash val="solid"/>
-                    </a:lnBlToTr>
-                    <a:solidFill>
-                      <a:srgbClr val="FFFFFF"/>
-                    </a:solidFill>
-                  </a:tcPr>
-                </a:tc>
-                <a:tc>
-                  <a:txBody>
-                    <a:bodyPr/>
-                    <a:lstStyle/>
-                    <a:p>
-                      <a:pPr algn="r"/>
-                      <a:endParaRPr lang="en-US" sz="3000" b="0"/>
-                    </a:p>
-                  </a:txBody>
-                  <a:tcPr marL="182880" marR="182880" marT="91440" marB="91440" anchor="ctr">
-                    <a:lnL w="12700" cmpd="sng">
-                      <a:noFill/>
-                    </a:lnL>
-                    <a:lnR w="12700" cmpd="sng">
-                      <a:noFill/>
-                    </a:lnR>
-                    <a:lnT w="6350" cap="flat" cmpd="sng" algn="ctr">
-                      <a:solidFill>
-                        <a:srgbClr val="000000"/>
-                      </a:solidFill>
-                      <a:prstDash val="solid"/>
-                      <a:round/>
-                      <a:headEnd type="none" w="med" len="med"/>
-                      <a:tailEnd type="none" w="med" len="med"/>
-                    </a:lnT>
-                    <a:lnB w="6350" cap="flat" cmpd="sng" algn="ctr">
-                      <a:solidFill>
-                        <a:srgbClr val="000000"/>
-                      </a:solidFill>
-                      <a:prstDash val="solid"/>
-                      <a:round/>
-                      <a:headEnd type="none" w="med" len="med"/>
-                      <a:tailEnd type="none" w="med" len="med"/>
-                    </a:lnB>
-                    <a:lnTlToBr w="12700" cmpd="sng">
-                      <a:noFill/>
-                      <a:prstDash val="solid"/>
-                    </a:lnTlToBr>
-                    <a:lnBlToTr w="12700" cmpd="sng">
-                      <a:noFill/>
-                      <a:prstDash val="solid"/>
-                    </a:lnBlToTr>
-                    <a:solidFill>
-                      <a:srgbClr val="FFFFFF"/>
-                    </a:solidFill>
-                  </a:tcPr>
-                </a:tc>
-                <a:extLst>
-                  <a:ext uri="{0D108BD9-81ED-4DB2-BD59-A6C34878D82A}">
-                    <a16:rowId xmlns:a16="http://schemas.microsoft.com/office/drawing/2014/main" val="346671938"/>
-                  </a:ext>
-                </a:extLst>
-              </a:tr>
-            </a:tbl>
-          </a:graphicData>
-        </a:graphic>
-      </p:graphicFrame>
-      <p:grpSp>
-        <p:nvGrpSpPr>
-          <p:cNvPr id="25" name="Group 24">
-            <a:extLst>
-              <a:ext uri="{FF2B5EF4-FFF2-40B4-BE49-F238E27FC236}">
-                <a16:creationId xmlns:a16="http://schemas.microsoft.com/office/drawing/2014/main" id="{4672122A-E6D2-DB1A-6179-E3C1E3935A8B}"/>
-              </a:ext>
-            </a:extLst>
-          </p:cNvPr>
-          <p:cNvGrpSpPr/>
-          <p:nvPr/>
-        </p:nvGrpSpPr>
-        <p:grpSpPr>
-          <a:xfrm>
-            <a:off x="1422634" y="2749717"/>
-            <a:ext cx="10007363" cy="4372858"/>
-            <a:chOff x="1882153" y="4135605"/>
-            <a:chExt cx="9378029" cy="4104362"/>
-          </a:xfrm>
-        </p:grpSpPr>
-        <p:pic>
-          <p:nvPicPr>
-            <p:cNvPr id="19" name="Picture 18" descr="A line of text with black text&#10;&#10;AI-generated content may be incorrect.">
-              <a:extLst>
-                <a:ext uri="{FF2B5EF4-FFF2-40B4-BE49-F238E27FC236}">
-                  <a16:creationId xmlns:a16="http://schemas.microsoft.com/office/drawing/2014/main" id="{57DF24D9-69D9-BC5C-E212-FE0AB86ACC52}"/>
-                </a:ext>
-              </a:extLst>
-            </p:cNvPr>
-            <p:cNvPicPr>
-              <a:picLocks noChangeAspect="1"/>
-            </p:cNvPicPr>
-            <p:nvPr/>
-          </p:nvPicPr>
-          <p:blipFill>
-            <a:blip r:embed="rId3"/>
-            <a:srcRect t="25762" b="30472"/>
-            <a:stretch/>
-          </p:blipFill>
-          <p:spPr>
-            <a:xfrm>
-              <a:off x="1882153" y="4135605"/>
-              <a:ext cx="9378029" cy="4104362"/>
-            </a:xfrm>
-            <a:prstGeom prst="rect">
-              <a:avLst/>
-            </a:prstGeom>
-          </p:spPr>
-        </p:pic>
-        <p:sp>
-          <p:nvSpPr>
-            <p:cNvPr id="21" name="Rounded Rectangle 20">
-              <a:extLst>
-                <a:ext uri="{FF2B5EF4-FFF2-40B4-BE49-F238E27FC236}">
-                  <a16:creationId xmlns:a16="http://schemas.microsoft.com/office/drawing/2014/main" id="{BFABE7F3-BD06-7C87-A1FA-DACC646826DE}"/>
-                </a:ext>
-              </a:extLst>
-            </p:cNvPr>
-            <p:cNvSpPr/>
-            <p:nvPr/>
-          </p:nvSpPr>
-          <p:spPr>
-            <a:xfrm>
-              <a:off x="9490577" y="4135605"/>
-              <a:ext cx="984918" cy="872723"/>
-            </a:xfrm>
-            <a:prstGeom prst="roundRect">
-              <a:avLst/>
-            </a:prstGeom>
-            <a:solidFill>
-              <a:schemeClr val="bg1"/>
-            </a:solidFill>
-            <a:ln>
-              <a:noFill/>
-            </a:ln>
-          </p:spPr>
-          <p:style>
-            <a:lnRef idx="0">
-              <a:scrgbClr r="0" g="0" b="0"/>
-            </a:lnRef>
-            <a:fillRef idx="0">
-              <a:scrgbClr r="0" g="0" b="0"/>
-            </a:fillRef>
-            <a:effectRef idx="0">
-              <a:scrgbClr r="0" g="0" b="0"/>
-            </a:effectRef>
-            <a:fontRef idx="minor">
-              <a:schemeClr val="lt1"/>
-            </a:fontRef>
-          </p:style>
-          <p:txBody>
-            <a:bodyPr rtlCol="0" anchor="ctr"/>
-            <a:lstStyle/>
-            <a:p>
-              <a:pPr algn="ctr"/>
-              <a:endParaRPr lang="en-US"/>
-            </a:p>
-          </p:txBody>
-        </p:sp>
-        <p:sp>
-          <p:nvSpPr>
-            <p:cNvPr id="20" name="TextBox 19">
-              <a:extLst>
-                <a:ext uri="{FF2B5EF4-FFF2-40B4-BE49-F238E27FC236}">
-                  <a16:creationId xmlns:a16="http://schemas.microsoft.com/office/drawing/2014/main" id="{5086E2B1-0037-98ED-87FA-5F398DB8A4C6}"/>
-                </a:ext>
-              </a:extLst>
-            </p:cNvPr>
-            <p:cNvSpPr txBox="1"/>
-            <p:nvPr/>
-          </p:nvSpPr>
-          <p:spPr>
-            <a:xfrm>
-              <a:off x="9284811" y="4268128"/>
-              <a:ext cx="1685730" cy="845598"/>
-            </a:xfrm>
-            <a:prstGeom prst="rect">
-              <a:avLst/>
-            </a:prstGeom>
-            <a:noFill/>
-          </p:spPr>
-          <p:txBody>
-            <a:bodyPr wrap="square" rtlCol="0">
-              <a:spAutoFit/>
-            </a:bodyPr>
-            <a:lstStyle/>
-            <a:p>
-              <a:r>
-                <a:rPr lang="en-US" sz="4500">
-                  <a:solidFill>
-                    <a:schemeClr val="tx1"/>
-                  </a:solidFill>
-                  <a:latin typeface="+mj-lt"/>
-                </a:rPr>
-                <a:t>&lt; -1</a:t>
-              </a:r>
-            </a:p>
-          </p:txBody>
-        </p:sp>
-        <p:sp>
-          <p:nvSpPr>
-            <p:cNvPr id="22" name="Rounded Rectangle 21">
-              <a:extLst>
-                <a:ext uri="{FF2B5EF4-FFF2-40B4-BE49-F238E27FC236}">
-                  <a16:creationId xmlns:a16="http://schemas.microsoft.com/office/drawing/2014/main" id="{27AF84D3-9F1C-7DA0-EC4F-8AFA2DE93145}"/>
-                </a:ext>
-              </a:extLst>
-            </p:cNvPr>
-            <p:cNvSpPr/>
-            <p:nvPr/>
-          </p:nvSpPr>
-          <p:spPr>
-            <a:xfrm>
-              <a:off x="3792669" y="4247979"/>
-              <a:ext cx="984918" cy="872723"/>
-            </a:xfrm>
-            <a:prstGeom prst="roundRect">
-              <a:avLst/>
-            </a:prstGeom>
-            <a:solidFill>
-              <a:schemeClr val="bg1"/>
-            </a:solidFill>
-            <a:ln>
-              <a:noFill/>
-            </a:ln>
-          </p:spPr>
-          <p:style>
-            <a:lnRef idx="0">
-              <a:scrgbClr r="0" g="0" b="0"/>
-            </a:lnRef>
-            <a:fillRef idx="0">
-              <a:scrgbClr r="0" g="0" b="0"/>
-            </a:fillRef>
-            <a:effectRef idx="0">
-              <a:scrgbClr r="0" g="0" b="0"/>
-            </a:effectRef>
-            <a:fontRef idx="minor">
-              <a:schemeClr val="lt1"/>
-            </a:fontRef>
-          </p:style>
-          <p:txBody>
-            <a:bodyPr rtlCol="0" anchor="ctr"/>
-            <a:lstStyle/>
-            <a:p>
-              <a:pPr algn="ctr"/>
-              <a:endParaRPr lang="en-US"/>
-            </a:p>
-          </p:txBody>
-        </p:sp>
-        <p:sp>
-          <p:nvSpPr>
-            <p:cNvPr id="23" name="TextBox 22">
-              <a:extLst>
-                <a:ext uri="{FF2B5EF4-FFF2-40B4-BE49-F238E27FC236}">
-                  <a16:creationId xmlns:a16="http://schemas.microsoft.com/office/drawing/2014/main" id="{7F11D751-2C8B-3AF6-B996-B812E1DB62ED}"/>
-                </a:ext>
-              </a:extLst>
-            </p:cNvPr>
-            <p:cNvSpPr txBox="1"/>
-            <p:nvPr/>
-          </p:nvSpPr>
-          <p:spPr>
-            <a:xfrm>
-              <a:off x="3902003" y="4247979"/>
-              <a:ext cx="1139757" cy="784830"/>
-            </a:xfrm>
-            <a:prstGeom prst="rect">
-              <a:avLst/>
-            </a:prstGeom>
-            <a:noFill/>
-          </p:spPr>
-          <p:txBody>
-            <a:bodyPr wrap="square" rtlCol="0">
-              <a:spAutoFit/>
-            </a:bodyPr>
-            <a:lstStyle/>
-            <a:p>
-              <a:r>
-                <a:rPr lang="en-US" sz="4500">
-                  <a:solidFill>
-                    <a:schemeClr val="tx1"/>
-                  </a:solidFill>
-                  <a:latin typeface="+mj-lt"/>
-                </a:rPr>
-                <a:t>1</a:t>
-              </a:r>
-            </a:p>
-          </p:txBody>
-        </p:sp>
-        <p:sp>
-          <p:nvSpPr>
-            <p:cNvPr id="24" name="TextBox 23">
-              <a:extLst>
-                <a:ext uri="{FF2B5EF4-FFF2-40B4-BE49-F238E27FC236}">
-                  <a16:creationId xmlns:a16="http://schemas.microsoft.com/office/drawing/2014/main" id="{02C6651B-28BD-B947-C989-FD75966D8659}"/>
-                </a:ext>
-              </a:extLst>
-            </p:cNvPr>
-            <p:cNvSpPr txBox="1"/>
-            <p:nvPr/>
-          </p:nvSpPr>
-          <p:spPr>
-            <a:xfrm>
-              <a:off x="2267533" y="4236361"/>
-              <a:ext cx="1139757" cy="784830"/>
-            </a:xfrm>
-            <a:prstGeom prst="rect">
-              <a:avLst/>
-            </a:prstGeom>
-            <a:noFill/>
-          </p:spPr>
-          <p:txBody>
-            <a:bodyPr wrap="square" rtlCol="0">
-              <a:spAutoFit/>
-            </a:bodyPr>
-            <a:lstStyle/>
-            <a:p>
-              <a:r>
-                <a:rPr lang="en-US" sz="4500">
-                  <a:solidFill>
-                    <a:schemeClr val="tx1"/>
-                  </a:solidFill>
-                  <a:latin typeface="+mj-lt"/>
-                </a:rPr>
-                <a:t>&gt; 1</a:t>
-              </a:r>
-            </a:p>
-          </p:txBody>
-        </p:sp>
-      </p:grpSp>
-      <p:sp>
-        <p:nvSpPr>
-          <p:cNvPr id="3" name="Content Placeholder 1">
-            <a:extLst>
-              <a:ext uri="{FF2B5EF4-FFF2-40B4-BE49-F238E27FC236}">
-                <a16:creationId xmlns:a16="http://schemas.microsoft.com/office/drawing/2014/main" id="{B62CDD79-84A4-3C5E-10B4-EC48939503B9}"/>
-              </a:ext>
-            </a:extLst>
-          </p:cNvPr>
-          <p:cNvSpPr>
-            <a:spLocks noGrp="1"/>
-          </p:cNvSpPr>
-          <p:nvPr>
-            <p:ph idx="1"/>
-          </p:nvPr>
-        </p:nvSpPr>
-        <p:spPr>
-          <a:xfrm>
-            <a:off x="13246422" y="8142691"/>
-            <a:ext cx="10250502" cy="2666771"/>
-          </a:xfrm>
-        </p:spPr>
-        <p:txBody>
-          <a:bodyPr vert="horz" lIns="91440" tIns="45720" rIns="91440" bIns="45720" rtlCol="0" anchor="t">
-            <a:normAutofit/>
-          </a:bodyPr>
-          <a:lstStyle/>
-          <a:p>
-            <a:pPr marL="0" indent="0">
-              <a:buNone/>
-            </a:pPr>
-            <a:r>
-              <a:rPr lang="en-US">
-                <a:latin typeface="Inter"/>
-                <a:cs typeface="Poppins"/>
-              </a:rPr>
-              <a:t>Confidence intervals can also help us better utilize the beta model as we can use these intervals to create more conservative models for beta hedging and quant algorithms.</a:t>
-            </a:r>
-          </a:p>
-        </p:txBody>
-      </p:sp>
-      <p:sp>
-        <p:nvSpPr>
-          <p:cNvPr id="10" name="Content Placeholder 1">
-            <a:extLst>
-              <a:ext uri="{FF2B5EF4-FFF2-40B4-BE49-F238E27FC236}">
-                <a16:creationId xmlns:a16="http://schemas.microsoft.com/office/drawing/2014/main" id="{22056BB8-CA6F-3B6F-F08C-5B55E1BA437C}"/>
-              </a:ext>
-            </a:extLst>
-          </p:cNvPr>
-          <p:cNvSpPr txBox="1">
-            <a:spLocks/>
-          </p:cNvSpPr>
-          <p:nvPr/>
-        </p:nvSpPr>
-        <p:spPr>
-          <a:xfrm>
-            <a:off x="13245860" y="4163644"/>
-            <a:ext cx="10237696" cy="3447981"/>
-          </a:xfrm>
-          <a:prstGeom prst="rect">
-            <a:avLst/>
-          </a:prstGeom>
-        </p:spPr>
-        <p:txBody>
-          <a:bodyPr vert="horz" lIns="91440" tIns="45720" rIns="91440" bIns="45720" rtlCol="0" anchor="t">
-            <a:normAutofit/>
-          </a:bodyPr>
-          <a:lstStyle>
-            <a:lvl1pPr marL="228600" indent="-228600" algn="l" defTabSz="914400" rtl="0" eaLnBrk="1" latinLnBrk="0" hangingPunct="1">
-              <a:lnSpc>
-                <a:spcPct val="150000"/>
-              </a:lnSpc>
-              <a:spcBef>
-                <a:spcPts val="1000"/>
-              </a:spcBef>
-              <a:buFont typeface="Arial" panose="020B0604020202020204" pitchFamily="34" charset="0"/>
-              <a:buChar char="•"/>
-              <a:defRPr sz="2800" b="0" i="0" kern="1200">
-                <a:solidFill>
-                  <a:srgbClr val="667085"/>
-                </a:solidFill>
-                <a:latin typeface="Inter" panose="02000503000000020004" pitchFamily="2" charset="0"/>
-                <a:ea typeface="Inter" panose="02000503000000020004" pitchFamily="2" charset="0"/>
-                <a:cs typeface="Poppins" pitchFamily="2" charset="77"/>
-              </a:defRPr>
-            </a:lvl1pPr>
-            <a:lvl2pPr marL="685800" indent="-228600" algn="l" defTabSz="914400" rtl="0" eaLnBrk="1" latinLnBrk="0" hangingPunct="1">
-              <a:lnSpc>
-                <a:spcPct val="150000"/>
-              </a:lnSpc>
-              <a:spcBef>
-                <a:spcPts val="500"/>
-              </a:spcBef>
-              <a:buFont typeface="Arial" panose="020B0604020202020204" pitchFamily="34" charset="0"/>
-              <a:buChar char="•"/>
-              <a:defRPr sz="2400" b="0" i="0" kern="1200">
-                <a:solidFill>
-                  <a:srgbClr val="667085"/>
-                </a:solidFill>
-                <a:latin typeface="Inter" panose="02000503000000020004" pitchFamily="2" charset="0"/>
-                <a:ea typeface="Inter" panose="02000503000000020004" pitchFamily="2" charset="0"/>
-                <a:cs typeface="Poppins" pitchFamily="2" charset="77"/>
-              </a:defRPr>
-            </a:lvl2pPr>
-            <a:lvl3pPr marL="1143000" indent="-228600" algn="l" defTabSz="914400" rtl="0" eaLnBrk="1" latinLnBrk="0" hangingPunct="1">
-              <a:lnSpc>
-                <a:spcPct val="150000"/>
-              </a:lnSpc>
-              <a:spcBef>
-                <a:spcPts val="500"/>
-              </a:spcBef>
-              <a:buFont typeface="Arial" panose="020B0604020202020204" pitchFamily="34" charset="0"/>
-              <a:buChar char="•"/>
-              <a:defRPr sz="2000" b="0" i="0" kern="1200">
-                <a:solidFill>
-                  <a:srgbClr val="667085"/>
-                </a:solidFill>
-                <a:latin typeface="Inter" panose="02000503000000020004" pitchFamily="2" charset="0"/>
-                <a:ea typeface="Inter" panose="02000503000000020004" pitchFamily="2" charset="0"/>
-                <a:cs typeface="Poppins" pitchFamily="2" charset="77"/>
-              </a:defRPr>
-            </a:lvl3pPr>
-            <a:lvl4pPr marL="1600200" indent="-228600" algn="l" defTabSz="914400" rtl="0" eaLnBrk="1" latinLnBrk="0" hangingPunct="1">
-              <a:lnSpc>
-                <a:spcPct val="150000"/>
-              </a:lnSpc>
-              <a:spcBef>
-                <a:spcPts val="500"/>
-              </a:spcBef>
-              <a:buFont typeface="Arial" panose="020B0604020202020204" pitchFamily="34" charset="0"/>
-              <a:buChar char="•"/>
-              <a:defRPr sz="1800" b="0" i="0" kern="1200">
-                <a:solidFill>
-                  <a:srgbClr val="667085"/>
-                </a:solidFill>
-                <a:latin typeface="Inter" panose="02000503000000020004" pitchFamily="2" charset="0"/>
-                <a:ea typeface="Inter" panose="02000503000000020004" pitchFamily="2" charset="0"/>
-                <a:cs typeface="Poppins" pitchFamily="2" charset="77"/>
-              </a:defRPr>
-            </a:lvl4pPr>
-            <a:lvl5pPr marL="2057400" indent="-228600" algn="l" defTabSz="914400" rtl="0" eaLnBrk="1" latinLnBrk="0" hangingPunct="1">
-              <a:lnSpc>
-                <a:spcPct val="150000"/>
-              </a:lnSpc>
-              <a:spcBef>
-                <a:spcPts val="500"/>
-              </a:spcBef>
-              <a:buFont typeface="Arial" panose="020B0604020202020204" pitchFamily="34" charset="0"/>
-              <a:buChar char="•"/>
-              <a:defRPr sz="1800" b="0" i="0" kern="1200">
-                <a:solidFill>
-                  <a:srgbClr val="667085"/>
-                </a:solidFill>
-                <a:latin typeface="Inter" panose="02000503000000020004" pitchFamily="2" charset="0"/>
-                <a:ea typeface="Inter" panose="02000503000000020004" pitchFamily="2" charset="0"/>
-                <a:cs typeface="Poppins" pitchFamily="2" charset="77"/>
-              </a:defRPr>
-            </a:lvl5pPr>
-            <a:lvl6pPr marL="2514600" indent="-228600" algn="l" defTabSz="914400" rtl="0" eaLnBrk="1" latinLnBrk="0" hangingPunct="1">
-              <a:lnSpc>
-                <a:spcPct val="90000"/>
-              </a:lnSpc>
-              <a:spcBef>
-                <a:spcPts val="500"/>
-              </a:spcBef>
-              <a:buFont typeface="Arial" panose="020B0604020202020204" pitchFamily="34" charset="0"/>
-              <a:buChar char="•"/>
-              <a:defRPr sz="1800" kern="1200">
-                <a:solidFill>
-                  <a:schemeClr val="tx1"/>
-                </a:solidFill>
-                <a:latin typeface="+mn-lt"/>
-                <a:ea typeface="+mn-ea"/>
-                <a:cs typeface="+mn-cs"/>
-              </a:defRPr>
-            </a:lvl6pPr>
-            <a:lvl7pPr marL="2971800" indent="-228600" algn="l" defTabSz="914400" rtl="0" eaLnBrk="1" latinLnBrk="0" hangingPunct="1">
-              <a:lnSpc>
-                <a:spcPct val="90000"/>
-              </a:lnSpc>
-              <a:spcBef>
-                <a:spcPts val="500"/>
-              </a:spcBef>
-              <a:buFont typeface="Arial" panose="020B0604020202020204" pitchFamily="34" charset="0"/>
-              <a:buChar char="•"/>
-              <a:defRPr sz="1800" kern="1200">
-                <a:solidFill>
-                  <a:schemeClr val="tx1"/>
-                </a:solidFill>
-                <a:latin typeface="+mn-lt"/>
-                <a:ea typeface="+mn-ea"/>
-                <a:cs typeface="+mn-cs"/>
-              </a:defRPr>
-            </a:lvl7pPr>
-            <a:lvl8pPr marL="3429000" indent="-228600" algn="l" defTabSz="914400" rtl="0" eaLnBrk="1" latinLnBrk="0" hangingPunct="1">
-              <a:lnSpc>
-                <a:spcPct val="90000"/>
-              </a:lnSpc>
-              <a:spcBef>
-                <a:spcPts val="500"/>
-              </a:spcBef>
-              <a:buFont typeface="Arial" panose="020B0604020202020204" pitchFamily="34" charset="0"/>
-              <a:buChar char="•"/>
-              <a:defRPr sz="1800" kern="1200">
-                <a:solidFill>
-                  <a:schemeClr val="tx1"/>
-                </a:solidFill>
-                <a:latin typeface="+mn-lt"/>
-                <a:ea typeface="+mn-ea"/>
-                <a:cs typeface="+mn-cs"/>
-              </a:defRPr>
-            </a:lvl8pPr>
-            <a:lvl9pPr marL="3886200" indent="-228600" algn="l" defTabSz="914400" rtl="0" eaLnBrk="1" latinLnBrk="0" hangingPunct="1">
-              <a:lnSpc>
-                <a:spcPct val="90000"/>
-              </a:lnSpc>
-              <a:spcBef>
-                <a:spcPts val="500"/>
-              </a:spcBef>
-              <a:buFont typeface="Arial" panose="020B0604020202020204" pitchFamily="34" charset="0"/>
-              <a:buChar char="•"/>
-              <a:defRPr sz="1800" kern="1200">
-                <a:solidFill>
-                  <a:schemeClr val="tx1"/>
-                </a:solidFill>
-                <a:latin typeface="+mn-lt"/>
-                <a:ea typeface="+mn-ea"/>
-                <a:cs typeface="+mn-cs"/>
-              </a:defRPr>
-            </a:lvl9pPr>
-          </a:lstStyle>
-          <a:p>
-            <a:r>
-              <a:rPr lang="en-US">
-                <a:latin typeface="Inter"/>
-                <a:cs typeface="Poppins"/>
-              </a:rPr>
-              <a:t>Another way we can utilize the beta is by pairing the beta with the correlation of the function, as this will allow us to better understand how effective the beta, and with it our forcast, will be, as well as telling us the direction of the stocks and index relationship.</a:t>
-            </a:r>
-            <a:endParaRPr lang="en-US"/>
-          </a:p>
-        </p:txBody>
-      </p:sp>
-      <p:pic>
-        <p:nvPicPr>
-          <p:cNvPr id="11" name="Picture 10" descr="Beta Formula (Top 3 Methods) | Step by Step Examples to Calculate Beta">
-            <a:extLst>
-              <a:ext uri="{FF2B5EF4-FFF2-40B4-BE49-F238E27FC236}">
-                <a16:creationId xmlns:a16="http://schemas.microsoft.com/office/drawing/2014/main" id="{10E02E43-2EA5-9D91-F3E1-D105493A5139}"/>
-              </a:ext>
-            </a:extLst>
-          </p:cNvPr>
-          <p:cNvPicPr>
-            <a:picLocks noChangeAspect="1"/>
-          </p:cNvPicPr>
-          <p:nvPr/>
-        </p:nvPicPr>
-        <p:blipFill>
-          <a:blip r:embed="rId4"/>
-          <a:srcRect l="3643" t="75731" r="5519" b="5848"/>
-          <a:stretch/>
-        </p:blipFill>
-        <p:spPr>
-          <a:xfrm>
-            <a:off x="14625448" y="11965073"/>
-            <a:ext cx="8843688" cy="805506"/>
-          </a:xfrm>
-          <a:prstGeom prst="rect">
-            <a:avLst/>
-          </a:prstGeom>
-        </p:spPr>
-      </p:pic>
-    </p:spTree>
-    <p:extLst>
-      <p:ext uri="{BB962C8B-B14F-4D97-AF65-F5344CB8AC3E}">
-        <p14:creationId xmlns:p14="http://schemas.microsoft.com/office/powerpoint/2010/main" val="1858521055"/>
       </p:ext>
     </p:extLst>
   </p:cSld>
@@ -23987,14 +24989,10 @@
   <ds:schemaRefs>
     <ds:schemaRef ds:uri="096a6368-7521-4ee3-8a8d-a1311be675ab"/>
     <ds:schemaRef ds:uri="6c9a0161-f457-41a4-b533-3bd003b535df"/>
-    <ds:schemaRef ds:uri="http://purl.org/dc/dcmitype/"/>
-    <ds:schemaRef ds:uri="http://purl.org/dc/elements/1.1/"/>
-    <ds:schemaRef ds:uri="http://purl.org/dc/terms/"/>
-    <ds:schemaRef ds:uri="http://schemas.microsoft.com/office/2006/documentManagement/types"/>
     <ds:schemaRef ds:uri="http://schemas.microsoft.com/office/2006/metadata/properties"/>
     <ds:schemaRef ds:uri="http://schemas.microsoft.com/office/infopath/2007/PartnerControls"/>
-    <ds:schemaRef ds:uri="http://schemas.openxmlformats.org/package/2006/metadata/core-properties"/>
-    <ds:schemaRef ds:uri="http://www.w3.org/XML/1998/namespace"/>
+    <ds:schemaRef ds:uri="http://www.w3.org/2000/xmlns/"/>
+    <ds:schemaRef ds:uri="http://www.w3.org/2001/XMLSchema-instance"/>
   </ds:schemaRefs>
 </ds:datastoreItem>
 </file>
@@ -24004,16 +25002,17 @@
   <ds:schemaRefs>
     <ds:schemaRef ds:uri="096a6368-7521-4ee3-8a8d-a1311be675ab"/>
     <ds:schemaRef ds:uri="6c9a0161-f457-41a4-b533-3bd003b535df"/>
+    <ds:schemaRef ds:uri="http://schemas.microsoft.com/office/2006/metadata/contentType"/>
+    <ds:schemaRef ds:uri="http://schemas.microsoft.com/office/2006/metadata/properties/metaAttributes"/>
+    <ds:schemaRef ds:uri="http://www.w3.org/2000/xmlns/"/>
+    <ds:schemaRef ds:uri="http://www.w3.org/2001/XMLSchema"/>
+    <ds:schemaRef ds:uri="http://schemas.microsoft.com/office/2006/metadata/properties"/>
+    <ds:schemaRef ds:uri="http://schemas.microsoft.com/office/2006/documentManagement/types"/>
+    <ds:schemaRef ds:uri="http://schemas.microsoft.com/office/infopath/2007/PartnerControls"/>
+    <ds:schemaRef ds:uri="http://schemas.openxmlformats.org/package/2006/metadata/core-properties"/>
     <ds:schemaRef ds:uri="http://purl.org/dc/elements/1.1/"/>
     <ds:schemaRef ds:uri="http://purl.org/dc/terms/"/>
     <ds:schemaRef ds:uri="http://schemas.microsoft.com/internal/obd"/>
-    <ds:schemaRef ds:uri="http://schemas.microsoft.com/office/2006/documentManagement/types"/>
-    <ds:schemaRef ds:uri="http://schemas.microsoft.com/office/2006/metadata/contentType"/>
-    <ds:schemaRef ds:uri="http://schemas.microsoft.com/office/2006/metadata/properties"/>
-    <ds:schemaRef ds:uri="http://schemas.microsoft.com/office/2006/metadata/properties/metaAttributes"/>
-    <ds:schemaRef ds:uri="http://schemas.microsoft.com/office/infopath/2007/PartnerControls"/>
-    <ds:schemaRef ds:uri="http://schemas.openxmlformats.org/package/2006/metadata/core-properties"/>
-    <ds:schemaRef ds:uri="http://www.w3.org/2001/XMLSchema"/>
   </ds:schemaRefs>
 </ds:datastoreItem>
 </file>